--- a/pptx/Module13_Agrégation_GROUP_BY_HAVING.pptx
+++ b/pptx/Module13_Agrégation_GROUP_BY_HAVING.pptx
@@ -14,9 +14,10 @@
     <p:sldId id="262" r:id="rId8"/>
     <p:sldId id="263" r:id="rId9"/>
     <p:sldId id="264" r:id="rId10"/>
+    <p:sldId id="265" r:id="rId11"/>
   </p:sldIdLst>
   <p:notesMasterIdLst>
-    <p:notesMasterId r:id="rId11"/>
+    <p:notesMasterId r:id="rId12"/>
   </p:notesMasterIdLst>
   <p:sldSz cx="9144000" cy="5143500"/>
   <p:notesSz cx="5143500" cy="9144000"/>
@@ -552,6 +553,94 @@
 </p:notes>
 </file>
 
+<file path=ppt/notesSlides/notesSlide10.xml><?xml version="1.0" encoding="utf-8"?>
+<p:notes xmlns:a="http://schemas.openxmlformats.org/drawingml/2006/main" xmlns:r="http://schemas.openxmlformats.org/officeDocument/2006/relationships" xmlns:p="http://schemas.openxmlformats.org/presentationml/2006/main">
+  <p:cSld>
+    <p:spTree>
+      <p:nvGrpSpPr>
+        <p:cNvPr id="1" name=""/>
+        <p:cNvGrpSpPr/>
+        <p:nvPr/>
+      </p:nvGrpSpPr>
+      <p:grpSpPr>
+        <a:xfrm>
+          <a:off x="0" y="0"/>
+          <a:ext cx="0" cy="0"/>
+          <a:chOff x="0" y="0"/>
+          <a:chExt cx="0" cy="0"/>
+        </a:xfrm>
+      </p:grpSpPr>
+      <p:sp>
+        <p:nvSpPr>
+          <p:cNvPr id="2" name="Slide Image Placeholder 1"/>
+          <p:cNvSpPr>
+            <a:spLocks noGrp="1" noRot="1" noChangeAspect="1"/>
+          </p:cNvSpPr>
+          <p:nvPr>
+            <p:ph type="sldImg"/>
+          </p:nvPr>
+        </p:nvSpPr>
+        <p:spPr/>
+      </p:sp>
+      <p:sp>
+        <p:nvSpPr>
+          <p:cNvPr id="3" name="Notes Placeholder 2"/>
+          <p:cNvSpPr>
+            <a:spLocks noGrp="1"/>
+          </p:cNvSpPr>
+          <p:nvPr>
+            <p:ph type="body" idx="1"/>
+          </p:nvPr>
+        </p:nvSpPr>
+        <p:spPr/>
+        <p:txBody>
+          <a:bodyPr/>
+          <a:lstStyle/>
+          <a:p>
+            <a:r>
+              <a:rPr lang="en-US" dirty="0"/>
+              <a:t/>
+            </a:r>
+            <a:endParaRPr lang="en-US" dirty="0"/>
+          </a:p>
+        </p:txBody>
+      </p:sp>
+      <p:sp>
+        <p:nvSpPr>
+          <p:cNvPr id="4" name="Slide Number Placeholder 3"/>
+          <p:cNvSpPr>
+            <a:spLocks noGrp="1"/>
+          </p:cNvSpPr>
+          <p:nvPr>
+            <p:ph type="sldNum" sz="quarter" idx="10"/>
+          </p:nvPr>
+        </p:nvSpPr>
+        <p:spPr/>
+        <p:txBody>
+          <a:bodyPr/>
+          <a:lstStyle/>
+          <a:p>
+            <a:fld id="{F7021451-1387-4CA6-816F-3879F97B5CBC}" type="slidenum">
+              <a:rPr lang="en-US"/>
+              <a:t>10</a:t>
+            </a:fld>
+            <a:endParaRPr lang="en-US"/>
+          </a:p>
+        </p:txBody>
+      </p:sp>
+    </p:spTree>
+    <p:extLst>
+      <p:ext uri="{BB962C8B-B14F-4D97-AF65-F5344CB8AC3E}">
+        <p14:creationId xmlns:p14="http://schemas.microsoft.com/office/powerpoint/2010/main" val="1024086991"/>
+      </p:ext>
+    </p:extLst>
+  </p:cSld>
+  <p:clrMapOvr>
+    <a:masterClrMapping/>
+  </p:clrMapOvr>
+</p:notes>
+</file>
+
 <file path=ppt/notesSlides/notesSlide2.xml><?xml version="1.0" encoding="utf-8"?>
 <p:notes xmlns:a="http://schemas.openxmlformats.org/drawingml/2006/main" xmlns:r="http://schemas.openxmlformats.org/officeDocument/2006/relationships" xmlns:p="http://schemas.openxmlformats.org/presentationml/2006/main">
   <p:cSld>
@@ -598,7 +687,7 @@
           <a:p>
             <a:r>
               <a:rPr lang="en-US" dirty="0"/>
-              <a:t>COUNT(*) vs COUNT(col) est une question classique d'examen.</a:t>
+              <a:t>COUNT(*) vs COUNT(col) : question classique d'examen.</a:t>
             </a:r>
             <a:endParaRPr lang="en-US" dirty="0"/>
           </a:p>
@@ -686,7 +775,7 @@
           <a:p>
             <a:r>
               <a:rPr lang="en-US" dirty="0"/>
-              <a:t>Visualiser les groupes : dessiner au tableau comment GROUP BY 'découpe' les données en groupes.</a:t>
+              <a:t>Visualiser les groupes au tableau : dessiner comment GROUP BY decoupe les donnees.</a:t>
             </a:r>
             <a:endParaRPr lang="en-US" dirty="0"/>
           </a:p>
@@ -774,7 +863,7 @@
           <a:p>
             <a:r>
               <a:rPr lang="en-US" dirty="0"/>
-              <a:t>L'ordre d'exécution est crucial pour comprendre pourquoi HAVING et pas WHERE.</a:t>
+              <a:t>L'ordre d'execution est crucial. Dessiner au tableau.</a:t>
             </a:r>
             <a:endParaRPr lang="en-US" dirty="0"/>
           </a:p>
@@ -862,7 +951,7 @@
           <a:p>
             <a:r>
               <a:rPr lang="en-US" dirty="0"/>
-              <a:t>Ces fonctions sont très utiles pour le 'dashboard' SQL de SwissSound.</a:t>
+              <a:t>Ces fonctions sont utiles pour le dashboard SQL.</a:t>
             </a:r>
             <a:endParaRPr lang="en-US" dirty="0"/>
           </a:p>
@@ -950,7 +1039,7 @@
           <a:p>
             <a:r>
               <a:rPr lang="en-US" dirty="0"/>
-              <a:t>Les sous-requêtes sont puissantes mais peuvent être lentes. Montrer l'équivalent avec JOIN.</a:t>
+              <a:t>Les sous-requetes sont puissantes. Montrer l'equivalent JOIN.</a:t>
             </a:r>
             <a:endParaRPr lang="en-US" dirty="0"/>
           </a:p>
@@ -1038,7 +1127,7 @@
           <a:p>
             <a:r>
               <a:rPr lang="en-US" dirty="0"/>
-              <a:t>Le dashboard SQL est un excellent exercice pour M3 (extraction de données significatives).</a:t>
+              <a:t>Dashboard SQL = excellent exemple pour M3 (extraction significative).</a:t>
             </a:r>
             <a:endParaRPr lang="en-US" dirty="0"/>
           </a:p>
@@ -1126,7 +1215,7 @@
           <a:p>
             <a:r>
               <a:rPr lang="en-US" dirty="0"/>
-              <a:t/>
+              <a:t>Le dashboard SQL est le point culminant du module.</a:t>
             </a:r>
             <a:endParaRPr lang="en-US" dirty="0"/>
           </a:p>
@@ -1695,7 +1784,7 @@
               <a:buNone/>
             </a:pPr>
             <a:r>
-              <a:rPr lang="en-US" sz="3200" b="1" dirty="0">
+              <a:rPr lang="en-US" sz="2800" b="1" dirty="0">
                 <a:solidFill>
                   <a:srgbClr val="FFFFFF"/>
                 </a:solidFill>
@@ -1703,9 +1792,9 @@
                 <a:ea typeface="Trebuchet MS" pitchFamily="34" charset="-122"/>
                 <a:cs typeface="Trebuchet MS" pitchFamily="34" charset="-120"/>
               </a:rPr>
-              <a:t>Agrégation GROUP BY HAVING</a:t>
-            </a:r>
-            <a:endParaRPr lang="en-US" sz="3200" dirty="0"/>
+              <a:t>Agregation GROUP BY HAVING</a:t>
+            </a:r>
+            <a:endParaRPr lang="en-US" sz="2800" dirty="0"/>
           </a:p>
         </p:txBody>
       </p:sp>
@@ -1734,7 +1823,7 @@
               <a:buNone/>
             </a:pPr>
             <a:r>
-              <a:rPr lang="en-US" sz="1500" dirty="0">
+              <a:rPr lang="en-US" sz="1400" dirty="0">
                 <a:solidFill>
                   <a:srgbClr val="CCCCCC"/>
                 </a:solidFill>
@@ -1742,9 +1831,9 @@
                 <a:ea typeface="Calibri" pitchFamily="34" charset="-122"/>
                 <a:cs typeface="Calibri" pitchFamily="34" charset="-120"/>
               </a:rPr>
-              <a:t>COUNT · SUM · AVG · Fonctions MySQL</a:t>
-            </a:r>
-            <a:endParaRPr lang="en-US" sz="1500" dirty="0"/>
+              <a:t>COUNT, SUM, AVG, MIN, MAX, fonctions MySQL, sous-requetes</a:t>
+            </a:r>
+            <a:endParaRPr lang="en-US" sz="1400" dirty="0"/>
           </a:p>
         </p:txBody>
       </p:sp>
@@ -1784,6 +1873,903 @@
               <a:t>SwissSound Studios | BTEC: P3 M3 | LO2</a:t>
             </a:r>
             <a:endParaRPr lang="en-US" sz="1100" dirty="0"/>
+          </a:p>
+        </p:txBody>
+      </p:sp>
+    </p:spTree>
+  </p:cSld>
+  <p:clrMapOvr>
+    <a:masterClrMapping/>
+  </p:clrMapOvr>
+</p:sld>
+</file>
+
+<file path=ppt/slides/slide10.xml><?xml version="1.0" encoding="utf-8"?>
+<p:sld xmlns:a="http://schemas.openxmlformats.org/drawingml/2006/main" xmlns:r="http://schemas.openxmlformats.org/officeDocument/2006/relationships" xmlns:p="http://schemas.openxmlformats.org/presentationml/2006/main">
+  <p:cSld name="Slide 10">
+    <p:bg>
+      <p:bgPr>
+        <a:solidFill>
+          <a:srgbClr val="F5F7FA"/>
+        </a:solidFill>
+      </p:bgPr>
+    </p:bg>
+    <p:spTree>
+      <p:nvGrpSpPr>
+        <p:cNvPr id="1" name=""/>
+        <p:cNvGrpSpPr/>
+        <p:nvPr/>
+      </p:nvGrpSpPr>
+      <p:grpSpPr>
+        <a:xfrm>
+          <a:off x="0" y="0"/>
+          <a:ext cx="0" cy="0"/>
+          <a:chOff x="0" y="0"/>
+          <a:chExt cx="0" cy="0"/>
+        </a:xfrm>
+      </p:grpSpPr>
+      <p:sp>
+        <p:nvSpPr>
+          <p:cNvPr id="2" name="Text 0"/>
+          <p:cNvSpPr/>
+          <p:nvPr/>
+        </p:nvSpPr>
+        <p:spPr>
+          <a:xfrm>
+            <a:off x="457200" y="137160"/>
+            <a:ext cx="5486400" cy="365760"/>
+          </a:xfrm>
+          <a:prstGeom prst="rect">
+            <a:avLst/>
+          </a:prstGeom>
+          <a:noFill/>
+          <a:ln/>
+        </p:spPr>
+        <p:txBody>
+          <a:bodyPr wrap="square" lIns="0" tIns="0" rIns="0" bIns="0" rtlCol="0" anchor="ctr"/>
+          <a:lstStyle/>
+          <a:p>
+            <a:pPr indent="0" marL="0">
+              <a:buNone/>
+            </a:pPr>
+            <a:r>
+              <a:rPr lang="en-US" sz="1600" b="1" dirty="0">
+                <a:solidFill>
+                  <a:srgbClr val="0D47A1"/>
+                </a:solidFill>
+                <a:latin typeface="Trebuchet MS" pitchFamily="34" charset="0"/>
+                <a:ea typeface="Trebuchet MS" pitchFamily="34" charset="-122"/>
+                <a:cs typeface="Trebuchet MS" pitchFamily="34" charset="-120"/>
+              </a:rPr>
+              <a:t>Memo Module 13</a:t>
+            </a:r>
+            <a:endParaRPr lang="en-US" sz="1600" dirty="0"/>
+          </a:p>
+        </p:txBody>
+      </p:sp>
+      <p:sp>
+        <p:nvSpPr>
+          <p:cNvPr id="3" name="Shape 1"/>
+          <p:cNvSpPr/>
+          <p:nvPr/>
+        </p:nvSpPr>
+        <p:spPr>
+          <a:xfrm>
+            <a:off x="457200" y="594360"/>
+            <a:ext cx="2286000" cy="411480"/>
+          </a:xfrm>
+          <a:prstGeom prst="rect">
+            <a:avLst/>
+          </a:prstGeom>
+          <a:solidFill>
+            <a:srgbClr val="E3F2FD"/>
+          </a:solidFill>
+          <a:ln/>
+        </p:spPr>
+      </p:sp>
+      <p:sp>
+        <p:nvSpPr>
+          <p:cNvPr id="4" name="Text 2"/>
+          <p:cNvSpPr/>
+          <p:nvPr/>
+        </p:nvSpPr>
+        <p:spPr>
+          <a:xfrm>
+            <a:off x="548640" y="594360"/>
+            <a:ext cx="2103120" cy="411480"/>
+          </a:xfrm>
+          <a:prstGeom prst="rect">
+            <a:avLst/>
+          </a:prstGeom>
+          <a:noFill/>
+          <a:ln/>
+        </p:spPr>
+        <p:txBody>
+          <a:bodyPr wrap="square" lIns="0" tIns="0" rIns="0" bIns="0" rtlCol="0" anchor="ctr"/>
+          <a:lstStyle/>
+          <a:p>
+            <a:pPr indent="0" marL="0">
+              <a:buNone/>
+            </a:pPr>
+            <a:r>
+              <a:rPr lang="en-US" sz="900" b="1" dirty="0">
+                <a:solidFill>
+                  <a:srgbClr val="0D47A1"/>
+                </a:solidFill>
+                <a:latin typeface="Trebuchet MS" pitchFamily="34" charset="0"/>
+                <a:ea typeface="Trebuchet MS" pitchFamily="34" charset="-122"/>
+                <a:cs typeface="Trebuchet MS" pitchFamily="34" charset="-120"/>
+              </a:rPr>
+              <a:t>COUNT(*) vs COUNT(col)</a:t>
+            </a:r>
+            <a:endParaRPr lang="en-US" sz="900" dirty="0"/>
+          </a:p>
+        </p:txBody>
+      </p:sp>
+      <p:sp>
+        <p:nvSpPr>
+          <p:cNvPr id="5" name="Shape 3"/>
+          <p:cNvSpPr/>
+          <p:nvPr/>
+        </p:nvSpPr>
+        <p:spPr>
+          <a:xfrm>
+            <a:off x="2743200" y="594360"/>
+            <a:ext cx="5943600" cy="411480"/>
+          </a:xfrm>
+          <a:prstGeom prst="rect">
+            <a:avLst/>
+          </a:prstGeom>
+          <a:solidFill>
+            <a:srgbClr val="E3F2FD"/>
+          </a:solidFill>
+          <a:ln/>
+        </p:spPr>
+      </p:sp>
+      <p:sp>
+        <p:nvSpPr>
+          <p:cNvPr id="6" name="Text 4"/>
+          <p:cNvSpPr/>
+          <p:nvPr/>
+        </p:nvSpPr>
+        <p:spPr>
+          <a:xfrm>
+            <a:off x="2834640" y="594360"/>
+            <a:ext cx="5760720" cy="411480"/>
+          </a:xfrm>
+          <a:prstGeom prst="rect">
+            <a:avLst/>
+          </a:prstGeom>
+          <a:noFill/>
+          <a:ln/>
+        </p:spPr>
+        <p:txBody>
+          <a:bodyPr wrap="square" lIns="0" tIns="0" rIns="0" bIns="0" rtlCol="0" anchor="ctr"/>
+          <a:lstStyle/>
+          <a:p>
+            <a:pPr indent="0" marL="0">
+              <a:buNone/>
+            </a:pPr>
+            <a:r>
+              <a:rPr lang="en-US" sz="900" dirty="0">
+                <a:solidFill>
+                  <a:srgbClr val="333333"/>
+                </a:solidFill>
+                <a:latin typeface="Calibri" pitchFamily="34" charset="0"/>
+                <a:ea typeface="Calibri" pitchFamily="34" charset="-122"/>
+                <a:cs typeface="Calibri" pitchFamily="34" charset="-120"/>
+              </a:rPr>
+              <a:t>* = toutes lignes, col = ignore NULL</a:t>
+            </a:r>
+            <a:endParaRPr lang="en-US" sz="900" dirty="0"/>
+          </a:p>
+        </p:txBody>
+      </p:sp>
+      <p:sp>
+        <p:nvSpPr>
+          <p:cNvPr id="7" name="Shape 5"/>
+          <p:cNvSpPr/>
+          <p:nvPr/>
+        </p:nvSpPr>
+        <p:spPr>
+          <a:xfrm>
+            <a:off x="457200" y="1033272"/>
+            <a:ext cx="2286000" cy="411480"/>
+          </a:xfrm>
+          <a:prstGeom prst="rect">
+            <a:avLst/>
+          </a:prstGeom>
+          <a:solidFill>
+            <a:srgbClr val="F0F0F0"/>
+          </a:solidFill>
+          <a:ln/>
+        </p:spPr>
+      </p:sp>
+      <p:sp>
+        <p:nvSpPr>
+          <p:cNvPr id="8" name="Text 6"/>
+          <p:cNvSpPr/>
+          <p:nvPr/>
+        </p:nvSpPr>
+        <p:spPr>
+          <a:xfrm>
+            <a:off x="548640" y="1033272"/>
+            <a:ext cx="2103120" cy="411480"/>
+          </a:xfrm>
+          <a:prstGeom prst="rect">
+            <a:avLst/>
+          </a:prstGeom>
+          <a:noFill/>
+          <a:ln/>
+        </p:spPr>
+        <p:txBody>
+          <a:bodyPr wrap="square" lIns="0" tIns="0" rIns="0" bIns="0" rtlCol="0" anchor="ctr"/>
+          <a:lstStyle/>
+          <a:p>
+            <a:pPr indent="0" marL="0">
+              <a:buNone/>
+            </a:pPr>
+            <a:r>
+              <a:rPr lang="en-US" sz="900" b="1" dirty="0">
+                <a:solidFill>
+                  <a:srgbClr val="0D47A1"/>
+                </a:solidFill>
+                <a:latin typeface="Trebuchet MS" pitchFamily="34" charset="0"/>
+                <a:ea typeface="Trebuchet MS" pitchFamily="34" charset="-122"/>
+                <a:cs typeface="Trebuchet MS" pitchFamily="34" charset="-120"/>
+              </a:rPr>
+              <a:t>GROUP BY</a:t>
+            </a:r>
+            <a:endParaRPr lang="en-US" sz="900" dirty="0"/>
+          </a:p>
+        </p:txBody>
+      </p:sp>
+      <p:sp>
+        <p:nvSpPr>
+          <p:cNvPr id="9" name="Shape 7"/>
+          <p:cNvSpPr/>
+          <p:nvPr/>
+        </p:nvSpPr>
+        <p:spPr>
+          <a:xfrm>
+            <a:off x="2743200" y="1033272"/>
+            <a:ext cx="5943600" cy="411480"/>
+          </a:xfrm>
+          <a:prstGeom prst="rect">
+            <a:avLst/>
+          </a:prstGeom>
+          <a:solidFill>
+            <a:srgbClr val="F0F0F0"/>
+          </a:solidFill>
+          <a:ln/>
+        </p:spPr>
+      </p:sp>
+      <p:sp>
+        <p:nvSpPr>
+          <p:cNvPr id="10" name="Text 8"/>
+          <p:cNvSpPr/>
+          <p:nvPr/>
+        </p:nvSpPr>
+        <p:spPr>
+          <a:xfrm>
+            <a:off x="2834640" y="1033272"/>
+            <a:ext cx="5760720" cy="411480"/>
+          </a:xfrm>
+          <a:prstGeom prst="rect">
+            <a:avLst/>
+          </a:prstGeom>
+          <a:noFill/>
+          <a:ln/>
+        </p:spPr>
+        <p:txBody>
+          <a:bodyPr wrap="square" lIns="0" tIns="0" rIns="0" bIns="0" rtlCol="0" anchor="ctr"/>
+          <a:lstStyle/>
+          <a:p>
+            <a:pPr indent="0" marL="0">
+              <a:buNone/>
+            </a:pPr>
+            <a:r>
+              <a:rPr lang="en-US" sz="900" dirty="0">
+                <a:solidFill>
+                  <a:srgbClr val="333333"/>
+                </a:solidFill>
+                <a:latin typeface="Calibri" pitchFamily="34" charset="0"/>
+                <a:ea typeface="Calibri" pitchFamily="34" charset="-122"/>
+                <a:cs typeface="Calibri" pitchFamily="34" charset="-120"/>
+              </a:rPr>
+              <a:t>Obligatoire si SELECT melange agregation + colonnes</a:t>
+            </a:r>
+            <a:endParaRPr lang="en-US" sz="900" dirty="0"/>
+          </a:p>
+        </p:txBody>
+      </p:sp>
+      <p:sp>
+        <p:nvSpPr>
+          <p:cNvPr id="11" name="Shape 9"/>
+          <p:cNvSpPr/>
+          <p:nvPr/>
+        </p:nvSpPr>
+        <p:spPr>
+          <a:xfrm>
+            <a:off x="457200" y="1472184"/>
+            <a:ext cx="2286000" cy="411480"/>
+          </a:xfrm>
+          <a:prstGeom prst="rect">
+            <a:avLst/>
+          </a:prstGeom>
+          <a:solidFill>
+            <a:srgbClr val="E3F2FD"/>
+          </a:solidFill>
+          <a:ln/>
+        </p:spPr>
+      </p:sp>
+      <p:sp>
+        <p:nvSpPr>
+          <p:cNvPr id="12" name="Text 10"/>
+          <p:cNvSpPr/>
+          <p:nvPr/>
+        </p:nvSpPr>
+        <p:spPr>
+          <a:xfrm>
+            <a:off x="548640" y="1472184"/>
+            <a:ext cx="2103120" cy="411480"/>
+          </a:xfrm>
+          <a:prstGeom prst="rect">
+            <a:avLst/>
+          </a:prstGeom>
+          <a:noFill/>
+          <a:ln/>
+        </p:spPr>
+        <p:txBody>
+          <a:bodyPr wrap="square" lIns="0" tIns="0" rIns="0" bIns="0" rtlCol="0" anchor="ctr"/>
+          <a:lstStyle/>
+          <a:p>
+            <a:pPr indent="0" marL="0">
+              <a:buNone/>
+            </a:pPr>
+            <a:r>
+              <a:rPr lang="en-US" sz="900" b="1" dirty="0">
+                <a:solidFill>
+                  <a:srgbClr val="0D47A1"/>
+                </a:solidFill>
+                <a:latin typeface="Trebuchet MS" pitchFamily="34" charset="0"/>
+                <a:ea typeface="Trebuchet MS" pitchFamily="34" charset="-122"/>
+                <a:cs typeface="Trebuchet MS" pitchFamily="34" charset="-120"/>
+              </a:rPr>
+              <a:t>HAVING</a:t>
+            </a:r>
+            <a:endParaRPr lang="en-US" sz="900" dirty="0"/>
+          </a:p>
+        </p:txBody>
+      </p:sp>
+      <p:sp>
+        <p:nvSpPr>
+          <p:cNvPr id="13" name="Shape 11"/>
+          <p:cNvSpPr/>
+          <p:nvPr/>
+        </p:nvSpPr>
+        <p:spPr>
+          <a:xfrm>
+            <a:off x="2743200" y="1472184"/>
+            <a:ext cx="5943600" cy="411480"/>
+          </a:xfrm>
+          <a:prstGeom prst="rect">
+            <a:avLst/>
+          </a:prstGeom>
+          <a:solidFill>
+            <a:srgbClr val="E3F2FD"/>
+          </a:solidFill>
+          <a:ln/>
+        </p:spPr>
+      </p:sp>
+      <p:sp>
+        <p:nvSpPr>
+          <p:cNvPr id="14" name="Text 12"/>
+          <p:cNvSpPr/>
+          <p:nvPr/>
+        </p:nvSpPr>
+        <p:spPr>
+          <a:xfrm>
+            <a:off x="2834640" y="1472184"/>
+            <a:ext cx="5760720" cy="411480"/>
+          </a:xfrm>
+          <a:prstGeom prst="rect">
+            <a:avLst/>
+          </a:prstGeom>
+          <a:noFill/>
+          <a:ln/>
+        </p:spPr>
+        <p:txBody>
+          <a:bodyPr wrap="square" lIns="0" tIns="0" rIns="0" bIns="0" rtlCol="0" anchor="ctr"/>
+          <a:lstStyle/>
+          <a:p>
+            <a:pPr indent="0" marL="0">
+              <a:buNone/>
+            </a:pPr>
+            <a:r>
+              <a:rPr lang="en-US" sz="900" dirty="0">
+                <a:solidFill>
+                  <a:srgbClr val="333333"/>
+                </a:solidFill>
+                <a:latin typeface="Calibri" pitchFamily="34" charset="0"/>
+                <a:ea typeface="Calibri" pitchFamily="34" charset="-122"/>
+                <a:cs typeface="Calibri" pitchFamily="34" charset="-120"/>
+              </a:rPr>
+              <a:t>Filtre les GROUPES (apres). WHERE filtre les LIGNES (avant)</a:t>
+            </a:r>
+            <a:endParaRPr lang="en-US" sz="900" dirty="0"/>
+          </a:p>
+        </p:txBody>
+      </p:sp>
+      <p:sp>
+        <p:nvSpPr>
+          <p:cNvPr id="15" name="Shape 13"/>
+          <p:cNvSpPr/>
+          <p:nvPr/>
+        </p:nvSpPr>
+        <p:spPr>
+          <a:xfrm>
+            <a:off x="457200" y="1911096"/>
+            <a:ext cx="2286000" cy="411480"/>
+          </a:xfrm>
+          <a:prstGeom prst="rect">
+            <a:avLst/>
+          </a:prstGeom>
+          <a:solidFill>
+            <a:srgbClr val="F0F0F0"/>
+          </a:solidFill>
+          <a:ln/>
+        </p:spPr>
+      </p:sp>
+      <p:sp>
+        <p:nvSpPr>
+          <p:cNvPr id="16" name="Text 14"/>
+          <p:cNvSpPr/>
+          <p:nvPr/>
+        </p:nvSpPr>
+        <p:spPr>
+          <a:xfrm>
+            <a:off x="548640" y="1911096"/>
+            <a:ext cx="2103120" cy="411480"/>
+          </a:xfrm>
+          <a:prstGeom prst="rect">
+            <a:avLst/>
+          </a:prstGeom>
+          <a:noFill/>
+          <a:ln/>
+        </p:spPr>
+        <p:txBody>
+          <a:bodyPr wrap="square" lIns="0" tIns="0" rIns="0" bIns="0" rtlCol="0" anchor="ctr"/>
+          <a:lstStyle/>
+          <a:p>
+            <a:pPr indent="0" marL="0">
+              <a:buNone/>
+            </a:pPr>
+            <a:r>
+              <a:rPr lang="en-US" sz="900" b="1" dirty="0">
+                <a:solidFill>
+                  <a:srgbClr val="0D47A1"/>
+                </a:solidFill>
+                <a:latin typeface="Trebuchet MS" pitchFamily="34" charset="0"/>
+                <a:ea typeface="Trebuchet MS" pitchFamily="34" charset="-122"/>
+                <a:cs typeface="Trebuchet MS" pitchFamily="34" charset="-120"/>
+              </a:rPr>
+              <a:t>Ordre SQL</a:t>
+            </a:r>
+            <a:endParaRPr lang="en-US" sz="900" dirty="0"/>
+          </a:p>
+        </p:txBody>
+      </p:sp>
+      <p:sp>
+        <p:nvSpPr>
+          <p:cNvPr id="17" name="Shape 15"/>
+          <p:cNvSpPr/>
+          <p:nvPr/>
+        </p:nvSpPr>
+        <p:spPr>
+          <a:xfrm>
+            <a:off x="2743200" y="1911096"/>
+            <a:ext cx="5943600" cy="411480"/>
+          </a:xfrm>
+          <a:prstGeom prst="rect">
+            <a:avLst/>
+          </a:prstGeom>
+          <a:solidFill>
+            <a:srgbClr val="F0F0F0"/>
+          </a:solidFill>
+          <a:ln/>
+        </p:spPr>
+      </p:sp>
+      <p:sp>
+        <p:nvSpPr>
+          <p:cNvPr id="18" name="Text 16"/>
+          <p:cNvSpPr/>
+          <p:nvPr/>
+        </p:nvSpPr>
+        <p:spPr>
+          <a:xfrm>
+            <a:off x="2834640" y="1911096"/>
+            <a:ext cx="5760720" cy="411480"/>
+          </a:xfrm>
+          <a:prstGeom prst="rect">
+            <a:avLst/>
+          </a:prstGeom>
+          <a:noFill/>
+          <a:ln/>
+        </p:spPr>
+        <p:txBody>
+          <a:bodyPr wrap="square" lIns="0" tIns="0" rIns="0" bIns="0" rtlCol="0" anchor="ctr"/>
+          <a:lstStyle/>
+          <a:p>
+            <a:pPr indent="0" marL="0">
+              <a:buNone/>
+            </a:pPr>
+            <a:r>
+              <a:rPr lang="en-US" sz="900" dirty="0">
+                <a:solidFill>
+                  <a:srgbClr val="333333"/>
+                </a:solidFill>
+                <a:latin typeface="Calibri" pitchFamily="34" charset="0"/>
+                <a:ea typeface="Calibri" pitchFamily="34" charset="-122"/>
+                <a:cs typeface="Calibri" pitchFamily="34" charset="-120"/>
+              </a:rPr>
+              <a:t>FROM→WHERE→GROUP BY→HAVING→SELECT→ORDER BY→LIMIT</a:t>
+            </a:r>
+            <a:endParaRPr lang="en-US" sz="900" dirty="0"/>
+          </a:p>
+        </p:txBody>
+      </p:sp>
+      <p:sp>
+        <p:nvSpPr>
+          <p:cNvPr id="19" name="Shape 17"/>
+          <p:cNvSpPr/>
+          <p:nvPr/>
+        </p:nvSpPr>
+        <p:spPr>
+          <a:xfrm>
+            <a:off x="457200" y="2350008"/>
+            <a:ext cx="2286000" cy="411480"/>
+          </a:xfrm>
+          <a:prstGeom prst="rect">
+            <a:avLst/>
+          </a:prstGeom>
+          <a:solidFill>
+            <a:srgbClr val="E3F2FD"/>
+          </a:solidFill>
+          <a:ln/>
+        </p:spPr>
+      </p:sp>
+      <p:sp>
+        <p:nvSpPr>
+          <p:cNvPr id="20" name="Text 18"/>
+          <p:cNvSpPr/>
+          <p:nvPr/>
+        </p:nvSpPr>
+        <p:spPr>
+          <a:xfrm>
+            <a:off x="548640" y="2350008"/>
+            <a:ext cx="2103120" cy="411480"/>
+          </a:xfrm>
+          <a:prstGeom prst="rect">
+            <a:avLst/>
+          </a:prstGeom>
+          <a:noFill/>
+          <a:ln/>
+        </p:spPr>
+        <p:txBody>
+          <a:bodyPr wrap="square" lIns="0" tIns="0" rIns="0" bIns="0" rtlCol="0" anchor="ctr"/>
+          <a:lstStyle/>
+          <a:p>
+            <a:pPr indent="0" marL="0">
+              <a:buNone/>
+            </a:pPr>
+            <a:r>
+              <a:rPr lang="en-US" sz="900" b="1" dirty="0">
+                <a:solidFill>
+                  <a:srgbClr val="0D47A1"/>
+                </a:solidFill>
+                <a:latin typeface="Trebuchet MS" pitchFamily="34" charset="0"/>
+                <a:ea typeface="Trebuchet MS" pitchFamily="34" charset="-122"/>
+                <a:cs typeface="Trebuchet MS" pitchFamily="34" charset="-120"/>
+              </a:rPr>
+              <a:t>Fonctions</a:t>
+            </a:r>
+            <a:endParaRPr lang="en-US" sz="900" dirty="0"/>
+          </a:p>
+        </p:txBody>
+      </p:sp>
+      <p:sp>
+        <p:nvSpPr>
+          <p:cNvPr id="21" name="Shape 19"/>
+          <p:cNvSpPr/>
+          <p:nvPr/>
+        </p:nvSpPr>
+        <p:spPr>
+          <a:xfrm>
+            <a:off x="2743200" y="2350008"/>
+            <a:ext cx="5943600" cy="411480"/>
+          </a:xfrm>
+          <a:prstGeom prst="rect">
+            <a:avLst/>
+          </a:prstGeom>
+          <a:solidFill>
+            <a:srgbClr val="E3F2FD"/>
+          </a:solidFill>
+          <a:ln/>
+        </p:spPr>
+      </p:sp>
+      <p:sp>
+        <p:nvSpPr>
+          <p:cNvPr id="22" name="Text 20"/>
+          <p:cNvSpPr/>
+          <p:nvPr/>
+        </p:nvSpPr>
+        <p:spPr>
+          <a:xfrm>
+            <a:off x="2834640" y="2350008"/>
+            <a:ext cx="5760720" cy="411480"/>
+          </a:xfrm>
+          <a:prstGeom prst="rect">
+            <a:avLst/>
+          </a:prstGeom>
+          <a:noFill/>
+          <a:ln/>
+        </p:spPr>
+        <p:txBody>
+          <a:bodyPr wrap="square" lIns="0" tIns="0" rIns="0" bIns="0" rtlCol="0" anchor="ctr"/>
+          <a:lstStyle/>
+          <a:p>
+            <a:pPr indent="0" marL="0">
+              <a:buNone/>
+            </a:pPr>
+            <a:r>
+              <a:rPr lang="en-US" sz="900" dirty="0">
+                <a:solidFill>
+                  <a:srgbClr val="333333"/>
+                </a:solidFill>
+                <a:latin typeface="Calibri" pitchFamily="34" charset="0"/>
+                <a:ea typeface="Calibri" pitchFamily="34" charset="-122"/>
+                <a:cs typeface="Calibri" pitchFamily="34" charset="-120"/>
+              </a:rPr>
+              <a:t>YEAR(), ROUND(), CONCAT(), NOW(), IFNULL(), COALESCE()</a:t>
+            </a:r>
+            <a:endParaRPr lang="en-US" sz="900" dirty="0"/>
+          </a:p>
+        </p:txBody>
+      </p:sp>
+      <p:sp>
+        <p:nvSpPr>
+          <p:cNvPr id="23" name="Shape 21"/>
+          <p:cNvSpPr/>
+          <p:nvPr/>
+        </p:nvSpPr>
+        <p:spPr>
+          <a:xfrm>
+            <a:off x="457200" y="2788920"/>
+            <a:ext cx="2286000" cy="411480"/>
+          </a:xfrm>
+          <a:prstGeom prst="rect">
+            <a:avLst/>
+          </a:prstGeom>
+          <a:solidFill>
+            <a:srgbClr val="F0F0F0"/>
+          </a:solidFill>
+          <a:ln/>
+        </p:spPr>
+      </p:sp>
+      <p:sp>
+        <p:nvSpPr>
+          <p:cNvPr id="24" name="Text 22"/>
+          <p:cNvSpPr/>
+          <p:nvPr/>
+        </p:nvSpPr>
+        <p:spPr>
+          <a:xfrm>
+            <a:off x="548640" y="2788920"/>
+            <a:ext cx="2103120" cy="411480"/>
+          </a:xfrm>
+          <a:prstGeom prst="rect">
+            <a:avLst/>
+          </a:prstGeom>
+          <a:noFill/>
+          <a:ln/>
+        </p:spPr>
+        <p:txBody>
+          <a:bodyPr wrap="square" lIns="0" tIns="0" rIns="0" bIns="0" rtlCol="0" anchor="ctr"/>
+          <a:lstStyle/>
+          <a:p>
+            <a:pPr indent="0" marL="0">
+              <a:buNone/>
+            </a:pPr>
+            <a:r>
+              <a:rPr lang="en-US" sz="900" b="1" dirty="0">
+                <a:solidFill>
+                  <a:srgbClr val="0D47A1"/>
+                </a:solidFill>
+                <a:latin typeface="Trebuchet MS" pitchFamily="34" charset="0"/>
+                <a:ea typeface="Trebuchet MS" pitchFamily="34" charset="-122"/>
+                <a:cs typeface="Trebuchet MS" pitchFamily="34" charset="-120"/>
+              </a:rPr>
+              <a:t>Sous-requete</a:t>
+            </a:r>
+            <a:endParaRPr lang="en-US" sz="900" dirty="0"/>
+          </a:p>
+        </p:txBody>
+      </p:sp>
+      <p:sp>
+        <p:nvSpPr>
+          <p:cNvPr id="25" name="Shape 23"/>
+          <p:cNvSpPr/>
+          <p:nvPr/>
+        </p:nvSpPr>
+        <p:spPr>
+          <a:xfrm>
+            <a:off x="2743200" y="2788920"/>
+            <a:ext cx="5943600" cy="411480"/>
+          </a:xfrm>
+          <a:prstGeom prst="rect">
+            <a:avLst/>
+          </a:prstGeom>
+          <a:solidFill>
+            <a:srgbClr val="F0F0F0"/>
+          </a:solidFill>
+          <a:ln/>
+        </p:spPr>
+      </p:sp>
+      <p:sp>
+        <p:nvSpPr>
+          <p:cNvPr id="26" name="Text 24"/>
+          <p:cNvSpPr/>
+          <p:nvPr/>
+        </p:nvSpPr>
+        <p:spPr>
+          <a:xfrm>
+            <a:off x="2834640" y="2788920"/>
+            <a:ext cx="5760720" cy="411480"/>
+          </a:xfrm>
+          <a:prstGeom prst="rect">
+            <a:avLst/>
+          </a:prstGeom>
+          <a:noFill/>
+          <a:ln/>
+        </p:spPr>
+        <p:txBody>
+          <a:bodyPr wrap="square" lIns="0" tIns="0" rIns="0" bIns="0" rtlCol="0" anchor="ctr"/>
+          <a:lstStyle/>
+          <a:p>
+            <a:pPr indent="0" marL="0">
+              <a:buNone/>
+            </a:pPr>
+            <a:r>
+              <a:rPr lang="en-US" sz="900" dirty="0">
+                <a:solidFill>
+                  <a:srgbClr val="333333"/>
+                </a:solidFill>
+                <a:latin typeface="Calibri" pitchFamily="34" charset="0"/>
+                <a:ea typeface="Calibri" pitchFamily="34" charset="-122"/>
+                <a:cs typeface="Calibri" pitchFamily="34" charset="-120"/>
+              </a:rPr>
+              <a:t>SELECT dans WHERE : resultat utilise comme filtre</a:t>
+            </a:r>
+            <a:endParaRPr lang="en-US" sz="900" dirty="0"/>
+          </a:p>
+        </p:txBody>
+      </p:sp>
+      <p:sp>
+        <p:nvSpPr>
+          <p:cNvPr id="27" name="Shape 25"/>
+          <p:cNvSpPr/>
+          <p:nvPr/>
+        </p:nvSpPr>
+        <p:spPr>
+          <a:xfrm>
+            <a:off x="457200" y="3227832"/>
+            <a:ext cx="2286000" cy="411480"/>
+          </a:xfrm>
+          <a:prstGeom prst="rect">
+            <a:avLst/>
+          </a:prstGeom>
+          <a:solidFill>
+            <a:srgbClr val="E3F2FD"/>
+          </a:solidFill>
+          <a:ln/>
+        </p:spPr>
+      </p:sp>
+      <p:sp>
+        <p:nvSpPr>
+          <p:cNvPr id="28" name="Text 26"/>
+          <p:cNvSpPr/>
+          <p:nvPr/>
+        </p:nvSpPr>
+        <p:spPr>
+          <a:xfrm>
+            <a:off x="548640" y="3227832"/>
+            <a:ext cx="2103120" cy="411480"/>
+          </a:xfrm>
+          <a:prstGeom prst="rect">
+            <a:avLst/>
+          </a:prstGeom>
+          <a:noFill/>
+          <a:ln/>
+        </p:spPr>
+        <p:txBody>
+          <a:bodyPr wrap="square" lIns="0" tIns="0" rIns="0" bIns="0" rtlCol="0" anchor="ctr"/>
+          <a:lstStyle/>
+          <a:p>
+            <a:pPr indent="0" marL="0">
+              <a:buNone/>
+            </a:pPr>
+            <a:r>
+              <a:rPr lang="en-US" sz="900" b="1" dirty="0">
+                <a:solidFill>
+                  <a:srgbClr val="0D47A1"/>
+                </a:solidFill>
+                <a:latin typeface="Trebuchet MS" pitchFamily="34" charset="0"/>
+                <a:ea typeface="Trebuchet MS" pitchFamily="34" charset="-122"/>
+                <a:cs typeface="Trebuchet MS" pitchFamily="34" charset="-120"/>
+              </a:rPr>
+              <a:t>UNION ALL</a:t>
+            </a:r>
+            <a:endParaRPr lang="en-US" sz="900" dirty="0"/>
+          </a:p>
+        </p:txBody>
+      </p:sp>
+      <p:sp>
+        <p:nvSpPr>
+          <p:cNvPr id="29" name="Shape 27"/>
+          <p:cNvSpPr/>
+          <p:nvPr/>
+        </p:nvSpPr>
+        <p:spPr>
+          <a:xfrm>
+            <a:off x="2743200" y="3227832"/>
+            <a:ext cx="5943600" cy="411480"/>
+          </a:xfrm>
+          <a:prstGeom prst="rect">
+            <a:avLst/>
+          </a:prstGeom>
+          <a:solidFill>
+            <a:srgbClr val="E3F2FD"/>
+          </a:solidFill>
+          <a:ln/>
+        </p:spPr>
+      </p:sp>
+      <p:sp>
+        <p:nvSpPr>
+          <p:cNvPr id="30" name="Text 28"/>
+          <p:cNvSpPr/>
+          <p:nvPr/>
+        </p:nvSpPr>
+        <p:spPr>
+          <a:xfrm>
+            <a:off x="2834640" y="3227832"/>
+            <a:ext cx="5760720" cy="411480"/>
+          </a:xfrm>
+          <a:prstGeom prst="rect">
+            <a:avLst/>
+          </a:prstGeom>
+          <a:noFill/>
+          <a:ln/>
+        </p:spPr>
+        <p:txBody>
+          <a:bodyPr wrap="square" lIns="0" tIns="0" rIns="0" bIns="0" rtlCol="0" anchor="ctr"/>
+          <a:lstStyle/>
+          <a:p>
+            <a:pPr indent="0" marL="0">
+              <a:buNone/>
+            </a:pPr>
+            <a:r>
+              <a:rPr lang="en-US" sz="900" dirty="0">
+                <a:solidFill>
+                  <a:srgbClr val="333333"/>
+                </a:solidFill>
+                <a:latin typeface="Calibri" pitchFamily="34" charset="0"/>
+                <a:ea typeface="Calibri" pitchFamily="34" charset="-122"/>
+                <a:cs typeface="Calibri" pitchFamily="34" charset="-120"/>
+              </a:rPr>
+              <a:t>Combiner plusieurs SELECT en un seul resultat</a:t>
+            </a:r>
+            <a:endParaRPr lang="en-US" sz="900" dirty="0"/>
           </a:p>
         </p:txBody>
       </p:sp>
@@ -1848,7 +2834,7 @@
         <p:spPr>
           <a:xfrm>
             <a:off x="457200" y="182880"/>
-            <a:ext cx="8229600" cy="594360"/>
+            <a:ext cx="8229600" cy="502920"/>
           </a:xfrm>
           <a:prstGeom prst="rect">
             <a:avLst/>
@@ -1864,7 +2850,7 @@
               <a:buNone/>
             </a:pPr>
             <a:r>
-              <a:rPr lang="en-US" sz="2400" b="1" dirty="0">
+              <a:rPr lang="en-US" sz="2100" b="1" dirty="0">
                 <a:solidFill>
                   <a:srgbClr val="0D47A1"/>
                 </a:solidFill>
@@ -1872,9 +2858,9 @@
                 <a:ea typeface="Trebuchet MS" pitchFamily="34" charset="-122"/>
                 <a:cs typeface="Trebuchet MS" pitchFamily="34" charset="-120"/>
               </a:rPr>
-              <a:t>Fonctions d'agrégation</a:t>
-            </a:r>
-            <a:endParaRPr lang="en-US" sz="2400" dirty="0"/>
+              <a:t>Fonctions d'agregation</a:t>
+            </a:r>
+            <a:endParaRPr lang="en-US" sz="2100" dirty="0"/>
           </a:p>
         </p:txBody>
       </p:sp>
@@ -1886,8 +2872,8 @@
         </p:nvSpPr>
         <p:spPr>
           <a:xfrm>
-            <a:off x="457200" y="914400"/>
-            <a:ext cx="8229600" cy="521208"/>
+            <a:off x="457200" y="777240"/>
+            <a:ext cx="8229600" cy="448056"/>
           </a:xfrm>
           <a:prstGeom prst="rect">
             <a:avLst/>
@@ -1896,13 +2882,6 @@
             <a:srgbClr val="FFFFFF"/>
           </a:solidFill>
           <a:ln/>
-          <a:effectLst>
-            <a:outerShdw sx="100000" sy="100000" kx="0" ky="0" algn="bl" rotWithShape="0" blurRad="50800" dist="25400" dir="8100000">
-              <a:srgbClr val="000000">
-                <a:alpha val="12000"/>
-              </a:srgbClr>
-            </a:outerShdw>
-          </a:effectLst>
         </p:spPr>
       </p:sp>
       <p:sp>
@@ -1913,8 +2892,8 @@
         </p:nvSpPr>
         <p:spPr>
           <a:xfrm>
-            <a:off x="457200" y="914400"/>
-            <a:ext cx="45720" cy="521208"/>
+            <a:off x="457200" y="777240"/>
+            <a:ext cx="45720" cy="448056"/>
           </a:xfrm>
           <a:prstGeom prst="rect">
             <a:avLst/>
@@ -1933,8 +2912,8 @@
         </p:nvSpPr>
         <p:spPr>
           <a:xfrm>
-            <a:off x="685800" y="914400"/>
-            <a:ext cx="7818120" cy="521208"/>
+            <a:off x="640080" y="777240"/>
+            <a:ext cx="7863840" cy="448056"/>
           </a:xfrm>
           <a:prstGeom prst="rect">
             <a:avLst/>
@@ -1972,8 +2951,8 @@
         </p:nvSpPr>
         <p:spPr>
           <a:xfrm>
-            <a:off x="457200" y="1463040"/>
-            <a:ext cx="8229600" cy="521208"/>
+            <a:off x="457200" y="1252728"/>
+            <a:ext cx="8229600" cy="448056"/>
           </a:xfrm>
           <a:prstGeom prst="rect">
             <a:avLst/>
@@ -1982,13 +2961,6 @@
             <a:srgbClr val="E3F2FD"/>
           </a:solidFill>
           <a:ln/>
-          <a:effectLst>
-            <a:outerShdw sx="100000" sy="100000" kx="0" ky="0" algn="bl" rotWithShape="0" blurRad="50800" dist="25400" dir="8100000">
-              <a:srgbClr val="000000">
-                <a:alpha val="12000"/>
-              </a:srgbClr>
-            </a:outerShdw>
-          </a:effectLst>
         </p:spPr>
       </p:sp>
       <p:sp>
@@ -1999,8 +2971,8 @@
         </p:nvSpPr>
         <p:spPr>
           <a:xfrm>
-            <a:off x="457200" y="1463040"/>
-            <a:ext cx="45720" cy="521208"/>
+            <a:off x="457200" y="1252728"/>
+            <a:ext cx="45720" cy="448056"/>
           </a:xfrm>
           <a:prstGeom prst="rect">
             <a:avLst/>
@@ -2019,8 +2991,8 @@
         </p:nvSpPr>
         <p:spPr>
           <a:xfrm>
-            <a:off x="685800" y="1463040"/>
-            <a:ext cx="7818120" cy="521208"/>
+            <a:off x="640080" y="1252728"/>
+            <a:ext cx="7863840" cy="448056"/>
           </a:xfrm>
           <a:prstGeom prst="rect">
             <a:avLst/>
@@ -2044,7 +3016,7 @@
                 <a:ea typeface="JetBrains Mono" pitchFamily="34" charset="-122"/>
                 <a:cs typeface="JetBrains Mono" pitchFamily="34" charset="-120"/>
               </a:rPr>
-              <a:t>COUNT(colonne) : lignes où colonne ≠ NULL</a:t>
+              <a:t>COUNT(colonne) : lignes ou colonne ≠ NULL</a:t>
             </a:r>
             <a:endParaRPr lang="en-US" sz="1000" dirty="0"/>
           </a:p>
@@ -2058,8 +3030,8 @@
         </p:nvSpPr>
         <p:spPr>
           <a:xfrm>
-            <a:off x="457200" y="2011680"/>
-            <a:ext cx="8229600" cy="521208"/>
+            <a:off x="457200" y="1728216"/>
+            <a:ext cx="8229600" cy="448056"/>
           </a:xfrm>
           <a:prstGeom prst="rect">
             <a:avLst/>
@@ -2068,13 +3040,6 @@
             <a:srgbClr val="FFFFFF"/>
           </a:solidFill>
           <a:ln/>
-          <a:effectLst>
-            <a:outerShdw sx="100000" sy="100000" kx="0" ky="0" algn="bl" rotWithShape="0" blurRad="50800" dist="25400" dir="8100000">
-              <a:srgbClr val="000000">
-                <a:alpha val="12000"/>
-              </a:srgbClr>
-            </a:outerShdw>
-          </a:effectLst>
         </p:spPr>
       </p:sp>
       <p:sp>
@@ -2085,8 +3050,8 @@
         </p:nvSpPr>
         <p:spPr>
           <a:xfrm>
-            <a:off x="457200" y="2011680"/>
-            <a:ext cx="45720" cy="521208"/>
+            <a:off x="457200" y="1728216"/>
+            <a:ext cx="45720" cy="448056"/>
           </a:xfrm>
           <a:prstGeom prst="rect">
             <a:avLst/>
@@ -2105,8 +3070,8 @@
         </p:nvSpPr>
         <p:spPr>
           <a:xfrm>
-            <a:off x="685800" y="2011680"/>
-            <a:ext cx="7818120" cy="521208"/>
+            <a:off x="640080" y="1728216"/>
+            <a:ext cx="7863840" cy="448056"/>
           </a:xfrm>
           <a:prstGeom prst="rect">
             <a:avLst/>
@@ -2144,8 +3109,8 @@
         </p:nvSpPr>
         <p:spPr>
           <a:xfrm>
-            <a:off x="457200" y="2560320"/>
-            <a:ext cx="8229600" cy="521208"/>
+            <a:off x="457200" y="2203704"/>
+            <a:ext cx="8229600" cy="448056"/>
           </a:xfrm>
           <a:prstGeom prst="rect">
             <a:avLst/>
@@ -2154,13 +3119,6 @@
             <a:srgbClr val="E3F2FD"/>
           </a:solidFill>
           <a:ln/>
-          <a:effectLst>
-            <a:outerShdw sx="100000" sy="100000" kx="0" ky="0" algn="bl" rotWithShape="0" blurRad="50800" dist="25400" dir="8100000">
-              <a:srgbClr val="000000">
-                <a:alpha val="12000"/>
-              </a:srgbClr>
-            </a:outerShdw>
-          </a:effectLst>
         </p:spPr>
       </p:sp>
       <p:sp>
@@ -2171,8 +3129,8 @@
         </p:nvSpPr>
         <p:spPr>
           <a:xfrm>
-            <a:off x="457200" y="2560320"/>
-            <a:ext cx="45720" cy="521208"/>
+            <a:off x="457200" y="2203704"/>
+            <a:ext cx="45720" cy="448056"/>
           </a:xfrm>
           <a:prstGeom prst="rect">
             <a:avLst/>
@@ -2191,8 +3149,8 @@
         </p:nvSpPr>
         <p:spPr>
           <a:xfrm>
-            <a:off x="685800" y="2560320"/>
-            <a:ext cx="7818120" cy="521208"/>
+            <a:off x="640080" y="2203704"/>
+            <a:ext cx="7863840" cy="448056"/>
           </a:xfrm>
           <a:prstGeom prst="rect">
             <a:avLst/>
@@ -2230,8 +3188,8 @@
         </p:nvSpPr>
         <p:spPr>
           <a:xfrm>
-            <a:off x="457200" y="3108960"/>
-            <a:ext cx="8229600" cy="521208"/>
+            <a:off x="457200" y="2679192"/>
+            <a:ext cx="8229600" cy="448056"/>
           </a:xfrm>
           <a:prstGeom prst="rect">
             <a:avLst/>
@@ -2240,13 +3198,6 @@
             <a:srgbClr val="FFFFFF"/>
           </a:solidFill>
           <a:ln/>
-          <a:effectLst>
-            <a:outerShdw sx="100000" sy="100000" kx="0" ky="0" algn="bl" rotWithShape="0" blurRad="50800" dist="25400" dir="8100000">
-              <a:srgbClr val="000000">
-                <a:alpha val="12000"/>
-              </a:srgbClr>
-            </a:outerShdw>
-          </a:effectLst>
         </p:spPr>
       </p:sp>
       <p:sp>
@@ -2257,8 +3208,8 @@
         </p:nvSpPr>
         <p:spPr>
           <a:xfrm>
-            <a:off x="457200" y="3108960"/>
-            <a:ext cx="45720" cy="521208"/>
+            <a:off x="457200" y="2679192"/>
+            <a:ext cx="45720" cy="448056"/>
           </a:xfrm>
           <a:prstGeom prst="rect">
             <a:avLst/>
@@ -2277,8 +3228,8 @@
         </p:nvSpPr>
         <p:spPr>
           <a:xfrm>
-            <a:off x="685800" y="3108960"/>
-            <a:ext cx="7818120" cy="521208"/>
+            <a:off x="640080" y="2679192"/>
+            <a:ext cx="7863840" cy="448056"/>
           </a:xfrm>
           <a:prstGeom prst="rect">
             <a:avLst/>
@@ -2294,7 +3245,7 @@
               <a:buNone/>
             </a:pPr>
             <a:r>
-              <a:rPr lang="en-US" sz="1200" dirty="0">
+              <a:rPr lang="en-US" sz="1100" dirty="0">
                 <a:solidFill>
                   <a:srgbClr val="1A1A2E"/>
                 </a:solidFill>
@@ -2304,7 +3255,7 @@
               </a:rPr>
               <a:t>MIN(date_inscription) : date la plus ancienne</a:t>
             </a:r>
-            <a:endParaRPr lang="en-US" sz="1200" dirty="0"/>
+            <a:endParaRPr lang="en-US" sz="1100" dirty="0"/>
           </a:p>
         </p:txBody>
       </p:sp>
@@ -2316,8 +3267,8 @@
         </p:nvSpPr>
         <p:spPr>
           <a:xfrm>
-            <a:off x="457200" y="3657600"/>
-            <a:ext cx="8229600" cy="521208"/>
+            <a:off x="457200" y="3154680"/>
+            <a:ext cx="8229600" cy="448056"/>
           </a:xfrm>
           <a:prstGeom prst="rect">
             <a:avLst/>
@@ -2326,13 +3277,6 @@
             <a:srgbClr val="E3F2FD"/>
           </a:solidFill>
           <a:ln/>
-          <a:effectLst>
-            <a:outerShdw sx="100000" sy="100000" kx="0" ky="0" algn="bl" rotWithShape="0" blurRad="50800" dist="25400" dir="8100000">
-              <a:srgbClr val="000000">
-                <a:alpha val="12000"/>
-              </a:srgbClr>
-            </a:outerShdw>
-          </a:effectLst>
         </p:spPr>
       </p:sp>
       <p:sp>
@@ -2343,8 +3287,8 @@
         </p:nvSpPr>
         <p:spPr>
           <a:xfrm>
-            <a:off x="457200" y="3657600"/>
-            <a:ext cx="45720" cy="521208"/>
+            <a:off x="457200" y="3154680"/>
+            <a:ext cx="45720" cy="448056"/>
           </a:xfrm>
           <a:prstGeom prst="rect">
             <a:avLst/>
@@ -2363,8 +3307,8 @@
         </p:nvSpPr>
         <p:spPr>
           <a:xfrm>
-            <a:off x="685800" y="3657600"/>
-            <a:ext cx="7818120" cy="521208"/>
+            <a:off x="640080" y="3154680"/>
+            <a:ext cx="7863840" cy="448056"/>
           </a:xfrm>
           <a:prstGeom prst="rect">
             <a:avLst/>
@@ -2380,7 +3324,7 @@
               <a:buNone/>
             </a:pPr>
             <a:r>
-              <a:rPr lang="en-US" sz="1200" dirty="0">
+              <a:rPr lang="en-US" sz="1100" dirty="0">
                 <a:solidFill>
                   <a:srgbClr val="1A1A2E"/>
                 </a:solidFill>
@@ -2388,9 +3332,9 @@
                 <a:ea typeface="Calibri" pitchFamily="34" charset="-122"/>
                 <a:cs typeface="Calibri" pitchFamily="34" charset="-120"/>
               </a:rPr>
-              <a:t>MAX(tarif_horaire) : tarif le plus élevé</a:t>
-            </a:r>
-            <a:endParaRPr lang="en-US" sz="1200" dirty="0"/>
+              <a:t>MAX(tarif_horaire) : tarif le plus eleve</a:t>
+            </a:r>
+            <a:endParaRPr lang="en-US" sz="1100" dirty="0"/>
           </a:p>
         </p:txBody>
       </p:sp>
@@ -2402,8 +3346,8 @@
         </p:nvSpPr>
         <p:spPr>
           <a:xfrm>
-            <a:off x="457200" y="4206240"/>
-            <a:ext cx="8229600" cy="521208"/>
+            <a:off x="457200" y="3630168"/>
+            <a:ext cx="8229600" cy="448056"/>
           </a:xfrm>
           <a:prstGeom prst="rect">
             <a:avLst/>
@@ -2412,13 +3356,6 @@
             <a:srgbClr val="FFFFFF"/>
           </a:solidFill>
           <a:ln/>
-          <a:effectLst>
-            <a:outerShdw sx="100000" sy="100000" kx="0" ky="0" algn="bl" rotWithShape="0" blurRad="50800" dist="25400" dir="8100000">
-              <a:srgbClr val="000000">
-                <a:alpha val="12000"/>
-              </a:srgbClr>
-            </a:outerShdw>
-          </a:effectLst>
         </p:spPr>
       </p:sp>
       <p:sp>
@@ -2429,8 +3366,8 @@
         </p:nvSpPr>
         <p:spPr>
           <a:xfrm>
-            <a:off x="457200" y="4206240"/>
-            <a:ext cx="45720" cy="521208"/>
+            <a:off x="457200" y="3630168"/>
+            <a:ext cx="45720" cy="448056"/>
           </a:xfrm>
           <a:prstGeom prst="rect">
             <a:avLst/>
@@ -2449,8 +3386,8 @@
         </p:nvSpPr>
         <p:spPr>
           <a:xfrm>
-            <a:off x="685800" y="4206240"/>
-            <a:ext cx="7818120" cy="521208"/>
+            <a:off x="640080" y="3630168"/>
+            <a:ext cx="7863840" cy="448056"/>
           </a:xfrm>
           <a:prstGeom prst="rect">
             <a:avLst/>
@@ -2466,17 +3403,17 @@
               <a:buNone/>
             </a:pPr>
             <a:r>
-              <a:rPr lang="en-US" sz="1200" dirty="0">
-                <a:solidFill>
-                  <a:srgbClr val="1A1A2E"/>
-                </a:solidFill>
-                <a:latin typeface="Calibri" pitchFamily="34" charset="0"/>
-                <a:ea typeface="Calibri" pitchFamily="34" charset="-122"/>
-                <a:cs typeface="Calibri" pitchFamily="34" charset="-120"/>
-              </a:rPr>
-              <a:t>ROUND(AVG(prix), 2) : arrondir à 2 décimales</a:t>
-            </a:r>
-            <a:endParaRPr lang="en-US" sz="1200" dirty="0"/>
+              <a:rPr lang="en-US" sz="1000" dirty="0">
+                <a:solidFill>
+                  <a:srgbClr val="0D47A1"/>
+                </a:solidFill>
+                <a:latin typeface="JetBrains Mono" pitchFamily="34" charset="0"/>
+                <a:ea typeface="JetBrains Mono" pitchFamily="34" charset="-122"/>
+                <a:cs typeface="JetBrains Mono" pitchFamily="34" charset="-120"/>
+              </a:rPr>
+              <a:t>ROUND(AVG(prix), 2) : arrondir a 2 decimales</a:t>
+            </a:r>
+            <a:endParaRPr lang="en-US" sz="1000" dirty="0"/>
           </a:p>
         </p:txBody>
       </p:sp>
@@ -2541,7 +3478,7 @@
         <p:spPr>
           <a:xfrm>
             <a:off x="457200" y="182880"/>
-            <a:ext cx="8229600" cy="594360"/>
+            <a:ext cx="8229600" cy="502920"/>
           </a:xfrm>
           <a:prstGeom prst="rect">
             <a:avLst/>
@@ -2557,7 +3494,7 @@
               <a:buNone/>
             </a:pPr>
             <a:r>
-              <a:rPr lang="en-US" sz="2400" b="1" dirty="0">
+              <a:rPr lang="en-US" sz="2100" b="1" dirty="0">
                 <a:solidFill>
                   <a:srgbClr val="0D47A1"/>
                 </a:solidFill>
@@ -2565,9 +3502,9 @@
                 <a:ea typeface="Trebuchet MS" pitchFamily="34" charset="-122"/>
                 <a:cs typeface="Trebuchet MS" pitchFamily="34" charset="-120"/>
               </a:rPr>
-              <a:t>GROUP BY : regrouper les résultats</a:t>
-            </a:r>
-            <a:endParaRPr lang="en-US" sz="2400" dirty="0"/>
+              <a:t>GROUP BY : regrouper les resultats</a:t>
+            </a:r>
+            <a:endParaRPr lang="en-US" sz="2100" dirty="0"/>
           </a:p>
         </p:txBody>
       </p:sp>
@@ -2579,8 +3516,8 @@
         </p:nvSpPr>
         <p:spPr>
           <a:xfrm>
-            <a:off x="457200" y="914400"/>
-            <a:ext cx="8229600" cy="521208"/>
+            <a:off x="457200" y="777240"/>
+            <a:ext cx="8229600" cy="448056"/>
           </a:xfrm>
           <a:prstGeom prst="rect">
             <a:avLst/>
@@ -2589,13 +3526,6 @@
             <a:srgbClr val="FFFFFF"/>
           </a:solidFill>
           <a:ln/>
-          <a:effectLst>
-            <a:outerShdw sx="100000" sy="100000" kx="0" ky="0" algn="bl" rotWithShape="0" blurRad="50800" dist="25400" dir="8100000">
-              <a:srgbClr val="000000">
-                <a:alpha val="12000"/>
-              </a:srgbClr>
-            </a:outerShdw>
-          </a:effectLst>
         </p:spPr>
       </p:sp>
       <p:sp>
@@ -2606,8 +3536,8 @@
         </p:nvSpPr>
         <p:spPr>
           <a:xfrm>
-            <a:off x="457200" y="914400"/>
-            <a:ext cx="45720" cy="521208"/>
+            <a:off x="457200" y="777240"/>
+            <a:ext cx="45720" cy="448056"/>
           </a:xfrm>
           <a:prstGeom prst="rect">
             <a:avLst/>
@@ -2626,8 +3556,8 @@
         </p:nvSpPr>
         <p:spPr>
           <a:xfrm>
-            <a:off x="685800" y="914400"/>
-            <a:ext cx="7818120" cy="521208"/>
+            <a:off x="640080" y="777240"/>
+            <a:ext cx="7863840" cy="448056"/>
           </a:xfrm>
           <a:prstGeom prst="rect">
             <a:avLst/>
@@ -2665,8 +3595,8 @@
         </p:nvSpPr>
         <p:spPr>
           <a:xfrm>
-            <a:off x="457200" y="1463040"/>
-            <a:ext cx="8229600" cy="521208"/>
+            <a:off x="457200" y="1252728"/>
+            <a:ext cx="8229600" cy="448056"/>
           </a:xfrm>
           <a:prstGeom prst="rect">
             <a:avLst/>
@@ -2675,13 +3605,6 @@
             <a:srgbClr val="E3F2FD"/>
           </a:solidFill>
           <a:ln/>
-          <a:effectLst>
-            <a:outerShdw sx="100000" sy="100000" kx="0" ky="0" algn="bl" rotWithShape="0" blurRad="50800" dist="25400" dir="8100000">
-              <a:srgbClr val="000000">
-                <a:alpha val="12000"/>
-              </a:srgbClr>
-            </a:outerShdw>
-          </a:effectLst>
         </p:spPr>
       </p:sp>
       <p:sp>
@@ -2692,8 +3615,8 @@
         </p:nvSpPr>
         <p:spPr>
           <a:xfrm>
-            <a:off x="457200" y="1463040"/>
-            <a:ext cx="45720" cy="521208"/>
+            <a:off x="457200" y="1252728"/>
+            <a:ext cx="45720" cy="448056"/>
           </a:xfrm>
           <a:prstGeom prst="rect">
             <a:avLst/>
@@ -2712,8 +3635,8 @@
         </p:nvSpPr>
         <p:spPr>
           <a:xfrm>
-            <a:off x="685800" y="1463040"/>
-            <a:ext cx="7818120" cy="521208"/>
+            <a:off x="640080" y="1252728"/>
+            <a:ext cx="7863840" cy="448056"/>
           </a:xfrm>
           <a:prstGeom prst="rect">
             <a:avLst/>
@@ -2729,7 +3652,7 @@
               <a:buNone/>
             </a:pPr>
             <a:r>
-              <a:rPr lang="en-US" sz="1200" dirty="0">
+              <a:rPr lang="en-US" sz="1100" dirty="0">
                 <a:solidFill>
                   <a:srgbClr val="1A1A2E"/>
                 </a:solidFill>
@@ -2737,9 +3660,9 @@
                 <a:ea typeface="Calibri" pitchFamily="34" charset="-122"/>
                 <a:cs typeface="Calibri" pitchFamily="34" charset="-120"/>
               </a:rPr>
-              <a:t>⚠️ Règle : si SELECT mélange agrégation + colonnes normales → GROUP BY obligatoire</a:t>
-            </a:r>
-            <a:endParaRPr lang="en-US" sz="1200" dirty="0"/>
+              <a:t>REGLE : si SELECT melange agregation + colonnes normales → GROUP BY obligatoire</a:t>
+            </a:r>
+            <a:endParaRPr lang="en-US" sz="1100" dirty="0"/>
           </a:p>
         </p:txBody>
       </p:sp>
@@ -2751,8 +3674,8 @@
         </p:nvSpPr>
         <p:spPr>
           <a:xfrm>
-            <a:off x="457200" y="2011680"/>
-            <a:ext cx="8229600" cy="521208"/>
+            <a:off x="457200" y="1728216"/>
+            <a:ext cx="8229600" cy="448056"/>
           </a:xfrm>
           <a:prstGeom prst="rect">
             <a:avLst/>
@@ -2761,13 +3684,6 @@
             <a:srgbClr val="FFFFFF"/>
           </a:solidFill>
           <a:ln/>
-          <a:effectLst>
-            <a:outerShdw sx="100000" sy="100000" kx="0" ky="0" algn="bl" rotWithShape="0" blurRad="50800" dist="25400" dir="8100000">
-              <a:srgbClr val="000000">
-                <a:alpha val="12000"/>
-              </a:srgbClr>
-            </a:outerShdw>
-          </a:effectLst>
         </p:spPr>
       </p:sp>
       <p:sp>
@@ -2778,8 +3694,8 @@
         </p:nvSpPr>
         <p:spPr>
           <a:xfrm>
-            <a:off x="457200" y="2011680"/>
-            <a:ext cx="45720" cy="521208"/>
+            <a:off x="457200" y="1728216"/>
+            <a:ext cx="45720" cy="448056"/>
           </a:xfrm>
           <a:prstGeom prst="rect">
             <a:avLst/>
@@ -2798,8 +3714,8 @@
         </p:nvSpPr>
         <p:spPr>
           <a:xfrm>
-            <a:off x="685800" y="2011680"/>
-            <a:ext cx="7818120" cy="521208"/>
+            <a:off x="640080" y="1728216"/>
+            <a:ext cx="7863840" cy="448056"/>
           </a:xfrm>
           <a:prstGeom prst="rect">
             <a:avLst/>
@@ -2815,7 +3731,7 @@
               <a:buNone/>
             </a:pPr>
             <a:r>
-              <a:rPr lang="en-US" sz="1200" dirty="0">
+              <a:rPr lang="en-US" sz="1100" dirty="0">
                 <a:solidFill>
                   <a:srgbClr val="1A1A2E"/>
                 </a:solidFill>
@@ -2823,9 +3739,9 @@
                 <a:ea typeface="Calibri" pitchFamily="34" charset="-122"/>
                 <a:cs typeface="Calibri" pitchFamily="34" charset="-120"/>
               </a:rPr>
-              <a:t>Chaque valeur distincte de GROUP BY = un groupe</a:t>
-            </a:r>
-            <a:endParaRPr lang="en-US" sz="1200" dirty="0"/>
+              <a:t>Chaque valeur distincte = un GROUPE</a:t>
+            </a:r>
+            <a:endParaRPr lang="en-US" sz="1100" dirty="0"/>
           </a:p>
         </p:txBody>
       </p:sp>
@@ -2837,8 +3753,8 @@
         </p:nvSpPr>
         <p:spPr>
           <a:xfrm>
-            <a:off x="457200" y="2560320"/>
-            <a:ext cx="8229600" cy="521208"/>
+            <a:off x="457200" y="2203704"/>
+            <a:ext cx="8229600" cy="448056"/>
           </a:xfrm>
           <a:prstGeom prst="rect">
             <a:avLst/>
@@ -2847,13 +3763,6 @@
             <a:srgbClr val="E3F2FD"/>
           </a:solidFill>
           <a:ln/>
-          <a:effectLst>
-            <a:outerShdw sx="100000" sy="100000" kx="0" ky="0" algn="bl" rotWithShape="0" blurRad="50800" dist="25400" dir="8100000">
-              <a:srgbClr val="000000">
-                <a:alpha val="12000"/>
-              </a:srgbClr>
-            </a:outerShdw>
-          </a:effectLst>
         </p:spPr>
       </p:sp>
       <p:sp>
@@ -2864,8 +3773,8 @@
         </p:nvSpPr>
         <p:spPr>
           <a:xfrm>
-            <a:off x="457200" y="2560320"/>
-            <a:ext cx="45720" cy="521208"/>
+            <a:off x="457200" y="2203704"/>
+            <a:ext cx="45720" cy="448056"/>
           </a:xfrm>
           <a:prstGeom prst="rect">
             <a:avLst/>
@@ -2884,8 +3793,8 @@
         </p:nvSpPr>
         <p:spPr>
           <a:xfrm>
-            <a:off x="685800" y="2560320"/>
-            <a:ext cx="7818120" cy="521208"/>
+            <a:off x="640080" y="2203704"/>
+            <a:ext cx="7863840" cy="448056"/>
           </a:xfrm>
           <a:prstGeom prst="rect">
             <a:avLst/>
@@ -2909,7 +3818,7 @@
                 <a:ea typeface="JetBrains Mono" pitchFamily="34" charset="-122"/>
                 <a:cs typeface="JetBrains Mono" pitchFamily="34" charset="-120"/>
               </a:rPr>
-              <a:t>SUM, COUNT, AVG sont calculées PAR groupe</a:t>
+              <a:t>SUM, COUNT, AVG calcules PAR groupe</a:t>
             </a:r>
             <a:endParaRPr lang="en-US" sz="1000" dirty="0"/>
           </a:p>
@@ -2923,8 +3832,8 @@
         </p:nvSpPr>
         <p:spPr>
           <a:xfrm>
-            <a:off x="457200" y="3108960"/>
-            <a:ext cx="8229600" cy="521208"/>
+            <a:off x="457200" y="2679192"/>
+            <a:ext cx="8229600" cy="448056"/>
           </a:xfrm>
           <a:prstGeom prst="rect">
             <a:avLst/>
@@ -2933,13 +3842,6 @@
             <a:srgbClr val="FFFFFF"/>
           </a:solidFill>
           <a:ln/>
-          <a:effectLst>
-            <a:outerShdw sx="100000" sy="100000" kx="0" ky="0" algn="bl" rotWithShape="0" blurRad="50800" dist="25400" dir="8100000">
-              <a:srgbClr val="000000">
-                <a:alpha val="12000"/>
-              </a:srgbClr>
-            </a:outerShdw>
-          </a:effectLst>
         </p:spPr>
       </p:sp>
       <p:sp>
@@ -2950,8 +3852,8 @@
         </p:nvSpPr>
         <p:spPr>
           <a:xfrm>
-            <a:off x="457200" y="3108960"/>
-            <a:ext cx="45720" cy="521208"/>
+            <a:off x="457200" y="2679192"/>
+            <a:ext cx="45720" cy="448056"/>
           </a:xfrm>
           <a:prstGeom prst="rect">
             <a:avLst/>
@@ -2970,8 +3872,8 @@
         </p:nvSpPr>
         <p:spPr>
           <a:xfrm>
-            <a:off x="685800" y="3108960"/>
-            <a:ext cx="7818120" cy="521208"/>
+            <a:off x="640080" y="2679192"/>
+            <a:ext cx="7863840" cy="448056"/>
           </a:xfrm>
           <a:prstGeom prst="rect">
             <a:avLst/>
@@ -2987,7 +3889,7 @@
               <a:buNone/>
             </a:pPr>
             <a:r>
-              <a:rPr lang="en-US" sz="1200" dirty="0">
+              <a:rPr lang="en-US" sz="1100" dirty="0">
                 <a:solidFill>
                   <a:srgbClr val="1A1A2E"/>
                 </a:solidFill>
@@ -2995,9 +3897,9 @@
                 <a:ea typeface="Calibri" pitchFamily="34" charset="-122"/>
                 <a:cs typeface="Calibri" pitchFamily="34" charset="-120"/>
               </a:rPr>
-              <a:t>Peut grouper par plusieurs colonnes :</a:t>
-            </a:r>
-            <a:endParaRPr lang="en-US" sz="1200" dirty="0"/>
+              <a:t>Grouper par plusieurs colonnes :</a:t>
+            </a:r>
+            <a:endParaRPr lang="en-US" sz="1100" dirty="0"/>
           </a:p>
         </p:txBody>
       </p:sp>
@@ -3009,8 +3911,8 @@
         </p:nvSpPr>
         <p:spPr>
           <a:xfrm>
-            <a:off x="457200" y="3657600"/>
-            <a:ext cx="8229600" cy="521208"/>
+            <a:off x="457200" y="3154680"/>
+            <a:ext cx="8229600" cy="448056"/>
           </a:xfrm>
           <a:prstGeom prst="rect">
             <a:avLst/>
@@ -3019,13 +3921,6 @@
             <a:srgbClr val="E3F2FD"/>
           </a:solidFill>
           <a:ln/>
-          <a:effectLst>
-            <a:outerShdw sx="100000" sy="100000" kx="0" ky="0" algn="bl" rotWithShape="0" blurRad="50800" dist="25400" dir="8100000">
-              <a:srgbClr val="000000">
-                <a:alpha val="12000"/>
-              </a:srgbClr>
-            </a:outerShdw>
-          </a:effectLst>
         </p:spPr>
       </p:sp>
       <p:sp>
@@ -3036,8 +3931,8 @@
         </p:nvSpPr>
         <p:spPr>
           <a:xfrm>
-            <a:off x="457200" y="3657600"/>
-            <a:ext cx="45720" cy="521208"/>
+            <a:off x="457200" y="3154680"/>
+            <a:ext cx="45720" cy="448056"/>
           </a:xfrm>
           <a:prstGeom prst="rect">
             <a:avLst/>
@@ -3056,8 +3951,8 @@
         </p:nvSpPr>
         <p:spPr>
           <a:xfrm>
-            <a:off x="685800" y="3657600"/>
-            <a:ext cx="7818120" cy="521208"/>
+            <a:off x="640080" y="3154680"/>
+            <a:ext cx="7863840" cy="448056"/>
           </a:xfrm>
           <a:prstGeom prst="rect">
             <a:avLst/>
@@ -3081,7 +3976,7 @@
                 <a:ea typeface="JetBrains Mono" pitchFamily="34" charset="-122"/>
                 <a:cs typeface="JetBrains Mono" pitchFamily="34" charset="-120"/>
               </a:rPr>
-              <a:t>SELECT YEAR(date_session), MONTH(date_session), COUNT(*) FROM session</a:t>
+              <a:t>  SELECT YEAR(date), MONTH(date), COUNT(*) FROM session</a:t>
             </a:r>
             <a:endParaRPr lang="en-US" sz="1000" dirty="0"/>
           </a:p>
@@ -3095,8 +3990,8 @@
         </p:nvSpPr>
         <p:spPr>
           <a:xfrm>
-            <a:off x="457200" y="4206240"/>
-            <a:ext cx="8229600" cy="521208"/>
+            <a:off x="457200" y="3630168"/>
+            <a:ext cx="8229600" cy="448056"/>
           </a:xfrm>
           <a:prstGeom prst="rect">
             <a:avLst/>
@@ -3105,13 +4000,6 @@
             <a:srgbClr val="FFFFFF"/>
           </a:solidFill>
           <a:ln/>
-          <a:effectLst>
-            <a:outerShdw sx="100000" sy="100000" kx="0" ky="0" algn="bl" rotWithShape="0" blurRad="50800" dist="25400" dir="8100000">
-              <a:srgbClr val="000000">
-                <a:alpha val="12000"/>
-              </a:srgbClr>
-            </a:outerShdw>
-          </a:effectLst>
         </p:spPr>
       </p:sp>
       <p:sp>
@@ -3122,8 +4010,8 @@
         </p:nvSpPr>
         <p:spPr>
           <a:xfrm>
-            <a:off x="457200" y="4206240"/>
-            <a:ext cx="45720" cy="521208"/>
+            <a:off x="457200" y="3630168"/>
+            <a:ext cx="45720" cy="448056"/>
           </a:xfrm>
           <a:prstGeom prst="rect">
             <a:avLst/>
@@ -3142,8 +4030,8 @@
         </p:nvSpPr>
         <p:spPr>
           <a:xfrm>
-            <a:off x="685800" y="4206240"/>
-            <a:ext cx="7818120" cy="521208"/>
+            <a:off x="640080" y="3630168"/>
+            <a:ext cx="7863840" cy="448056"/>
           </a:xfrm>
           <a:prstGeom prst="rect">
             <a:avLst/>
@@ -3167,9 +4055,88 @@
                 <a:ea typeface="JetBrains Mono" pitchFamily="34" charset="-122"/>
                 <a:cs typeface="JetBrains Mono" pitchFamily="34" charset="-120"/>
               </a:rPr>
-              <a:t>GROUP BY YEAR(date_session), MONTH(date_session);</a:t>
+              <a:t>  GROUP BY YEAR(date), MONTH(date);</a:t>
             </a:r>
             <a:endParaRPr lang="en-US" sz="1000" dirty="0"/>
+          </a:p>
+        </p:txBody>
+      </p:sp>
+      <p:sp>
+        <p:nvSpPr>
+          <p:cNvPr id="25" name="Shape 23"/>
+          <p:cNvSpPr/>
+          <p:nvPr/>
+        </p:nvSpPr>
+        <p:spPr>
+          <a:xfrm>
+            <a:off x="457200" y="4105656"/>
+            <a:ext cx="8229600" cy="448056"/>
+          </a:xfrm>
+          <a:prstGeom prst="rect">
+            <a:avLst/>
+          </a:prstGeom>
+          <a:solidFill>
+            <a:srgbClr val="E3F2FD"/>
+          </a:solidFill>
+          <a:ln/>
+        </p:spPr>
+      </p:sp>
+      <p:sp>
+        <p:nvSpPr>
+          <p:cNvPr id="26" name="Shape 24"/>
+          <p:cNvSpPr/>
+          <p:nvPr/>
+        </p:nvSpPr>
+        <p:spPr>
+          <a:xfrm>
+            <a:off x="457200" y="4105656"/>
+            <a:ext cx="45720" cy="448056"/>
+          </a:xfrm>
+          <a:prstGeom prst="rect">
+            <a:avLst/>
+          </a:prstGeom>
+          <a:solidFill>
+            <a:srgbClr val="1565C0"/>
+          </a:solidFill>
+          <a:ln/>
+        </p:spPr>
+      </p:sp>
+      <p:sp>
+        <p:nvSpPr>
+          <p:cNvPr id="27" name="Text 25"/>
+          <p:cNvSpPr/>
+          <p:nvPr/>
+        </p:nvSpPr>
+        <p:spPr>
+          <a:xfrm>
+            <a:off x="640080" y="4105656"/>
+            <a:ext cx="7863840" cy="448056"/>
+          </a:xfrm>
+          <a:prstGeom prst="rect">
+            <a:avLst/>
+          </a:prstGeom>
+          <a:noFill/>
+          <a:ln/>
+        </p:spPr>
+        <p:txBody>
+          <a:bodyPr wrap="square" lIns="0" tIns="0" rIns="0" bIns="0" rtlCol="0" anchor="ctr"/>
+          <a:lstStyle/>
+          <a:p>
+            <a:pPr indent="0" marL="0">
+              <a:buNone/>
+            </a:pPr>
+            <a:r>
+              <a:rPr lang="en-US" sz="1100" dirty="0">
+                <a:solidFill>
+                  <a:srgbClr val="1A1A2E"/>
+                </a:solidFill>
+                <a:latin typeface="Calibri" pitchFamily="34" charset="0"/>
+                <a:ea typeface="Calibri" pitchFamily="34" charset="-122"/>
+                <a:cs typeface="Calibri" pitchFamily="34" charset="-120"/>
+              </a:rPr>
+              <a:t>Exercice GESCOM : CA par categorie client (SUM CACLIC GROUP BY NOCAT)</a:t>
+            </a:r>
+            <a:endParaRPr lang="en-US" sz="1100" dirty="0"/>
           </a:p>
         </p:txBody>
       </p:sp>
@@ -3234,7 +4201,7 @@
         <p:spPr>
           <a:xfrm>
             <a:off x="457200" y="182880"/>
-            <a:ext cx="8229600" cy="594360"/>
+            <a:ext cx="8229600" cy="502920"/>
           </a:xfrm>
           <a:prstGeom prst="rect">
             <a:avLst/>
@@ -3250,7 +4217,7 @@
               <a:buNone/>
             </a:pPr>
             <a:r>
-              <a:rPr lang="en-US" sz="2400" b="1" dirty="0">
+              <a:rPr lang="en-US" sz="2100" b="1" dirty="0">
                 <a:solidFill>
                   <a:srgbClr val="0D47A1"/>
                 </a:solidFill>
@@ -3258,9 +4225,9 @@
                 <a:ea typeface="Trebuchet MS" pitchFamily="34" charset="-122"/>
                 <a:cs typeface="Trebuchet MS" pitchFamily="34" charset="-120"/>
               </a:rPr>
-              <a:t>HAVING vs WHERE</a:t>
-            </a:r>
-            <a:endParaRPr lang="en-US" sz="2400" dirty="0"/>
+              <a:t>HAVING vs WHERE — ne pas confondre !</a:t>
+            </a:r>
+            <a:endParaRPr lang="en-US" sz="2100" dirty="0"/>
           </a:p>
         </p:txBody>
       </p:sp>
@@ -3272,8 +4239,8 @@
         </p:nvSpPr>
         <p:spPr>
           <a:xfrm>
-            <a:off x="457200" y="914400"/>
-            <a:ext cx="8229600" cy="521208"/>
+            <a:off x="457200" y="777240"/>
+            <a:ext cx="8229600" cy="448056"/>
           </a:xfrm>
           <a:prstGeom prst="rect">
             <a:avLst/>
@@ -3282,13 +4249,6 @@
             <a:srgbClr val="FFFFFF"/>
           </a:solidFill>
           <a:ln/>
-          <a:effectLst>
-            <a:outerShdw sx="100000" sy="100000" kx="0" ky="0" algn="bl" rotWithShape="0" blurRad="50800" dist="25400" dir="8100000">
-              <a:srgbClr val="000000">
-                <a:alpha val="12000"/>
-              </a:srgbClr>
-            </a:outerShdw>
-          </a:effectLst>
         </p:spPr>
       </p:sp>
       <p:sp>
@@ -3299,8 +4259,8 @@
         </p:nvSpPr>
         <p:spPr>
           <a:xfrm>
-            <a:off x="457200" y="914400"/>
-            <a:ext cx="45720" cy="521208"/>
+            <a:off x="457200" y="777240"/>
+            <a:ext cx="45720" cy="448056"/>
           </a:xfrm>
           <a:prstGeom prst="rect">
             <a:avLst/>
@@ -3319,8 +4279,8 @@
         </p:nvSpPr>
         <p:spPr>
           <a:xfrm>
-            <a:off x="685800" y="914400"/>
-            <a:ext cx="7818120" cy="521208"/>
+            <a:off x="640080" y="777240"/>
+            <a:ext cx="7863840" cy="448056"/>
           </a:xfrm>
           <a:prstGeom prst="rect">
             <a:avLst/>
@@ -3358,8 +4318,8 @@
         </p:nvSpPr>
         <p:spPr>
           <a:xfrm>
-            <a:off x="457200" y="1463040"/>
-            <a:ext cx="8229600" cy="521208"/>
+            <a:off x="457200" y="1252728"/>
+            <a:ext cx="8229600" cy="448056"/>
           </a:xfrm>
           <a:prstGeom prst="rect">
             <a:avLst/>
@@ -3368,13 +4328,6 @@
             <a:srgbClr val="E3F2FD"/>
           </a:solidFill>
           <a:ln/>
-          <a:effectLst>
-            <a:outerShdw sx="100000" sy="100000" kx="0" ky="0" algn="bl" rotWithShape="0" blurRad="50800" dist="25400" dir="8100000">
-              <a:srgbClr val="000000">
-                <a:alpha val="12000"/>
-              </a:srgbClr>
-            </a:outerShdw>
-          </a:effectLst>
         </p:spPr>
       </p:sp>
       <p:sp>
@@ -3385,8 +4338,8 @@
         </p:nvSpPr>
         <p:spPr>
           <a:xfrm>
-            <a:off x="457200" y="1463040"/>
-            <a:ext cx="45720" cy="521208"/>
+            <a:off x="457200" y="1252728"/>
+            <a:ext cx="45720" cy="448056"/>
           </a:xfrm>
           <a:prstGeom prst="rect">
             <a:avLst/>
@@ -3405,8 +4358,8 @@
         </p:nvSpPr>
         <p:spPr>
           <a:xfrm>
-            <a:off x="685800" y="1463040"/>
-            <a:ext cx="7818120" cy="521208"/>
+            <a:off x="640080" y="1252728"/>
+            <a:ext cx="7863840" cy="448056"/>
           </a:xfrm>
           <a:prstGeom prst="rect">
             <a:avLst/>
@@ -3430,7 +4383,7 @@
                 <a:ea typeface="JetBrains Mono" pitchFamily="34" charset="-122"/>
                 <a:cs typeface="JetBrains Mono" pitchFamily="34" charset="-120"/>
               </a:rPr>
-              <a:t>HAVING filtre les GROUPES après agrégation</a:t>
+              <a:t>HAVING filtre les GROUPES apres agregation</a:t>
             </a:r>
             <a:endParaRPr lang="en-US" sz="1000" dirty="0"/>
           </a:p>
@@ -3444,8 +4397,8 @@
         </p:nvSpPr>
         <p:spPr>
           <a:xfrm>
-            <a:off x="457200" y="2011680"/>
-            <a:ext cx="8229600" cy="521208"/>
+            <a:off x="457200" y="1728216"/>
+            <a:ext cx="8229600" cy="448056"/>
           </a:xfrm>
           <a:prstGeom prst="rect">
             <a:avLst/>
@@ -3454,13 +4407,6 @@
             <a:srgbClr val="FFFFFF"/>
           </a:solidFill>
           <a:ln/>
-          <a:effectLst>
-            <a:outerShdw sx="100000" sy="100000" kx="0" ky="0" algn="bl" rotWithShape="0" blurRad="50800" dist="25400" dir="8100000">
-              <a:srgbClr val="000000">
-                <a:alpha val="12000"/>
-              </a:srgbClr>
-            </a:outerShdw>
-          </a:effectLst>
         </p:spPr>
       </p:sp>
       <p:sp>
@@ -3471,8 +4417,8 @@
         </p:nvSpPr>
         <p:spPr>
           <a:xfrm>
-            <a:off x="457200" y="2011680"/>
-            <a:ext cx="45720" cy="521208"/>
+            <a:off x="457200" y="1728216"/>
+            <a:ext cx="45720" cy="448056"/>
           </a:xfrm>
           <a:prstGeom prst="rect">
             <a:avLst/>
@@ -3491,8 +4437,8 @@
         </p:nvSpPr>
         <p:spPr>
           <a:xfrm>
-            <a:off x="685800" y="2011680"/>
-            <a:ext cx="7818120" cy="521208"/>
+            <a:off x="640080" y="1728216"/>
+            <a:ext cx="7863840" cy="448056"/>
           </a:xfrm>
           <a:prstGeom prst="rect">
             <a:avLst/>
@@ -3508,7 +4454,7 @@
               <a:buNone/>
             </a:pPr>
             <a:r>
-              <a:rPr lang="en-US" sz="1200" dirty="0">
+              <a:rPr lang="en-US" sz="1100" dirty="0">
                 <a:solidFill>
                   <a:srgbClr val="1A1A2E"/>
                 </a:solidFill>
@@ -3516,9 +4462,9 @@
                 <a:ea typeface="Calibri" pitchFamily="34" charset="-122"/>
                 <a:cs typeface="Calibri" pitchFamily="34" charset="-120"/>
               </a:rPr>
-              <a:t>❌ WHERE COUNT(*) &gt; 5  — impossible (COUNT n'existe pas encore)</a:t>
-            </a:r>
-            <a:endParaRPr lang="en-US" sz="1200" dirty="0"/>
+              <a:t>On ne peut PAS mettre COUNT dans WHERE → erreur !</a:t>
+            </a:r>
+            <a:endParaRPr lang="en-US" sz="1100" dirty="0"/>
           </a:p>
         </p:txBody>
       </p:sp>
@@ -3530,8 +4476,8 @@
         </p:nvSpPr>
         <p:spPr>
           <a:xfrm>
-            <a:off x="457200" y="2560320"/>
-            <a:ext cx="8229600" cy="521208"/>
+            <a:off x="457200" y="2203704"/>
+            <a:ext cx="8229600" cy="448056"/>
           </a:xfrm>
           <a:prstGeom prst="rect">
             <a:avLst/>
@@ -3540,13 +4486,6 @@
             <a:srgbClr val="E3F2FD"/>
           </a:solidFill>
           <a:ln/>
-          <a:effectLst>
-            <a:outerShdw sx="100000" sy="100000" kx="0" ky="0" algn="bl" rotWithShape="0" blurRad="50800" dist="25400" dir="8100000">
-              <a:srgbClr val="000000">
-                <a:alpha val="12000"/>
-              </a:srgbClr>
-            </a:outerShdw>
-          </a:effectLst>
         </p:spPr>
       </p:sp>
       <p:sp>
@@ -3557,8 +4496,8 @@
         </p:nvSpPr>
         <p:spPr>
           <a:xfrm>
-            <a:off x="457200" y="2560320"/>
-            <a:ext cx="45720" cy="521208"/>
+            <a:off x="457200" y="2203704"/>
+            <a:ext cx="45720" cy="448056"/>
           </a:xfrm>
           <a:prstGeom prst="rect">
             <a:avLst/>
@@ -3577,8 +4516,8 @@
         </p:nvSpPr>
         <p:spPr>
           <a:xfrm>
-            <a:off x="685800" y="2560320"/>
-            <a:ext cx="7818120" cy="521208"/>
+            <a:off x="640080" y="2203704"/>
+            <a:ext cx="7863840" cy="448056"/>
           </a:xfrm>
           <a:prstGeom prst="rect">
             <a:avLst/>
@@ -3594,7 +4533,7 @@
               <a:buNone/>
             </a:pPr>
             <a:r>
-              <a:rPr lang="en-US" sz="1200" dirty="0">
+              <a:rPr lang="en-US" sz="1100" dirty="0">
                 <a:solidFill>
                   <a:srgbClr val="1A1A2E"/>
                 </a:solidFill>
@@ -3602,9 +4541,9 @@
                 <a:ea typeface="Calibri" pitchFamily="34" charset="-122"/>
                 <a:cs typeface="Calibri" pitchFamily="34" charset="-120"/>
               </a:rPr>
-              <a:t>✅ HAVING COUNT(*) &gt; 5  — filtre les groupes</a:t>
-            </a:r>
-            <a:endParaRPr lang="en-US" sz="1200" dirty="0"/>
+              <a:t>On PEUT mettre COUNT dans HAVING</a:t>
+            </a:r>
+            <a:endParaRPr lang="en-US" sz="1100" dirty="0"/>
           </a:p>
         </p:txBody>
       </p:sp>
@@ -3616,8 +4555,8 @@
         </p:nvSpPr>
         <p:spPr>
           <a:xfrm>
-            <a:off x="457200" y="3108960"/>
-            <a:ext cx="8229600" cy="521208"/>
+            <a:off x="457200" y="2679192"/>
+            <a:ext cx="8229600" cy="448056"/>
           </a:xfrm>
           <a:prstGeom prst="rect">
             <a:avLst/>
@@ -3626,13 +4565,6 @@
             <a:srgbClr val="FFFFFF"/>
           </a:solidFill>
           <a:ln/>
-          <a:effectLst>
-            <a:outerShdw sx="100000" sy="100000" kx="0" ky="0" algn="bl" rotWithShape="0" blurRad="50800" dist="25400" dir="8100000">
-              <a:srgbClr val="000000">
-                <a:alpha val="12000"/>
-              </a:srgbClr>
-            </a:outerShdw>
-          </a:effectLst>
         </p:spPr>
       </p:sp>
       <p:sp>
@@ -3643,8 +4575,8 @@
         </p:nvSpPr>
         <p:spPr>
           <a:xfrm>
-            <a:off x="457200" y="3108960"/>
-            <a:ext cx="45720" cy="521208"/>
+            <a:off x="457200" y="2679192"/>
+            <a:ext cx="45720" cy="448056"/>
           </a:xfrm>
           <a:prstGeom prst="rect">
             <a:avLst/>
@@ -3663,8 +4595,8 @@
         </p:nvSpPr>
         <p:spPr>
           <a:xfrm>
-            <a:off x="685800" y="3108960"/>
-            <a:ext cx="7818120" cy="521208"/>
+            <a:off x="640080" y="2679192"/>
+            <a:ext cx="7863840" cy="448056"/>
           </a:xfrm>
           <a:prstGeom prst="rect">
             <a:avLst/>
@@ -3680,7 +4612,7 @@
               <a:buNone/>
             </a:pPr>
             <a:r>
-              <a:rPr lang="en-US" sz="1200" dirty="0">
+              <a:rPr lang="en-US" sz="1100" dirty="0">
                 <a:solidFill>
                   <a:srgbClr val="1A1A2E"/>
                 </a:solidFill>
@@ -3688,9 +4620,9 @@
                 <a:ea typeface="Calibri" pitchFamily="34" charset="-122"/>
                 <a:cs typeface="Calibri" pitchFamily="34" charset="-120"/>
               </a:rPr>
-              <a:t>Ordre d'exécution SQL :</a:t>
-            </a:r>
-            <a:endParaRPr lang="en-US" sz="1200" dirty="0"/>
+              <a:t>Ordre d'execution SQL :</a:t>
+            </a:r>
+            <a:endParaRPr lang="en-US" sz="1100" dirty="0"/>
           </a:p>
         </p:txBody>
       </p:sp>
@@ -3702,8 +4634,8 @@
         </p:nvSpPr>
         <p:spPr>
           <a:xfrm>
-            <a:off x="457200" y="3657600"/>
-            <a:ext cx="8229600" cy="521208"/>
+            <a:off x="457200" y="3154680"/>
+            <a:ext cx="8229600" cy="448056"/>
           </a:xfrm>
           <a:prstGeom prst="rect">
             <a:avLst/>
@@ -3712,13 +4644,6 @@
             <a:srgbClr val="E3F2FD"/>
           </a:solidFill>
           <a:ln/>
-          <a:effectLst>
-            <a:outerShdw sx="100000" sy="100000" kx="0" ky="0" algn="bl" rotWithShape="0" blurRad="50800" dist="25400" dir="8100000">
-              <a:srgbClr val="000000">
-                <a:alpha val="12000"/>
-              </a:srgbClr>
-            </a:outerShdw>
-          </a:effectLst>
         </p:spPr>
       </p:sp>
       <p:sp>
@@ -3729,8 +4654,8 @@
         </p:nvSpPr>
         <p:spPr>
           <a:xfrm>
-            <a:off x="457200" y="3657600"/>
-            <a:ext cx="45720" cy="521208"/>
+            <a:off x="457200" y="3154680"/>
+            <a:ext cx="45720" cy="448056"/>
           </a:xfrm>
           <a:prstGeom prst="rect">
             <a:avLst/>
@@ -3749,8 +4674,8 @@
         </p:nvSpPr>
         <p:spPr>
           <a:xfrm>
-            <a:off x="685800" y="3657600"/>
-            <a:ext cx="7818120" cy="521208"/>
+            <a:off x="640080" y="3154680"/>
+            <a:ext cx="7863840" cy="448056"/>
           </a:xfrm>
           <a:prstGeom prst="rect">
             <a:avLst/>
@@ -3774,7 +4699,7 @@
                 <a:ea typeface="JetBrains Mono" pitchFamily="34" charset="-122"/>
                 <a:cs typeface="JetBrains Mono" pitchFamily="34" charset="-120"/>
               </a:rPr>
-              <a:t>FROM → WHERE → GROUP BY → HAVING → SELECT → ORDER BY → LIMIT</a:t>
+              <a:t>  FROM → WHERE → GROUP BY → HAVING → SELECT → ORDER BY → LIMIT</a:t>
             </a:r>
             <a:endParaRPr lang="en-US" sz="1000" dirty="0"/>
           </a:p>
@@ -3788,8 +4713,8 @@
         </p:nvSpPr>
         <p:spPr>
           <a:xfrm>
-            <a:off x="457200" y="4206240"/>
-            <a:ext cx="8229600" cy="521208"/>
+            <a:off x="457200" y="3630168"/>
+            <a:ext cx="8229600" cy="448056"/>
           </a:xfrm>
           <a:prstGeom prst="rect">
             <a:avLst/>
@@ -3798,13 +4723,6 @@
             <a:srgbClr val="FFFFFF"/>
           </a:solidFill>
           <a:ln/>
-          <a:effectLst>
-            <a:outerShdw sx="100000" sy="100000" kx="0" ky="0" algn="bl" rotWithShape="0" blurRad="50800" dist="25400" dir="8100000">
-              <a:srgbClr val="000000">
-                <a:alpha val="12000"/>
-              </a:srgbClr>
-            </a:outerShdw>
-          </a:effectLst>
         </p:spPr>
       </p:sp>
       <p:sp>
@@ -3815,8 +4733,8 @@
         </p:nvSpPr>
         <p:spPr>
           <a:xfrm>
-            <a:off x="457200" y="4206240"/>
-            <a:ext cx="45720" cy="521208"/>
+            <a:off x="457200" y="3630168"/>
+            <a:ext cx="45720" cy="448056"/>
           </a:xfrm>
           <a:prstGeom prst="rect">
             <a:avLst/>
@@ -3835,8 +4753,8 @@
         </p:nvSpPr>
         <p:spPr>
           <a:xfrm>
-            <a:off x="685800" y="4206240"/>
-            <a:ext cx="7818120" cy="521208"/>
+            <a:off x="640080" y="3630168"/>
+            <a:ext cx="7863840" cy="448056"/>
           </a:xfrm>
           <a:prstGeom prst="rect">
             <a:avLst/>
@@ -3852,7 +4770,7 @@
               <a:buNone/>
             </a:pPr>
             <a:r>
-              <a:rPr lang="en-US" sz="1200" dirty="0">
+              <a:rPr lang="en-US" sz="1100" dirty="0">
                 <a:solidFill>
                   <a:srgbClr val="1A1A2E"/>
                 </a:solidFill>
@@ -3860,9 +4778,88 @@
                 <a:ea typeface="Calibri" pitchFamily="34" charset="-122"/>
                 <a:cs typeface="Calibri" pitchFamily="34" charset="-120"/>
               </a:rPr>
-              <a:t>On peut combiner WHERE et HAVING dans la même requête</a:t>
-            </a:r>
-            <a:endParaRPr lang="en-US" sz="1200" dirty="0"/>
+              <a:t>Combinaison : WHERE + GROUP BY + HAVING dans la meme requete</a:t>
+            </a:r>
+            <a:endParaRPr lang="en-US" sz="1100" dirty="0"/>
+          </a:p>
+        </p:txBody>
+      </p:sp>
+      <p:sp>
+        <p:nvSpPr>
+          <p:cNvPr id="25" name="Shape 23"/>
+          <p:cNvSpPr/>
+          <p:nvPr/>
+        </p:nvSpPr>
+        <p:spPr>
+          <a:xfrm>
+            <a:off x="457200" y="4105656"/>
+            <a:ext cx="8229600" cy="448056"/>
+          </a:xfrm>
+          <a:prstGeom prst="rect">
+            <a:avLst/>
+          </a:prstGeom>
+          <a:solidFill>
+            <a:srgbClr val="E3F2FD"/>
+          </a:solidFill>
+          <a:ln/>
+        </p:spPr>
+      </p:sp>
+      <p:sp>
+        <p:nvSpPr>
+          <p:cNvPr id="26" name="Shape 24"/>
+          <p:cNvSpPr/>
+          <p:nvPr/>
+        </p:nvSpPr>
+        <p:spPr>
+          <a:xfrm>
+            <a:off x="457200" y="4105656"/>
+            <a:ext cx="45720" cy="448056"/>
+          </a:xfrm>
+          <a:prstGeom prst="rect">
+            <a:avLst/>
+          </a:prstGeom>
+          <a:solidFill>
+            <a:srgbClr val="1565C0"/>
+          </a:solidFill>
+          <a:ln/>
+        </p:spPr>
+      </p:sp>
+      <p:sp>
+        <p:nvSpPr>
+          <p:cNvPr id="27" name="Text 25"/>
+          <p:cNvSpPr/>
+          <p:nvPr/>
+        </p:nvSpPr>
+        <p:spPr>
+          <a:xfrm>
+            <a:off x="640080" y="4105656"/>
+            <a:ext cx="7863840" cy="448056"/>
+          </a:xfrm>
+          <a:prstGeom prst="rect">
+            <a:avLst/>
+          </a:prstGeom>
+          <a:noFill/>
+          <a:ln/>
+        </p:spPr>
+        <p:txBody>
+          <a:bodyPr wrap="square" lIns="0" tIns="0" rIns="0" bIns="0" rtlCol="0" anchor="ctr"/>
+          <a:lstStyle/>
+          <a:p>
+            <a:pPr indent="0" marL="0">
+              <a:buNone/>
+            </a:pPr>
+            <a:r>
+              <a:rPr lang="en-US" sz="1100" dirty="0">
+                <a:solidFill>
+                  <a:srgbClr val="1A1A2E"/>
+                </a:solidFill>
+                <a:latin typeface="Calibri" pitchFamily="34" charset="0"/>
+                <a:ea typeface="Calibri" pitchFamily="34" charset="-122"/>
+                <a:cs typeface="Calibri" pitchFamily="34" charset="-120"/>
+              </a:rPr>
+              <a:t>Exercice GESCOM : familles ayant plus de 3 articles (HAVING COUNT &gt; 3)</a:t>
+            </a:r>
+            <a:endParaRPr lang="en-US" sz="1100" dirty="0"/>
           </a:p>
         </p:txBody>
       </p:sp>
@@ -3927,7 +4924,7 @@
         <p:spPr>
           <a:xfrm>
             <a:off x="457200" y="182880"/>
-            <a:ext cx="8229600" cy="594360"/>
+            <a:ext cx="8229600" cy="502920"/>
           </a:xfrm>
           <a:prstGeom prst="rect">
             <a:avLst/>
@@ -3943,7 +4940,7 @@
               <a:buNone/>
             </a:pPr>
             <a:r>
-              <a:rPr lang="en-US" sz="2400" b="1" dirty="0">
+              <a:rPr lang="en-US" sz="2100" b="1" dirty="0">
                 <a:solidFill>
                   <a:srgbClr val="0D47A1"/>
                 </a:solidFill>
@@ -3953,7 +4950,7 @@
               </a:rPr>
               <a:t>Fonctions MySQL utiles</a:t>
             </a:r>
-            <a:endParaRPr lang="en-US" sz="2400" dirty="0"/>
+            <a:endParaRPr lang="en-US" sz="2100" dirty="0"/>
           </a:p>
         </p:txBody>
       </p:sp>
@@ -3965,8 +4962,8 @@
         </p:nvSpPr>
         <p:spPr>
           <a:xfrm>
-            <a:off x="457200" y="914400"/>
-            <a:ext cx="8229600" cy="464058"/>
+            <a:off x="457200" y="777240"/>
+            <a:ext cx="8229600" cy="448056"/>
           </a:xfrm>
           <a:prstGeom prst="rect">
             <a:avLst/>
@@ -3975,13 +4972,6 @@
             <a:srgbClr val="FFFFFF"/>
           </a:solidFill>
           <a:ln/>
-          <a:effectLst>
-            <a:outerShdw sx="100000" sy="100000" kx="0" ky="0" algn="bl" rotWithShape="0" blurRad="50800" dist="25400" dir="8100000">
-              <a:srgbClr val="000000">
-                <a:alpha val="12000"/>
-              </a:srgbClr>
-            </a:outerShdw>
-          </a:effectLst>
         </p:spPr>
       </p:sp>
       <p:sp>
@@ -3992,8 +4982,8 @@
         </p:nvSpPr>
         <p:spPr>
           <a:xfrm>
-            <a:off x="457200" y="914400"/>
-            <a:ext cx="45720" cy="464058"/>
+            <a:off x="457200" y="777240"/>
+            <a:ext cx="45720" cy="448056"/>
           </a:xfrm>
           <a:prstGeom prst="rect">
             <a:avLst/>
@@ -4012,8 +5002,8 @@
         </p:nvSpPr>
         <p:spPr>
           <a:xfrm>
-            <a:off x="685800" y="914400"/>
-            <a:ext cx="7818120" cy="464058"/>
+            <a:off x="640080" y="777240"/>
+            <a:ext cx="7863840" cy="448056"/>
           </a:xfrm>
           <a:prstGeom prst="rect">
             <a:avLst/>
@@ -4029,7 +5019,7 @@
               <a:buNone/>
             </a:pPr>
             <a:r>
-              <a:rPr lang="en-US" sz="1200" dirty="0">
+              <a:rPr lang="en-US" sz="1100" dirty="0">
                 <a:solidFill>
                   <a:srgbClr val="1A1A2E"/>
                 </a:solidFill>
@@ -4037,9 +5027,9 @@
                 <a:ea typeface="Calibri" pitchFamily="34" charset="-122"/>
                 <a:cs typeface="Calibri" pitchFamily="34" charset="-120"/>
               </a:rPr>
-              <a:t>YEAR(date), MONTH(date), DAY(date) — extraire parties de date</a:t>
-            </a:r>
-            <a:endParaRPr lang="en-US" sz="1200" dirty="0"/>
+              <a:t>YEAR(date), MONTH(date), DAY(date) — extraire parties</a:t>
+            </a:r>
+            <a:endParaRPr lang="en-US" sz="1100" dirty="0"/>
           </a:p>
         </p:txBody>
       </p:sp>
@@ -4051,8 +5041,8 @@
         </p:nvSpPr>
         <p:spPr>
           <a:xfrm>
-            <a:off x="457200" y="1405890"/>
-            <a:ext cx="8229600" cy="464058"/>
+            <a:off x="457200" y="1252728"/>
+            <a:ext cx="8229600" cy="448056"/>
           </a:xfrm>
           <a:prstGeom prst="rect">
             <a:avLst/>
@@ -4061,13 +5051,6 @@
             <a:srgbClr val="E3F2FD"/>
           </a:solidFill>
           <a:ln/>
-          <a:effectLst>
-            <a:outerShdw sx="100000" sy="100000" kx="0" ky="0" algn="bl" rotWithShape="0" blurRad="50800" dist="25400" dir="8100000">
-              <a:srgbClr val="000000">
-                <a:alpha val="12000"/>
-              </a:srgbClr>
-            </a:outerShdw>
-          </a:effectLst>
         </p:spPr>
       </p:sp>
       <p:sp>
@@ -4078,8 +5061,8 @@
         </p:nvSpPr>
         <p:spPr>
           <a:xfrm>
-            <a:off x="457200" y="1405890"/>
-            <a:ext cx="45720" cy="464058"/>
+            <a:off x="457200" y="1252728"/>
+            <a:ext cx="45720" cy="448056"/>
           </a:xfrm>
           <a:prstGeom prst="rect">
             <a:avLst/>
@@ -4098,8 +5081,8 @@
         </p:nvSpPr>
         <p:spPr>
           <a:xfrm>
-            <a:off x="685800" y="1405890"/>
-            <a:ext cx="7818120" cy="464058"/>
+            <a:off x="640080" y="1252728"/>
+            <a:ext cx="7863840" cy="448056"/>
           </a:xfrm>
           <a:prstGeom prst="rect">
             <a:avLst/>
@@ -4123,7 +5106,7 @@
                 <a:ea typeface="JetBrains Mono" pitchFamily="34" charset="-122"/>
                 <a:cs typeface="JetBrains Mono" pitchFamily="34" charset="-120"/>
               </a:rPr>
-              <a:t>CONCAT(prenom, ' ', nom) — concaténer des textes</a:t>
+              <a:t>CONCAT(prenom, ' ', nom) — concatener textes</a:t>
             </a:r>
             <a:endParaRPr lang="en-US" sz="1000" dirty="0"/>
           </a:p>
@@ -4137,8 +5120,8 @@
         </p:nvSpPr>
         <p:spPr>
           <a:xfrm>
-            <a:off x="457200" y="1897380"/>
-            <a:ext cx="8229600" cy="464058"/>
+            <a:off x="457200" y="1728216"/>
+            <a:ext cx="8229600" cy="448056"/>
           </a:xfrm>
           <a:prstGeom prst="rect">
             <a:avLst/>
@@ -4147,13 +5130,6 @@
             <a:srgbClr val="FFFFFF"/>
           </a:solidFill>
           <a:ln/>
-          <a:effectLst>
-            <a:outerShdw sx="100000" sy="100000" kx="0" ky="0" algn="bl" rotWithShape="0" blurRad="50800" dist="25400" dir="8100000">
-              <a:srgbClr val="000000">
-                <a:alpha val="12000"/>
-              </a:srgbClr>
-            </a:outerShdw>
-          </a:effectLst>
         </p:spPr>
       </p:sp>
       <p:sp>
@@ -4164,8 +5140,8 @@
         </p:nvSpPr>
         <p:spPr>
           <a:xfrm>
-            <a:off x="457200" y="1897380"/>
-            <a:ext cx="45720" cy="464058"/>
+            <a:off x="457200" y="1728216"/>
+            <a:ext cx="45720" cy="448056"/>
           </a:xfrm>
           <a:prstGeom prst="rect">
             <a:avLst/>
@@ -4184,8 +5160,8 @@
         </p:nvSpPr>
         <p:spPr>
           <a:xfrm>
-            <a:off x="685800" y="1897380"/>
-            <a:ext cx="7818120" cy="464058"/>
+            <a:off x="640080" y="1728216"/>
+            <a:ext cx="7863840" cy="448056"/>
           </a:xfrm>
           <a:prstGeom prst="rect">
             <a:avLst/>
@@ -4201,7 +5177,7 @@
               <a:buNone/>
             </a:pPr>
             <a:r>
-              <a:rPr lang="en-US" sz="1200" dirty="0">
+              <a:rPr lang="en-US" sz="1100" dirty="0">
                 <a:solidFill>
                   <a:srgbClr val="1A1A2E"/>
                 </a:solidFill>
@@ -4211,7 +5187,7 @@
               </a:rPr>
               <a:t>UPPER(nom), LOWER(email) — majuscules/minuscules</a:t>
             </a:r>
-            <a:endParaRPr lang="en-US" sz="1200" dirty="0"/>
+            <a:endParaRPr lang="en-US" sz="1100" dirty="0"/>
           </a:p>
         </p:txBody>
       </p:sp>
@@ -4223,8 +5199,8 @@
         </p:nvSpPr>
         <p:spPr>
           <a:xfrm>
-            <a:off x="457200" y="2388870"/>
-            <a:ext cx="8229600" cy="464058"/>
+            <a:off x="457200" y="2203704"/>
+            <a:ext cx="8229600" cy="448056"/>
           </a:xfrm>
           <a:prstGeom prst="rect">
             <a:avLst/>
@@ -4233,13 +5209,6 @@
             <a:srgbClr val="E3F2FD"/>
           </a:solidFill>
           <a:ln/>
-          <a:effectLst>
-            <a:outerShdw sx="100000" sy="100000" kx="0" ky="0" algn="bl" rotWithShape="0" blurRad="50800" dist="25400" dir="8100000">
-              <a:srgbClr val="000000">
-                <a:alpha val="12000"/>
-              </a:srgbClr>
-            </a:outerShdw>
-          </a:effectLst>
         </p:spPr>
       </p:sp>
       <p:sp>
@@ -4250,8 +5219,8 @@
         </p:nvSpPr>
         <p:spPr>
           <a:xfrm>
-            <a:off x="457200" y="2388870"/>
-            <a:ext cx="45720" cy="464058"/>
+            <a:off x="457200" y="2203704"/>
+            <a:ext cx="45720" cy="448056"/>
           </a:xfrm>
           <a:prstGeom prst="rect">
             <a:avLst/>
@@ -4270,8 +5239,8 @@
         </p:nvSpPr>
         <p:spPr>
           <a:xfrm>
-            <a:off x="685800" y="2388870"/>
-            <a:ext cx="7818120" cy="464058"/>
+            <a:off x="640080" y="2203704"/>
+            <a:ext cx="7863840" cy="448056"/>
           </a:xfrm>
           <a:prstGeom prst="rect">
             <a:avLst/>
@@ -4287,7 +5256,86 @@
               <a:buNone/>
             </a:pPr>
             <a:r>
-              <a:rPr lang="en-US" sz="1200" dirty="0">
+              <a:rPr lang="en-US" sz="1000" dirty="0">
+                <a:solidFill>
+                  <a:srgbClr val="0D47A1"/>
+                </a:solidFill>
+                <a:latin typeface="JetBrains Mono" pitchFamily="34" charset="0"/>
+                <a:ea typeface="JetBrains Mono" pitchFamily="34" charset="-122"/>
+                <a:cs typeface="JetBrains Mono" pitchFamily="34" charset="-120"/>
+              </a:rPr>
+              <a:t>ROUND(valeur, 2) — arrondir</a:t>
+            </a:r>
+            <a:endParaRPr lang="en-US" sz="1000" dirty="0"/>
+          </a:p>
+        </p:txBody>
+      </p:sp>
+      <p:sp>
+        <p:nvSpPr>
+          <p:cNvPr id="16" name="Shape 14"/>
+          <p:cNvSpPr/>
+          <p:nvPr/>
+        </p:nvSpPr>
+        <p:spPr>
+          <a:xfrm>
+            <a:off x="457200" y="2679192"/>
+            <a:ext cx="8229600" cy="448056"/>
+          </a:xfrm>
+          <a:prstGeom prst="rect">
+            <a:avLst/>
+          </a:prstGeom>
+          <a:solidFill>
+            <a:srgbClr val="FFFFFF"/>
+          </a:solidFill>
+          <a:ln/>
+        </p:spPr>
+      </p:sp>
+      <p:sp>
+        <p:nvSpPr>
+          <p:cNvPr id="17" name="Shape 15"/>
+          <p:cNvSpPr/>
+          <p:nvPr/>
+        </p:nvSpPr>
+        <p:spPr>
+          <a:xfrm>
+            <a:off x="457200" y="2679192"/>
+            <a:ext cx="45720" cy="448056"/>
+          </a:xfrm>
+          <a:prstGeom prst="rect">
+            <a:avLst/>
+          </a:prstGeom>
+          <a:solidFill>
+            <a:srgbClr val="1565C0"/>
+          </a:solidFill>
+          <a:ln/>
+        </p:spPr>
+      </p:sp>
+      <p:sp>
+        <p:nvSpPr>
+          <p:cNvPr id="18" name="Text 16"/>
+          <p:cNvSpPr/>
+          <p:nvPr/>
+        </p:nvSpPr>
+        <p:spPr>
+          <a:xfrm>
+            <a:off x="640080" y="2679192"/>
+            <a:ext cx="7863840" cy="448056"/>
+          </a:xfrm>
+          <a:prstGeom prst="rect">
+            <a:avLst/>
+          </a:prstGeom>
+          <a:noFill/>
+          <a:ln/>
+        </p:spPr>
+        <p:txBody>
+          <a:bodyPr wrap="square" lIns="0" tIns="0" rIns="0" bIns="0" rtlCol="0" anchor="ctr"/>
+          <a:lstStyle/>
+          <a:p>
+            <a:pPr indent="0" marL="0">
+              <a:buNone/>
+            </a:pPr>
+            <a:r>
+              <a:rPr lang="en-US" sz="1100" dirty="0">
                 <a:solidFill>
                   <a:srgbClr val="1A1A2E"/>
                 </a:solidFill>
@@ -4295,49 +5343,42 @@
                 <a:ea typeface="Calibri" pitchFamily="34" charset="-122"/>
                 <a:cs typeface="Calibri" pitchFamily="34" charset="-120"/>
               </a:rPr>
-              <a:t>ROUND(valeur, 2) — arrondir</a:t>
-            </a:r>
-            <a:endParaRPr lang="en-US" sz="1200" dirty="0"/>
-          </a:p>
-        </p:txBody>
-      </p:sp>
-      <p:sp>
-        <p:nvSpPr>
-          <p:cNvPr id="16" name="Shape 14"/>
-          <p:cNvSpPr/>
-          <p:nvPr/>
-        </p:nvSpPr>
-        <p:spPr>
-          <a:xfrm>
-            <a:off x="457200" y="2880360"/>
-            <a:ext cx="8229600" cy="464058"/>
-          </a:xfrm>
-          <a:prstGeom prst="rect">
-            <a:avLst/>
-          </a:prstGeom>
-          <a:solidFill>
-            <a:srgbClr val="FFFFFF"/>
-          </a:solidFill>
-          <a:ln/>
-          <a:effectLst>
-            <a:outerShdw sx="100000" sy="100000" kx="0" ky="0" algn="bl" rotWithShape="0" blurRad="50800" dist="25400" dir="8100000">
-              <a:srgbClr val="000000">
-                <a:alpha val="12000"/>
-              </a:srgbClr>
-            </a:outerShdw>
-          </a:effectLst>
-        </p:spPr>
-      </p:sp>
-      <p:sp>
-        <p:nvSpPr>
-          <p:cNvPr id="17" name="Shape 15"/>
-          <p:cNvSpPr/>
-          <p:nvPr/>
-        </p:nvSpPr>
-        <p:spPr>
-          <a:xfrm>
-            <a:off x="457200" y="2880360"/>
-            <a:ext cx="45720" cy="464058"/>
+              <a:t>NOW() — date+heure | CURDATE() — date seulement</a:t>
+            </a:r>
+            <a:endParaRPr lang="en-US" sz="1100" dirty="0"/>
+          </a:p>
+        </p:txBody>
+      </p:sp>
+      <p:sp>
+        <p:nvSpPr>
+          <p:cNvPr id="19" name="Shape 17"/>
+          <p:cNvSpPr/>
+          <p:nvPr/>
+        </p:nvSpPr>
+        <p:spPr>
+          <a:xfrm>
+            <a:off x="457200" y="3154680"/>
+            <a:ext cx="8229600" cy="448056"/>
+          </a:xfrm>
+          <a:prstGeom prst="rect">
+            <a:avLst/>
+          </a:prstGeom>
+          <a:solidFill>
+            <a:srgbClr val="E3F2FD"/>
+          </a:solidFill>
+          <a:ln/>
+        </p:spPr>
+      </p:sp>
+      <p:sp>
+        <p:nvSpPr>
+          <p:cNvPr id="20" name="Shape 18"/>
+          <p:cNvSpPr/>
+          <p:nvPr/>
+        </p:nvSpPr>
+        <p:spPr>
+          <a:xfrm>
+            <a:off x="457200" y="3154680"/>
+            <a:ext cx="45720" cy="448056"/>
           </a:xfrm>
           <a:prstGeom prst="rect">
             <a:avLst/>
@@ -4350,100 +5391,14 @@
       </p:sp>
       <p:sp>
         <p:nvSpPr>
-          <p:cNvPr id="18" name="Text 16"/>
-          <p:cNvSpPr/>
-          <p:nvPr/>
-        </p:nvSpPr>
-        <p:spPr>
-          <a:xfrm>
-            <a:off x="685800" y="2880360"/>
-            <a:ext cx="7818120" cy="464058"/>
-          </a:xfrm>
-          <a:prstGeom prst="rect">
-            <a:avLst/>
-          </a:prstGeom>
-          <a:noFill/>
-          <a:ln/>
-        </p:spPr>
-        <p:txBody>
-          <a:bodyPr wrap="square" lIns="0" tIns="0" rIns="0" bIns="0" rtlCol="0" anchor="ctr"/>
-          <a:lstStyle/>
-          <a:p>
-            <a:pPr indent="0" marL="0">
-              <a:buNone/>
-            </a:pPr>
-            <a:r>
-              <a:rPr lang="en-US" sz="1200" dirty="0">
-                <a:solidFill>
-                  <a:srgbClr val="1A1A2E"/>
-                </a:solidFill>
-                <a:latin typeface="Calibri" pitchFamily="34" charset="0"/>
-                <a:ea typeface="Calibri" pitchFamily="34" charset="-122"/>
-                <a:cs typeface="Calibri" pitchFamily="34" charset="-120"/>
-              </a:rPr>
-              <a:t>NOW() — date et heure actuelles | CURDATE() — date seulement</a:t>
-            </a:r>
-            <a:endParaRPr lang="en-US" sz="1200" dirty="0"/>
-          </a:p>
-        </p:txBody>
-      </p:sp>
-      <p:sp>
-        <p:nvSpPr>
-          <p:cNvPr id="19" name="Shape 17"/>
-          <p:cNvSpPr/>
-          <p:nvPr/>
-        </p:nvSpPr>
-        <p:spPr>
-          <a:xfrm>
-            <a:off x="457200" y="3371850"/>
-            <a:ext cx="8229600" cy="464058"/>
-          </a:xfrm>
-          <a:prstGeom prst="rect">
-            <a:avLst/>
-          </a:prstGeom>
-          <a:solidFill>
-            <a:srgbClr val="E3F2FD"/>
-          </a:solidFill>
-          <a:ln/>
-          <a:effectLst>
-            <a:outerShdw sx="100000" sy="100000" kx="0" ky="0" algn="bl" rotWithShape="0" blurRad="50800" dist="25400" dir="8100000">
-              <a:srgbClr val="000000">
-                <a:alpha val="12000"/>
-              </a:srgbClr>
-            </a:outerShdw>
-          </a:effectLst>
-        </p:spPr>
-      </p:sp>
-      <p:sp>
-        <p:nvSpPr>
-          <p:cNvPr id="20" name="Shape 18"/>
-          <p:cNvSpPr/>
-          <p:nvPr/>
-        </p:nvSpPr>
-        <p:spPr>
-          <a:xfrm>
-            <a:off x="457200" y="3371850"/>
-            <a:ext cx="45720" cy="464058"/>
-          </a:xfrm>
-          <a:prstGeom prst="rect">
-            <a:avLst/>
-          </a:prstGeom>
-          <a:solidFill>
-            <a:srgbClr val="1565C0"/>
-          </a:solidFill>
-          <a:ln/>
-        </p:spPr>
-      </p:sp>
-      <p:sp>
-        <p:nvSpPr>
           <p:cNvPr id="21" name="Text 19"/>
           <p:cNvSpPr/>
           <p:nvPr/>
         </p:nvSpPr>
         <p:spPr>
           <a:xfrm>
-            <a:off x="685800" y="3371850"/>
-            <a:ext cx="7818120" cy="464058"/>
+            <a:off x="640080" y="3154680"/>
+            <a:ext cx="7863840" cy="448056"/>
           </a:xfrm>
           <a:prstGeom prst="rect">
             <a:avLst/>
@@ -4467,7 +5422,7 @@
                 <a:ea typeface="JetBrains Mono" pitchFamily="34" charset="-122"/>
                 <a:cs typeface="JetBrains Mono" pitchFamily="34" charset="-120"/>
               </a:rPr>
-              <a:t>DATEDIFF(date1, date2) — différence en jours</a:t>
+              <a:t>DATEDIFF(date1, date2) — difference en jours</a:t>
             </a:r>
             <a:endParaRPr lang="en-US" sz="1000" dirty="0"/>
           </a:p>
@@ -4481,8 +5436,8 @@
         </p:nvSpPr>
         <p:spPr>
           <a:xfrm>
-            <a:off x="457200" y="3863340"/>
-            <a:ext cx="8229600" cy="464058"/>
+            <a:off x="457200" y="3630168"/>
+            <a:ext cx="8229600" cy="448056"/>
           </a:xfrm>
           <a:prstGeom prst="rect">
             <a:avLst/>
@@ -4491,13 +5446,6 @@
             <a:srgbClr val="FFFFFF"/>
           </a:solidFill>
           <a:ln/>
-          <a:effectLst>
-            <a:outerShdw sx="100000" sy="100000" kx="0" ky="0" algn="bl" rotWithShape="0" blurRad="50800" dist="25400" dir="8100000">
-              <a:srgbClr val="000000">
-                <a:alpha val="12000"/>
-              </a:srgbClr>
-            </a:outerShdw>
-          </a:effectLst>
         </p:spPr>
       </p:sp>
       <p:sp>
@@ -4508,8 +5456,8 @@
         </p:nvSpPr>
         <p:spPr>
           <a:xfrm>
-            <a:off x="457200" y="3863340"/>
-            <a:ext cx="45720" cy="464058"/>
+            <a:off x="457200" y="3630168"/>
+            <a:ext cx="45720" cy="448056"/>
           </a:xfrm>
           <a:prstGeom prst="rect">
             <a:avLst/>
@@ -4528,8 +5476,8 @@
         </p:nvSpPr>
         <p:spPr>
           <a:xfrm>
-            <a:off x="685800" y="3863340"/>
-            <a:ext cx="7818120" cy="464058"/>
+            <a:off x="640080" y="3630168"/>
+            <a:ext cx="7863840" cy="448056"/>
           </a:xfrm>
           <a:prstGeom prst="rect">
             <a:avLst/>
@@ -4545,17 +5493,17 @@
               <a:buNone/>
             </a:pPr>
             <a:r>
-              <a:rPr lang="en-US" sz="1200" dirty="0">
-                <a:solidFill>
-                  <a:srgbClr val="1A1A2E"/>
-                </a:solidFill>
-                <a:latin typeface="Calibri" pitchFamily="34" charset="0"/>
-                <a:ea typeface="Calibri" pitchFamily="34" charset="-122"/>
-                <a:cs typeface="Calibri" pitchFamily="34" charset="-120"/>
-              </a:rPr>
-              <a:t>IFNULL(colonne, 'N/A') — remplacer NULL par une valeur</a:t>
-            </a:r>
-            <a:endParaRPr lang="en-US" sz="1200" dirty="0"/>
+              <a:rPr lang="en-US" sz="1000" dirty="0">
+                <a:solidFill>
+                  <a:srgbClr val="0D47A1"/>
+                </a:solidFill>
+                <a:latin typeface="JetBrains Mono" pitchFamily="34" charset="0"/>
+                <a:ea typeface="JetBrains Mono" pitchFamily="34" charset="-122"/>
+                <a:cs typeface="JetBrains Mono" pitchFamily="34" charset="-120"/>
+              </a:rPr>
+              <a:t>IFNULL(colonne, 'N/A') — remplacer NULL</a:t>
+            </a:r>
+            <a:endParaRPr lang="en-US" sz="1000" dirty="0"/>
           </a:p>
         </p:txBody>
       </p:sp>
@@ -4567,8 +5515,8 @@
         </p:nvSpPr>
         <p:spPr>
           <a:xfrm>
-            <a:off x="457200" y="4354830"/>
-            <a:ext cx="8229600" cy="464058"/>
+            <a:off x="457200" y="4105656"/>
+            <a:ext cx="8229600" cy="448056"/>
           </a:xfrm>
           <a:prstGeom prst="rect">
             <a:avLst/>
@@ -4577,13 +5525,6 @@
             <a:srgbClr val="E3F2FD"/>
           </a:solidFill>
           <a:ln/>
-          <a:effectLst>
-            <a:outerShdw sx="100000" sy="100000" kx="0" ky="0" algn="bl" rotWithShape="0" blurRad="50800" dist="25400" dir="8100000">
-              <a:srgbClr val="000000">
-                <a:alpha val="12000"/>
-              </a:srgbClr>
-            </a:outerShdw>
-          </a:effectLst>
         </p:spPr>
       </p:sp>
       <p:sp>
@@ -4594,8 +5535,8 @@
         </p:nvSpPr>
         <p:spPr>
           <a:xfrm>
-            <a:off x="457200" y="4354830"/>
-            <a:ext cx="45720" cy="464058"/>
+            <a:off x="457200" y="4105656"/>
+            <a:ext cx="45720" cy="448056"/>
           </a:xfrm>
           <a:prstGeom prst="rect">
             <a:avLst/>
@@ -4614,8 +5555,8 @@
         </p:nvSpPr>
         <p:spPr>
           <a:xfrm>
-            <a:off x="685800" y="4354830"/>
-            <a:ext cx="7818120" cy="464058"/>
+            <a:off x="640080" y="4105656"/>
+            <a:ext cx="7863840" cy="448056"/>
           </a:xfrm>
           <a:prstGeom prst="rect">
             <a:avLst/>
@@ -4631,17 +5572,17 @@
               <a:buNone/>
             </a:pPr>
             <a:r>
-              <a:rPr lang="en-US" sz="1200" dirty="0">
-                <a:solidFill>
-                  <a:srgbClr val="1A1A2E"/>
-                </a:solidFill>
-                <a:latin typeface="Calibri" pitchFamily="34" charset="0"/>
-                <a:ea typeface="Calibri" pitchFamily="34" charset="-122"/>
-                <a:cs typeface="Calibri" pitchFamily="34" charset="-120"/>
-              </a:rPr>
-              <a:t>TIMESTAMPDIFF(HOUR, debut, fin) — différence en heures</a:t>
-            </a:r>
-            <a:endParaRPr lang="en-US" sz="1200" dirty="0"/>
+              <a:rPr lang="en-US" sz="1000" dirty="0">
+                <a:solidFill>
+                  <a:srgbClr val="0D47A1"/>
+                </a:solidFill>
+                <a:latin typeface="JetBrains Mono" pitchFamily="34" charset="0"/>
+                <a:ea typeface="JetBrains Mono" pitchFamily="34" charset="-122"/>
+                <a:cs typeface="JetBrains Mono" pitchFamily="34" charset="-120"/>
+              </a:rPr>
+              <a:t>COALESCE(a, b, c) — premier non-NULL</a:t>
+            </a:r>
+            <a:endParaRPr lang="en-US" sz="1000" dirty="0"/>
           </a:p>
         </p:txBody>
       </p:sp>
@@ -4706,7 +5647,7 @@
         <p:spPr>
           <a:xfrm>
             <a:off x="457200" y="182880"/>
-            <a:ext cx="8229600" cy="594360"/>
+            <a:ext cx="8229600" cy="502920"/>
           </a:xfrm>
           <a:prstGeom prst="rect">
             <a:avLst/>
@@ -4722,7 +5663,7 @@
               <a:buNone/>
             </a:pPr>
             <a:r>
-              <a:rPr lang="en-US" sz="2400" b="1" dirty="0">
+              <a:rPr lang="en-US" sz="2100" b="1" dirty="0">
                 <a:solidFill>
                   <a:srgbClr val="0D47A1"/>
                 </a:solidFill>
@@ -4730,9 +5671,9 @@
                 <a:ea typeface="Trebuchet MS" pitchFamily="34" charset="-122"/>
                 <a:cs typeface="Trebuchet MS" pitchFamily="34" charset="-120"/>
               </a:rPr>
-              <a:t>Sous-requêtes dans WHERE</a:t>
-            </a:r>
-            <a:endParaRPr lang="en-US" sz="2400" dirty="0"/>
+              <a:t>Sous-requetes dans WHERE</a:t>
+            </a:r>
+            <a:endParaRPr lang="en-US" sz="2100" dirty="0"/>
           </a:p>
         </p:txBody>
       </p:sp>
@@ -4744,8 +5685,8 @@
         </p:nvSpPr>
         <p:spPr>
           <a:xfrm>
-            <a:off x="457200" y="914400"/>
-            <a:ext cx="8229600" cy="521208"/>
+            <a:off x="457200" y="777240"/>
+            <a:ext cx="8229600" cy="409448"/>
           </a:xfrm>
           <a:prstGeom prst="rect">
             <a:avLst/>
@@ -4754,13 +5695,6 @@
             <a:srgbClr val="FFFFFF"/>
           </a:solidFill>
           <a:ln/>
-          <a:effectLst>
-            <a:outerShdw sx="100000" sy="100000" kx="0" ky="0" algn="bl" rotWithShape="0" blurRad="50800" dist="25400" dir="8100000">
-              <a:srgbClr val="000000">
-                <a:alpha val="12000"/>
-              </a:srgbClr>
-            </a:outerShdw>
-          </a:effectLst>
         </p:spPr>
       </p:sp>
       <p:sp>
@@ -4771,8 +5705,8 @@
         </p:nvSpPr>
         <p:spPr>
           <a:xfrm>
-            <a:off x="457200" y="914400"/>
-            <a:ext cx="45720" cy="521208"/>
+            <a:off x="457200" y="777240"/>
+            <a:ext cx="45720" cy="409448"/>
           </a:xfrm>
           <a:prstGeom prst="rect">
             <a:avLst/>
@@ -4791,8 +5725,8 @@
         </p:nvSpPr>
         <p:spPr>
           <a:xfrm>
-            <a:off x="685800" y="914400"/>
-            <a:ext cx="7818120" cy="521208"/>
+            <a:off x="640080" y="777240"/>
+            <a:ext cx="7863840" cy="409448"/>
           </a:xfrm>
           <a:prstGeom prst="rect">
             <a:avLst/>
@@ -4830,8 +5764,8 @@
         </p:nvSpPr>
         <p:spPr>
           <a:xfrm>
-            <a:off x="457200" y="1463040"/>
-            <a:ext cx="8229600" cy="521208"/>
+            <a:off x="457200" y="1214120"/>
+            <a:ext cx="8229600" cy="409448"/>
           </a:xfrm>
           <a:prstGeom prst="rect">
             <a:avLst/>
@@ -4840,13 +5774,6 @@
             <a:srgbClr val="E3F2FD"/>
           </a:solidFill>
           <a:ln/>
-          <a:effectLst>
-            <a:outerShdw sx="100000" sy="100000" kx="0" ky="0" algn="bl" rotWithShape="0" blurRad="50800" dist="25400" dir="8100000">
-              <a:srgbClr val="000000">
-                <a:alpha val="12000"/>
-              </a:srgbClr>
-            </a:outerShdw>
-          </a:effectLst>
         </p:spPr>
       </p:sp>
       <p:sp>
@@ -4857,8 +5784,8 @@
         </p:nvSpPr>
         <p:spPr>
           <a:xfrm>
-            <a:off x="457200" y="1463040"/>
-            <a:ext cx="45720" cy="521208"/>
+            <a:off x="457200" y="1214120"/>
+            <a:ext cx="45720" cy="409448"/>
           </a:xfrm>
           <a:prstGeom prst="rect">
             <a:avLst/>
@@ -4877,8 +5804,8 @@
         </p:nvSpPr>
         <p:spPr>
           <a:xfrm>
-            <a:off x="685800" y="1463040"/>
-            <a:ext cx="7818120" cy="521208"/>
+            <a:off x="640080" y="1214120"/>
+            <a:ext cx="7863840" cy="409448"/>
           </a:xfrm>
           <a:prstGeom prst="rect">
             <a:avLst/>
@@ -4894,7 +5821,7 @@
               <a:buNone/>
             </a:pPr>
             <a:r>
-              <a:rPr lang="en-US" sz="1200" dirty="0">
+              <a:rPr lang="en-US" sz="1100" dirty="0">
                 <a:solidFill>
                   <a:srgbClr val="1A1A2E"/>
                 </a:solidFill>
@@ -4902,9 +5829,9 @@
                 <a:ea typeface="Calibri" pitchFamily="34" charset="-122"/>
                 <a:cs typeface="Calibri" pitchFamily="34" charset="-120"/>
               </a:rPr>
-              <a:t>→ Albums dont le prix est supérieur à la moyenne</a:t>
-            </a:r>
-            <a:endParaRPr lang="en-US" sz="1200" dirty="0"/>
+              <a:t>  → Albums plus chers que la moyenne</a:t>
+            </a:r>
+            <a:endParaRPr lang="en-US" sz="1100" dirty="0"/>
           </a:p>
         </p:txBody>
       </p:sp>
@@ -4916,8 +5843,8 @@
         </p:nvSpPr>
         <p:spPr>
           <a:xfrm>
-            <a:off x="457200" y="2011680"/>
-            <a:ext cx="8229600" cy="521208"/>
+            <a:off x="457200" y="1651000"/>
+            <a:ext cx="8229600" cy="409448"/>
           </a:xfrm>
           <a:prstGeom prst="rect">
             <a:avLst/>
@@ -4926,13 +5853,6 @@
             <a:srgbClr val="FFFFFF"/>
           </a:solidFill>
           <a:ln/>
-          <a:effectLst>
-            <a:outerShdw sx="100000" sy="100000" kx="0" ky="0" algn="bl" rotWithShape="0" blurRad="50800" dist="25400" dir="8100000">
-              <a:srgbClr val="000000">
-                <a:alpha val="12000"/>
-              </a:srgbClr>
-            </a:outerShdw>
-          </a:effectLst>
         </p:spPr>
       </p:sp>
       <p:sp>
@@ -4943,8 +5863,8 @@
         </p:nvSpPr>
         <p:spPr>
           <a:xfrm>
-            <a:off x="457200" y="2011680"/>
-            <a:ext cx="45720" cy="521208"/>
+            <a:off x="457200" y="1651000"/>
+            <a:ext cx="45720" cy="409448"/>
           </a:xfrm>
           <a:prstGeom prst="rect">
             <a:avLst/>
@@ -4963,8 +5883,8 @@
         </p:nvSpPr>
         <p:spPr>
           <a:xfrm>
-            <a:off x="685800" y="2011680"/>
-            <a:ext cx="7818120" cy="521208"/>
+            <a:off x="640080" y="1651000"/>
+            <a:ext cx="7863840" cy="409448"/>
           </a:xfrm>
           <a:prstGeom prst="rect">
             <a:avLst/>
@@ -5002,8 +5922,8 @@
         </p:nvSpPr>
         <p:spPr>
           <a:xfrm>
-            <a:off x="457200" y="2560320"/>
-            <a:ext cx="8229600" cy="521208"/>
+            <a:off x="457200" y="2087880"/>
+            <a:ext cx="8229600" cy="409448"/>
           </a:xfrm>
           <a:prstGeom prst="rect">
             <a:avLst/>
@@ -5012,13 +5932,6 @@
             <a:srgbClr val="E3F2FD"/>
           </a:solidFill>
           <a:ln/>
-          <a:effectLst>
-            <a:outerShdw sx="100000" sy="100000" kx="0" ky="0" algn="bl" rotWithShape="0" blurRad="50800" dist="25400" dir="8100000">
-              <a:srgbClr val="000000">
-                <a:alpha val="12000"/>
-              </a:srgbClr>
-            </a:outerShdw>
-          </a:effectLst>
         </p:spPr>
       </p:sp>
       <p:sp>
@@ -5029,8 +5942,8 @@
         </p:nvSpPr>
         <p:spPr>
           <a:xfrm>
-            <a:off x="457200" y="2560320"/>
-            <a:ext cx="45720" cy="521208"/>
+            <a:off x="457200" y="2087880"/>
+            <a:ext cx="45720" cy="409448"/>
           </a:xfrm>
           <a:prstGeom prst="rect">
             <a:avLst/>
@@ -5049,8 +5962,8 @@
         </p:nvSpPr>
         <p:spPr>
           <a:xfrm>
-            <a:off x="685800" y="2560320"/>
-            <a:ext cx="7818120" cy="521208"/>
+            <a:off x="640080" y="2087880"/>
+            <a:ext cx="7863840" cy="409448"/>
           </a:xfrm>
           <a:prstGeom prst="rect">
             <a:avLst/>
@@ -5066,7 +5979,7 @@
               <a:buNone/>
             </a:pPr>
             <a:r>
-              <a:rPr lang="en-US" sz="1200" dirty="0">
+              <a:rPr lang="en-US" sz="1100" dirty="0">
                 <a:solidFill>
                   <a:srgbClr val="1A1A2E"/>
                 </a:solidFill>
@@ -5076,7 +5989,7 @@
               </a:rPr>
               <a:t>  (SELECT id_artiste FROM album GROUP BY id_artiste HAVING COUNT(*) &gt; 1);</a:t>
             </a:r>
-            <a:endParaRPr lang="en-US" sz="1200" dirty="0"/>
+            <a:endParaRPr lang="en-US" sz="1100" dirty="0"/>
           </a:p>
         </p:txBody>
       </p:sp>
@@ -5088,8 +6001,8 @@
         </p:nvSpPr>
         <p:spPr>
           <a:xfrm>
-            <a:off x="457200" y="3108960"/>
-            <a:ext cx="8229600" cy="521208"/>
+            <a:off x="457200" y="2524760"/>
+            <a:ext cx="8229600" cy="409448"/>
           </a:xfrm>
           <a:prstGeom prst="rect">
             <a:avLst/>
@@ -5098,13 +6011,6 @@
             <a:srgbClr val="FFFFFF"/>
           </a:solidFill>
           <a:ln/>
-          <a:effectLst>
-            <a:outerShdw sx="100000" sy="100000" kx="0" ky="0" algn="bl" rotWithShape="0" blurRad="50800" dist="25400" dir="8100000">
-              <a:srgbClr val="000000">
-                <a:alpha val="12000"/>
-              </a:srgbClr>
-            </a:outerShdw>
-          </a:effectLst>
         </p:spPr>
       </p:sp>
       <p:sp>
@@ -5115,8 +6021,8 @@
         </p:nvSpPr>
         <p:spPr>
           <a:xfrm>
-            <a:off x="457200" y="3108960"/>
-            <a:ext cx="45720" cy="521208"/>
+            <a:off x="457200" y="2524760"/>
+            <a:ext cx="45720" cy="409448"/>
           </a:xfrm>
           <a:prstGeom prst="rect">
             <a:avLst/>
@@ -5135,8 +6041,8 @@
         </p:nvSpPr>
         <p:spPr>
           <a:xfrm>
-            <a:off x="685800" y="3108960"/>
-            <a:ext cx="7818120" cy="521208"/>
+            <a:off x="640080" y="2524760"/>
+            <a:ext cx="7863840" cy="409448"/>
           </a:xfrm>
           <a:prstGeom prst="rect">
             <a:avLst/>
@@ -5152,7 +6058,7 @@
               <a:buNone/>
             </a:pPr>
             <a:r>
-              <a:rPr lang="en-US" sz="1200" dirty="0">
+              <a:rPr lang="en-US" sz="1100" dirty="0">
                 <a:solidFill>
                   <a:srgbClr val="1A1A2E"/>
                 </a:solidFill>
@@ -5160,9 +6066,9 @@
                 <a:ea typeface="Calibri" pitchFamily="34" charset="-122"/>
                 <a:cs typeface="Calibri" pitchFamily="34" charset="-120"/>
               </a:rPr>
-              <a:t>→ Artistes ayant plus d'un album</a:t>
-            </a:r>
-            <a:endParaRPr lang="en-US" sz="1200" dirty="0"/>
+              <a:t>  → Artistes ayant plus d'un album</a:t>
+            </a:r>
+            <a:endParaRPr lang="en-US" sz="1100" dirty="0"/>
           </a:p>
         </p:txBody>
       </p:sp>
@@ -5174,8 +6080,8 @@
         </p:nvSpPr>
         <p:spPr>
           <a:xfrm>
-            <a:off x="457200" y="3657600"/>
-            <a:ext cx="8229600" cy="521208"/>
+            <a:off x="457200" y="2961640"/>
+            <a:ext cx="8229600" cy="409448"/>
           </a:xfrm>
           <a:prstGeom prst="rect">
             <a:avLst/>
@@ -5184,13 +6090,6 @@
             <a:srgbClr val="E3F2FD"/>
           </a:solidFill>
           <a:ln/>
-          <a:effectLst>
-            <a:outerShdw sx="100000" sy="100000" kx="0" ky="0" algn="bl" rotWithShape="0" blurRad="50800" dist="25400" dir="8100000">
-              <a:srgbClr val="000000">
-                <a:alpha val="12000"/>
-              </a:srgbClr>
-            </a:outerShdw>
-          </a:effectLst>
         </p:spPr>
       </p:sp>
       <p:sp>
@@ -5201,8 +6100,8 @@
         </p:nvSpPr>
         <p:spPr>
           <a:xfrm>
-            <a:off x="457200" y="3657600"/>
-            <a:ext cx="45720" cy="521208"/>
+            <a:off x="457200" y="2961640"/>
+            <a:ext cx="45720" cy="409448"/>
           </a:xfrm>
           <a:prstGeom prst="rect">
             <a:avLst/>
@@ -5221,8 +6120,8 @@
         </p:nvSpPr>
         <p:spPr>
           <a:xfrm>
-            <a:off x="685800" y="3657600"/>
-            <a:ext cx="7818120" cy="521208"/>
+            <a:off x="640080" y="2961640"/>
+            <a:ext cx="7863840" cy="409448"/>
           </a:xfrm>
           <a:prstGeom prst="rect">
             <a:avLst/>
@@ -5238,7 +6137,7 @@
               <a:buNone/>
             </a:pPr>
             <a:r>
-              <a:rPr lang="en-US" sz="1200" dirty="0">
+              <a:rPr lang="en-US" sz="1100" dirty="0">
                 <a:solidFill>
                   <a:srgbClr val="1A1A2E"/>
                 </a:solidFill>
@@ -5246,9 +6145,9 @@
                 <a:ea typeface="Calibri" pitchFamily="34" charset="-122"/>
                 <a:cs typeface="Calibri" pitchFamily="34" charset="-120"/>
               </a:rPr>
-              <a:t>La sous-requête s'exécute EN PREMIER, puis le résultat est utilisé par la requête principale</a:t>
-            </a:r>
-            <a:endParaRPr lang="en-US" sz="1200" dirty="0"/>
+              <a:t>La sous-requete s'execute EN PREMIER</a:t>
+            </a:r>
+            <a:endParaRPr lang="en-US" sz="1100" dirty="0"/>
           </a:p>
         </p:txBody>
       </p:sp>
@@ -5260,8 +6159,8 @@
         </p:nvSpPr>
         <p:spPr>
           <a:xfrm>
-            <a:off x="457200" y="4206240"/>
-            <a:ext cx="8229600" cy="521208"/>
+            <a:off x="457200" y="3398520"/>
+            <a:ext cx="8229600" cy="409448"/>
           </a:xfrm>
           <a:prstGeom prst="rect">
             <a:avLst/>
@@ -5270,13 +6169,6 @@
             <a:srgbClr val="FFFFFF"/>
           </a:solidFill>
           <a:ln/>
-          <a:effectLst>
-            <a:outerShdw sx="100000" sy="100000" kx="0" ky="0" algn="bl" rotWithShape="0" blurRad="50800" dist="25400" dir="8100000">
-              <a:srgbClr val="000000">
-                <a:alpha val="12000"/>
-              </a:srgbClr>
-            </a:outerShdw>
-          </a:effectLst>
         </p:spPr>
       </p:sp>
       <p:sp>
@@ -5287,8 +6179,8 @@
         </p:nvSpPr>
         <p:spPr>
           <a:xfrm>
-            <a:off x="457200" y="4206240"/>
-            <a:ext cx="45720" cy="521208"/>
+            <a:off x="457200" y="3398520"/>
+            <a:ext cx="45720" cy="409448"/>
           </a:xfrm>
           <a:prstGeom prst="rect">
             <a:avLst/>
@@ -5307,8 +6199,8 @@
         </p:nvSpPr>
         <p:spPr>
           <a:xfrm>
-            <a:off x="685800" y="4206240"/>
-            <a:ext cx="7818120" cy="521208"/>
+            <a:off x="640080" y="3398520"/>
+            <a:ext cx="7863840" cy="409448"/>
           </a:xfrm>
           <a:prstGeom prst="rect">
             <a:avLst/>
@@ -5324,7 +6216,7 @@
               <a:buNone/>
             </a:pPr>
             <a:r>
-              <a:rPr lang="en-US" sz="1200" dirty="0">
+              <a:rPr lang="en-US" sz="1100" dirty="0">
                 <a:solidFill>
                   <a:srgbClr val="1A1A2E"/>
                 </a:solidFill>
@@ -5332,9 +6224,167 @@
                 <a:ea typeface="Calibri" pitchFamily="34" charset="-122"/>
                 <a:cs typeface="Calibri" pitchFamily="34" charset="-120"/>
               </a:rPr>
-              <a:t>Alternative : souvent remplaçable par un JOIN (parfois plus performant)</a:t>
-            </a:r>
-            <a:endParaRPr lang="en-US" sz="1200" dirty="0"/>
+              <a:t>Exercice GESCOM : articles jamais commandes</a:t>
+            </a:r>
+            <a:endParaRPr lang="en-US" sz="1100" dirty="0"/>
+          </a:p>
+        </p:txBody>
+      </p:sp>
+      <p:sp>
+        <p:nvSpPr>
+          <p:cNvPr id="25" name="Shape 23"/>
+          <p:cNvSpPr/>
+          <p:nvPr/>
+        </p:nvSpPr>
+        <p:spPr>
+          <a:xfrm>
+            <a:off x="457200" y="3835400"/>
+            <a:ext cx="8229600" cy="409448"/>
+          </a:xfrm>
+          <a:prstGeom prst="rect">
+            <a:avLst/>
+          </a:prstGeom>
+          <a:solidFill>
+            <a:srgbClr val="E3F2FD"/>
+          </a:solidFill>
+          <a:ln/>
+        </p:spPr>
+      </p:sp>
+      <p:sp>
+        <p:nvSpPr>
+          <p:cNvPr id="26" name="Shape 24"/>
+          <p:cNvSpPr/>
+          <p:nvPr/>
+        </p:nvSpPr>
+        <p:spPr>
+          <a:xfrm>
+            <a:off x="457200" y="3835400"/>
+            <a:ext cx="45720" cy="409448"/>
+          </a:xfrm>
+          <a:prstGeom prst="rect">
+            <a:avLst/>
+          </a:prstGeom>
+          <a:solidFill>
+            <a:srgbClr val="1565C0"/>
+          </a:solidFill>
+          <a:ln/>
+        </p:spPr>
+      </p:sp>
+      <p:sp>
+        <p:nvSpPr>
+          <p:cNvPr id="27" name="Text 25"/>
+          <p:cNvSpPr/>
+          <p:nvPr/>
+        </p:nvSpPr>
+        <p:spPr>
+          <a:xfrm>
+            <a:off x="640080" y="3835400"/>
+            <a:ext cx="7863840" cy="409448"/>
+          </a:xfrm>
+          <a:prstGeom prst="rect">
+            <a:avLst/>
+          </a:prstGeom>
+          <a:noFill/>
+          <a:ln/>
+        </p:spPr>
+        <p:txBody>
+          <a:bodyPr wrap="square" lIns="0" tIns="0" rIns="0" bIns="0" rtlCol="0" anchor="ctr"/>
+          <a:lstStyle/>
+          <a:p>
+            <a:pPr indent="0" marL="0">
+              <a:buNone/>
+            </a:pPr>
+            <a:r>
+              <a:rPr lang="en-US" sz="1000" dirty="0">
+                <a:solidFill>
+                  <a:srgbClr val="0D47A1"/>
+                </a:solidFill>
+                <a:latin typeface="JetBrains Mono" pitchFamily="34" charset="0"/>
+                <a:ea typeface="JetBrains Mono" pitchFamily="34" charset="-122"/>
+                <a:cs typeface="JetBrains Mono" pitchFamily="34" charset="-120"/>
+              </a:rPr>
+              <a:t>  WHERE NOART NOT IN (SELECT DISTINCT NOART FROM lignecde)</a:t>
+            </a:r>
+            <a:endParaRPr lang="en-US" sz="1000" dirty="0"/>
+          </a:p>
+        </p:txBody>
+      </p:sp>
+      <p:sp>
+        <p:nvSpPr>
+          <p:cNvPr id="28" name="Shape 26"/>
+          <p:cNvSpPr/>
+          <p:nvPr/>
+        </p:nvSpPr>
+        <p:spPr>
+          <a:xfrm>
+            <a:off x="457200" y="4272280"/>
+            <a:ext cx="8229600" cy="409448"/>
+          </a:xfrm>
+          <a:prstGeom prst="rect">
+            <a:avLst/>
+          </a:prstGeom>
+          <a:solidFill>
+            <a:srgbClr val="FFFFFF"/>
+          </a:solidFill>
+          <a:ln/>
+        </p:spPr>
+      </p:sp>
+      <p:sp>
+        <p:nvSpPr>
+          <p:cNvPr id="29" name="Shape 27"/>
+          <p:cNvSpPr/>
+          <p:nvPr/>
+        </p:nvSpPr>
+        <p:spPr>
+          <a:xfrm>
+            <a:off x="457200" y="4272280"/>
+            <a:ext cx="45720" cy="409448"/>
+          </a:xfrm>
+          <a:prstGeom prst="rect">
+            <a:avLst/>
+          </a:prstGeom>
+          <a:solidFill>
+            <a:srgbClr val="1565C0"/>
+          </a:solidFill>
+          <a:ln/>
+        </p:spPr>
+      </p:sp>
+      <p:sp>
+        <p:nvSpPr>
+          <p:cNvPr id="30" name="Text 28"/>
+          <p:cNvSpPr/>
+          <p:nvPr/>
+        </p:nvSpPr>
+        <p:spPr>
+          <a:xfrm>
+            <a:off x="640080" y="4272280"/>
+            <a:ext cx="7863840" cy="409448"/>
+          </a:xfrm>
+          <a:prstGeom prst="rect">
+            <a:avLst/>
+          </a:prstGeom>
+          <a:noFill/>
+          <a:ln/>
+        </p:spPr>
+        <p:txBody>
+          <a:bodyPr wrap="square" lIns="0" tIns="0" rIns="0" bIns="0" rtlCol="0" anchor="ctr"/>
+          <a:lstStyle/>
+          <a:p>
+            <a:pPr indent="0" marL="0">
+              <a:buNone/>
+            </a:pPr>
+            <a:r>
+              <a:rPr lang="en-US" sz="1100" dirty="0">
+                <a:solidFill>
+                  <a:srgbClr val="1A1A2E"/>
+                </a:solidFill>
+                <a:latin typeface="Calibri" pitchFamily="34" charset="0"/>
+                <a:ea typeface="Calibri" pitchFamily="34" charset="-122"/>
+                <a:cs typeface="Calibri" pitchFamily="34" charset="-120"/>
+              </a:rPr>
+              <a:t>Alternative : souvent remplacable par un JOIN</a:t>
+            </a:r>
+            <a:endParaRPr lang="en-US" sz="1100" dirty="0"/>
           </a:p>
         </p:txBody>
       </p:sp>
@@ -5399,7 +6449,7 @@
         <p:spPr>
           <a:xfrm>
             <a:off x="457200" y="182880"/>
-            <a:ext cx="8229600" cy="594360"/>
+            <a:ext cx="8229600" cy="502920"/>
           </a:xfrm>
           <a:prstGeom prst="rect">
             <a:avLst/>
@@ -5415,7 +6465,7 @@
               <a:buNone/>
             </a:pPr>
             <a:r>
-              <a:rPr lang="en-US" sz="2400" b="1" dirty="0">
+              <a:rPr lang="en-US" sz="2100" b="1" dirty="0">
                 <a:solidFill>
                   <a:srgbClr val="0D47A1"/>
                 </a:solidFill>
@@ -5423,9 +6473,9 @@
                 <a:ea typeface="Trebuchet MS" pitchFamily="34" charset="-122"/>
                 <a:cs typeface="Trebuchet MS" pitchFamily="34" charset="-120"/>
               </a:rPr>
-              <a:t>Exercice Module 13</a:t>
-            </a:r>
-            <a:endParaRPr lang="en-US" sz="2400" dirty="0"/>
+              <a:t>Dashboard SQL — KPI de SwissSound</a:t>
+            </a:r>
+            <a:endParaRPr lang="en-US" sz="2100" dirty="0"/>
           </a:p>
         </p:txBody>
       </p:sp>
@@ -5437,8 +6487,8 @@
         </p:nvSpPr>
         <p:spPr>
           <a:xfrm>
-            <a:off x="457200" y="914400"/>
-            <a:ext cx="8229600" cy="521208"/>
+            <a:off x="457200" y="777240"/>
+            <a:ext cx="8229600" cy="330015"/>
           </a:xfrm>
           <a:prstGeom prst="rect">
             <a:avLst/>
@@ -5447,13 +6497,6 @@
             <a:srgbClr val="FFFFFF"/>
           </a:solidFill>
           <a:ln/>
-          <a:effectLst>
-            <a:outerShdw sx="100000" sy="100000" kx="0" ky="0" algn="bl" rotWithShape="0" blurRad="50800" dist="25400" dir="8100000">
-              <a:srgbClr val="000000">
-                <a:alpha val="12000"/>
-              </a:srgbClr>
-            </a:outerShdw>
-          </a:effectLst>
         </p:spPr>
       </p:sp>
       <p:sp>
@@ -5464,8 +6507,8 @@
         </p:nvSpPr>
         <p:spPr>
           <a:xfrm>
-            <a:off x="457200" y="914400"/>
-            <a:ext cx="45720" cy="521208"/>
+            <a:off x="457200" y="777240"/>
+            <a:ext cx="45720" cy="330015"/>
           </a:xfrm>
           <a:prstGeom prst="rect">
             <a:avLst/>
@@ -5484,8 +6527,8 @@
         </p:nvSpPr>
         <p:spPr>
           <a:xfrm>
-            <a:off x="685800" y="914400"/>
-            <a:ext cx="7818120" cy="521208"/>
+            <a:off x="640080" y="777240"/>
+            <a:ext cx="7863840" cy="330015"/>
           </a:xfrm>
           <a:prstGeom prst="rect">
             <a:avLst/>
@@ -5501,7 +6544,797 @@
               <a:buNone/>
             </a:pPr>
             <a:r>
-              <a:rPr lang="en-US" sz="1200" dirty="0">
+              <a:rPr lang="en-US" sz="1000" dirty="0">
+                <a:solidFill>
+                  <a:srgbClr val="0D47A1"/>
+                </a:solidFill>
+                <a:latin typeface="JetBrains Mono" pitchFamily="34" charset="0"/>
+                <a:ea typeface="JetBrains Mono" pitchFamily="34" charset="-122"/>
+                <a:cs typeface="JetBrains Mono" pitchFamily="34" charset="-120"/>
+              </a:rPr>
+              <a:t>SELECT 'Artistes actifs' AS kpi, COUNT(*) AS valeur</a:t>
+            </a:r>
+            <a:endParaRPr lang="en-US" sz="1000" dirty="0"/>
+          </a:p>
+        </p:txBody>
+      </p:sp>
+      <p:sp>
+        <p:nvSpPr>
+          <p:cNvPr id="7" name="Shape 5"/>
+          <p:cNvSpPr/>
+          <p:nvPr/>
+        </p:nvSpPr>
+        <p:spPr>
+          <a:xfrm>
+            <a:off x="457200" y="1134687"/>
+            <a:ext cx="8229600" cy="330015"/>
+          </a:xfrm>
+          <a:prstGeom prst="rect">
+            <a:avLst/>
+          </a:prstGeom>
+          <a:solidFill>
+            <a:srgbClr val="E3F2FD"/>
+          </a:solidFill>
+          <a:ln/>
+        </p:spPr>
+      </p:sp>
+      <p:sp>
+        <p:nvSpPr>
+          <p:cNvPr id="8" name="Shape 6"/>
+          <p:cNvSpPr/>
+          <p:nvPr/>
+        </p:nvSpPr>
+        <p:spPr>
+          <a:xfrm>
+            <a:off x="457200" y="1134687"/>
+            <a:ext cx="45720" cy="330015"/>
+          </a:xfrm>
+          <a:prstGeom prst="rect">
+            <a:avLst/>
+          </a:prstGeom>
+          <a:solidFill>
+            <a:srgbClr val="1565C0"/>
+          </a:solidFill>
+          <a:ln/>
+        </p:spPr>
+      </p:sp>
+      <p:sp>
+        <p:nvSpPr>
+          <p:cNvPr id="9" name="Text 7"/>
+          <p:cNvSpPr/>
+          <p:nvPr/>
+        </p:nvSpPr>
+        <p:spPr>
+          <a:xfrm>
+            <a:off x="640080" y="1134687"/>
+            <a:ext cx="7863840" cy="330015"/>
+          </a:xfrm>
+          <a:prstGeom prst="rect">
+            <a:avLst/>
+          </a:prstGeom>
+          <a:noFill/>
+          <a:ln/>
+        </p:spPr>
+        <p:txBody>
+          <a:bodyPr wrap="square" lIns="0" tIns="0" rIns="0" bIns="0" rtlCol="0" anchor="ctr"/>
+          <a:lstStyle/>
+          <a:p>
+            <a:pPr indent="0" marL="0">
+              <a:buNone/>
+            </a:pPr>
+            <a:r>
+              <a:rPr lang="en-US" sz="1000" dirty="0">
+                <a:solidFill>
+                  <a:srgbClr val="0D47A1"/>
+                </a:solidFill>
+                <a:latin typeface="JetBrains Mono" pitchFamily="34" charset="0"/>
+                <a:ea typeface="JetBrains Mono" pitchFamily="34" charset="-122"/>
+                <a:cs typeface="JetBrains Mono" pitchFamily="34" charset="-120"/>
+              </a:rPr>
+              <a:t>  FROM artiste WHERE actif = TRUE</a:t>
+            </a:r>
+            <a:endParaRPr lang="en-US" sz="1000" dirty="0"/>
+          </a:p>
+        </p:txBody>
+      </p:sp>
+      <p:sp>
+        <p:nvSpPr>
+          <p:cNvPr id="10" name="Shape 8"/>
+          <p:cNvSpPr/>
+          <p:nvPr/>
+        </p:nvSpPr>
+        <p:spPr>
+          <a:xfrm>
+            <a:off x="457200" y="1492135"/>
+            <a:ext cx="8229600" cy="330015"/>
+          </a:xfrm>
+          <a:prstGeom prst="rect">
+            <a:avLst/>
+          </a:prstGeom>
+          <a:solidFill>
+            <a:srgbClr val="FFFFFF"/>
+          </a:solidFill>
+          <a:ln/>
+        </p:spPr>
+      </p:sp>
+      <p:sp>
+        <p:nvSpPr>
+          <p:cNvPr id="11" name="Shape 9"/>
+          <p:cNvSpPr/>
+          <p:nvPr/>
+        </p:nvSpPr>
+        <p:spPr>
+          <a:xfrm>
+            <a:off x="457200" y="1492135"/>
+            <a:ext cx="45720" cy="330015"/>
+          </a:xfrm>
+          <a:prstGeom prst="rect">
+            <a:avLst/>
+          </a:prstGeom>
+          <a:solidFill>
+            <a:srgbClr val="1565C0"/>
+          </a:solidFill>
+          <a:ln/>
+        </p:spPr>
+      </p:sp>
+      <p:sp>
+        <p:nvSpPr>
+          <p:cNvPr id="12" name="Text 10"/>
+          <p:cNvSpPr/>
+          <p:nvPr/>
+        </p:nvSpPr>
+        <p:spPr>
+          <a:xfrm>
+            <a:off x="640080" y="1492135"/>
+            <a:ext cx="7863840" cy="330015"/>
+          </a:xfrm>
+          <a:prstGeom prst="rect">
+            <a:avLst/>
+          </a:prstGeom>
+          <a:noFill/>
+          <a:ln/>
+        </p:spPr>
+        <p:txBody>
+          <a:bodyPr wrap="square" lIns="0" tIns="0" rIns="0" bIns="0" rtlCol="0" anchor="ctr"/>
+          <a:lstStyle/>
+          <a:p>
+            <a:pPr indent="0" marL="0">
+              <a:buNone/>
+            </a:pPr>
+            <a:r>
+              <a:rPr lang="en-US" sz="1000" dirty="0">
+                <a:solidFill>
+                  <a:srgbClr val="0D47A1"/>
+                </a:solidFill>
+                <a:latin typeface="JetBrains Mono" pitchFamily="34" charset="0"/>
+                <a:ea typeface="JetBrains Mono" pitchFamily="34" charset="-122"/>
+                <a:cs typeface="JetBrains Mono" pitchFamily="34" charset="-120"/>
+              </a:rPr>
+              <a:t>UNION ALL</a:t>
+            </a:r>
+            <a:endParaRPr lang="en-US" sz="1000" dirty="0"/>
+          </a:p>
+        </p:txBody>
+      </p:sp>
+      <p:sp>
+        <p:nvSpPr>
+          <p:cNvPr id="13" name="Shape 11"/>
+          <p:cNvSpPr/>
+          <p:nvPr/>
+        </p:nvSpPr>
+        <p:spPr>
+          <a:xfrm>
+            <a:off x="457200" y="1849582"/>
+            <a:ext cx="8229600" cy="330015"/>
+          </a:xfrm>
+          <a:prstGeom prst="rect">
+            <a:avLst/>
+          </a:prstGeom>
+          <a:solidFill>
+            <a:srgbClr val="E3F2FD"/>
+          </a:solidFill>
+          <a:ln/>
+        </p:spPr>
+      </p:sp>
+      <p:sp>
+        <p:nvSpPr>
+          <p:cNvPr id="14" name="Shape 12"/>
+          <p:cNvSpPr/>
+          <p:nvPr/>
+        </p:nvSpPr>
+        <p:spPr>
+          <a:xfrm>
+            <a:off x="457200" y="1849582"/>
+            <a:ext cx="45720" cy="330015"/>
+          </a:xfrm>
+          <a:prstGeom prst="rect">
+            <a:avLst/>
+          </a:prstGeom>
+          <a:solidFill>
+            <a:srgbClr val="1565C0"/>
+          </a:solidFill>
+          <a:ln/>
+        </p:spPr>
+      </p:sp>
+      <p:sp>
+        <p:nvSpPr>
+          <p:cNvPr id="15" name="Text 13"/>
+          <p:cNvSpPr/>
+          <p:nvPr/>
+        </p:nvSpPr>
+        <p:spPr>
+          <a:xfrm>
+            <a:off x="640080" y="1849582"/>
+            <a:ext cx="7863840" cy="330015"/>
+          </a:xfrm>
+          <a:prstGeom prst="rect">
+            <a:avLst/>
+          </a:prstGeom>
+          <a:noFill/>
+          <a:ln/>
+        </p:spPr>
+        <p:txBody>
+          <a:bodyPr wrap="square" lIns="0" tIns="0" rIns="0" bIns="0" rtlCol="0" anchor="ctr"/>
+          <a:lstStyle/>
+          <a:p>
+            <a:pPr indent="0" marL="0">
+              <a:buNone/>
+            </a:pPr>
+            <a:r>
+              <a:rPr lang="en-US" sz="1000" dirty="0">
+                <a:solidFill>
+                  <a:srgbClr val="0D47A1"/>
+                </a:solidFill>
+                <a:latin typeface="JetBrains Mono" pitchFamily="34" charset="0"/>
+                <a:ea typeface="JetBrains Mono" pitchFamily="34" charset="-122"/>
+                <a:cs typeface="JetBrains Mono" pitchFamily="34" charset="-120"/>
+              </a:rPr>
+              <a:t>SELECT 'Albums publies', COUNT(*) FROM album</a:t>
+            </a:r>
+            <a:endParaRPr lang="en-US" sz="1000" dirty="0"/>
+          </a:p>
+        </p:txBody>
+      </p:sp>
+      <p:sp>
+        <p:nvSpPr>
+          <p:cNvPr id="16" name="Shape 14"/>
+          <p:cNvSpPr/>
+          <p:nvPr/>
+        </p:nvSpPr>
+        <p:spPr>
+          <a:xfrm>
+            <a:off x="457200" y="2207029"/>
+            <a:ext cx="8229600" cy="330015"/>
+          </a:xfrm>
+          <a:prstGeom prst="rect">
+            <a:avLst/>
+          </a:prstGeom>
+          <a:solidFill>
+            <a:srgbClr val="FFFFFF"/>
+          </a:solidFill>
+          <a:ln/>
+        </p:spPr>
+      </p:sp>
+      <p:sp>
+        <p:nvSpPr>
+          <p:cNvPr id="17" name="Shape 15"/>
+          <p:cNvSpPr/>
+          <p:nvPr/>
+        </p:nvSpPr>
+        <p:spPr>
+          <a:xfrm>
+            <a:off x="457200" y="2207029"/>
+            <a:ext cx="45720" cy="330015"/>
+          </a:xfrm>
+          <a:prstGeom prst="rect">
+            <a:avLst/>
+          </a:prstGeom>
+          <a:solidFill>
+            <a:srgbClr val="1565C0"/>
+          </a:solidFill>
+          <a:ln/>
+        </p:spPr>
+      </p:sp>
+      <p:sp>
+        <p:nvSpPr>
+          <p:cNvPr id="18" name="Text 16"/>
+          <p:cNvSpPr/>
+          <p:nvPr/>
+        </p:nvSpPr>
+        <p:spPr>
+          <a:xfrm>
+            <a:off x="640080" y="2207029"/>
+            <a:ext cx="7863840" cy="330015"/>
+          </a:xfrm>
+          <a:prstGeom prst="rect">
+            <a:avLst/>
+          </a:prstGeom>
+          <a:noFill/>
+          <a:ln/>
+        </p:spPr>
+        <p:txBody>
+          <a:bodyPr wrap="square" lIns="0" tIns="0" rIns="0" bIns="0" rtlCol="0" anchor="ctr"/>
+          <a:lstStyle/>
+          <a:p>
+            <a:pPr indent="0" marL="0">
+              <a:buNone/>
+            </a:pPr>
+            <a:r>
+              <a:rPr lang="en-US" sz="1000" dirty="0">
+                <a:solidFill>
+                  <a:srgbClr val="0D47A1"/>
+                </a:solidFill>
+                <a:latin typeface="JetBrains Mono" pitchFamily="34" charset="0"/>
+                <a:ea typeface="JetBrains Mono" pitchFamily="34" charset="-122"/>
+                <a:cs typeface="JetBrains Mono" pitchFamily="34" charset="-120"/>
+              </a:rPr>
+              <a:t>UNION ALL</a:t>
+            </a:r>
+            <a:endParaRPr lang="en-US" sz="1000" dirty="0"/>
+          </a:p>
+        </p:txBody>
+      </p:sp>
+      <p:sp>
+        <p:nvSpPr>
+          <p:cNvPr id="19" name="Shape 17"/>
+          <p:cNvSpPr/>
+          <p:nvPr/>
+        </p:nvSpPr>
+        <p:spPr>
+          <a:xfrm>
+            <a:off x="457200" y="2564476"/>
+            <a:ext cx="8229600" cy="330015"/>
+          </a:xfrm>
+          <a:prstGeom prst="rect">
+            <a:avLst/>
+          </a:prstGeom>
+          <a:solidFill>
+            <a:srgbClr val="E3F2FD"/>
+          </a:solidFill>
+          <a:ln/>
+        </p:spPr>
+      </p:sp>
+      <p:sp>
+        <p:nvSpPr>
+          <p:cNvPr id="20" name="Shape 18"/>
+          <p:cNvSpPr/>
+          <p:nvPr/>
+        </p:nvSpPr>
+        <p:spPr>
+          <a:xfrm>
+            <a:off x="457200" y="2564476"/>
+            <a:ext cx="45720" cy="330015"/>
+          </a:xfrm>
+          <a:prstGeom prst="rect">
+            <a:avLst/>
+          </a:prstGeom>
+          <a:solidFill>
+            <a:srgbClr val="1565C0"/>
+          </a:solidFill>
+          <a:ln/>
+        </p:spPr>
+      </p:sp>
+      <p:sp>
+        <p:nvSpPr>
+          <p:cNvPr id="21" name="Text 19"/>
+          <p:cNvSpPr/>
+          <p:nvPr/>
+        </p:nvSpPr>
+        <p:spPr>
+          <a:xfrm>
+            <a:off x="640080" y="2564476"/>
+            <a:ext cx="7863840" cy="330015"/>
+          </a:xfrm>
+          <a:prstGeom prst="rect">
+            <a:avLst/>
+          </a:prstGeom>
+          <a:noFill/>
+          <a:ln/>
+        </p:spPr>
+        <p:txBody>
+          <a:bodyPr wrap="square" lIns="0" tIns="0" rIns="0" bIns="0" rtlCol="0" anchor="ctr"/>
+          <a:lstStyle/>
+          <a:p>
+            <a:pPr indent="0" marL="0">
+              <a:buNone/>
+            </a:pPr>
+            <a:r>
+              <a:rPr lang="en-US" sz="1000" dirty="0">
+                <a:solidFill>
+                  <a:srgbClr val="0D47A1"/>
+                </a:solidFill>
+                <a:latin typeface="JetBrains Mono" pitchFamily="34" charset="0"/>
+                <a:ea typeface="JetBrains Mono" pitchFamily="34" charset="-122"/>
+                <a:cs typeface="JetBrains Mono" pitchFamily="34" charset="-120"/>
+              </a:rPr>
+              <a:t>SELECT 'CA paye (CHF)', SUM(montant_total)</a:t>
+            </a:r>
+            <a:endParaRPr lang="en-US" sz="1000" dirty="0"/>
+          </a:p>
+        </p:txBody>
+      </p:sp>
+      <p:sp>
+        <p:nvSpPr>
+          <p:cNvPr id="22" name="Shape 20"/>
+          <p:cNvSpPr/>
+          <p:nvPr/>
+        </p:nvSpPr>
+        <p:spPr>
+          <a:xfrm>
+            <a:off x="457200" y="2921924"/>
+            <a:ext cx="8229600" cy="330015"/>
+          </a:xfrm>
+          <a:prstGeom prst="rect">
+            <a:avLst/>
+          </a:prstGeom>
+          <a:solidFill>
+            <a:srgbClr val="FFFFFF"/>
+          </a:solidFill>
+          <a:ln/>
+        </p:spPr>
+      </p:sp>
+      <p:sp>
+        <p:nvSpPr>
+          <p:cNvPr id="23" name="Shape 21"/>
+          <p:cNvSpPr/>
+          <p:nvPr/>
+        </p:nvSpPr>
+        <p:spPr>
+          <a:xfrm>
+            <a:off x="457200" y="2921924"/>
+            <a:ext cx="45720" cy="330015"/>
+          </a:xfrm>
+          <a:prstGeom prst="rect">
+            <a:avLst/>
+          </a:prstGeom>
+          <a:solidFill>
+            <a:srgbClr val="1565C0"/>
+          </a:solidFill>
+          <a:ln/>
+        </p:spPr>
+      </p:sp>
+      <p:sp>
+        <p:nvSpPr>
+          <p:cNvPr id="24" name="Text 22"/>
+          <p:cNvSpPr/>
+          <p:nvPr/>
+        </p:nvSpPr>
+        <p:spPr>
+          <a:xfrm>
+            <a:off x="640080" y="2921924"/>
+            <a:ext cx="7863840" cy="330015"/>
+          </a:xfrm>
+          <a:prstGeom prst="rect">
+            <a:avLst/>
+          </a:prstGeom>
+          <a:noFill/>
+          <a:ln/>
+        </p:spPr>
+        <p:txBody>
+          <a:bodyPr wrap="square" lIns="0" tIns="0" rIns="0" bIns="0" rtlCol="0" anchor="ctr"/>
+          <a:lstStyle/>
+          <a:p>
+            <a:pPr indent="0" marL="0">
+              <a:buNone/>
+            </a:pPr>
+            <a:r>
+              <a:rPr lang="en-US" sz="1000" dirty="0">
+                <a:solidFill>
+                  <a:srgbClr val="0D47A1"/>
+                </a:solidFill>
+                <a:latin typeface="JetBrains Mono" pitchFamily="34" charset="0"/>
+                <a:ea typeface="JetBrains Mono" pitchFamily="34" charset="-122"/>
+                <a:cs typeface="JetBrains Mono" pitchFamily="34" charset="-120"/>
+              </a:rPr>
+              <a:t>  FROM facture WHERE statut_paiement = 'payee'</a:t>
+            </a:r>
+            <a:endParaRPr lang="en-US" sz="1000" dirty="0"/>
+          </a:p>
+        </p:txBody>
+      </p:sp>
+      <p:sp>
+        <p:nvSpPr>
+          <p:cNvPr id="25" name="Shape 23"/>
+          <p:cNvSpPr/>
+          <p:nvPr/>
+        </p:nvSpPr>
+        <p:spPr>
+          <a:xfrm>
+            <a:off x="457200" y="3279371"/>
+            <a:ext cx="8229600" cy="330015"/>
+          </a:xfrm>
+          <a:prstGeom prst="rect">
+            <a:avLst/>
+          </a:prstGeom>
+          <a:solidFill>
+            <a:srgbClr val="E3F2FD"/>
+          </a:solidFill>
+          <a:ln/>
+        </p:spPr>
+      </p:sp>
+      <p:sp>
+        <p:nvSpPr>
+          <p:cNvPr id="26" name="Shape 24"/>
+          <p:cNvSpPr/>
+          <p:nvPr/>
+        </p:nvSpPr>
+        <p:spPr>
+          <a:xfrm>
+            <a:off x="457200" y="3279371"/>
+            <a:ext cx="45720" cy="330015"/>
+          </a:xfrm>
+          <a:prstGeom prst="rect">
+            <a:avLst/>
+          </a:prstGeom>
+          <a:solidFill>
+            <a:srgbClr val="1565C0"/>
+          </a:solidFill>
+          <a:ln/>
+        </p:spPr>
+      </p:sp>
+      <p:sp>
+        <p:nvSpPr>
+          <p:cNvPr id="27" name="Text 25"/>
+          <p:cNvSpPr/>
+          <p:nvPr/>
+        </p:nvSpPr>
+        <p:spPr>
+          <a:xfrm>
+            <a:off x="640080" y="3279371"/>
+            <a:ext cx="7863840" cy="330015"/>
+          </a:xfrm>
+          <a:prstGeom prst="rect">
+            <a:avLst/>
+          </a:prstGeom>
+          <a:noFill/>
+          <a:ln/>
+        </p:spPr>
+        <p:txBody>
+          <a:bodyPr wrap="square" lIns="0" tIns="0" rIns="0" bIns="0" rtlCol="0" anchor="ctr"/>
+          <a:lstStyle/>
+          <a:p>
+            <a:pPr indent="0" marL="0">
+              <a:buNone/>
+            </a:pPr>
+            <a:r>
+              <a:rPr lang="en-US" sz="1000" dirty="0">
+                <a:solidFill>
+                  <a:srgbClr val="0D47A1"/>
+                </a:solidFill>
+                <a:latin typeface="JetBrains Mono" pitchFamily="34" charset="0"/>
+                <a:ea typeface="JetBrains Mono" pitchFamily="34" charset="-122"/>
+                <a:cs typeface="JetBrains Mono" pitchFamily="34" charset="-120"/>
+              </a:rPr>
+              <a:t>UNION ALL</a:t>
+            </a:r>
+            <a:endParaRPr lang="en-US" sz="1000" dirty="0"/>
+          </a:p>
+        </p:txBody>
+      </p:sp>
+      <p:sp>
+        <p:nvSpPr>
+          <p:cNvPr id="28" name="Shape 26"/>
+          <p:cNvSpPr/>
+          <p:nvPr/>
+        </p:nvSpPr>
+        <p:spPr>
+          <a:xfrm>
+            <a:off x="457200" y="3636818"/>
+            <a:ext cx="8229600" cy="330015"/>
+          </a:xfrm>
+          <a:prstGeom prst="rect">
+            <a:avLst/>
+          </a:prstGeom>
+          <a:solidFill>
+            <a:srgbClr val="FFFFFF"/>
+          </a:solidFill>
+          <a:ln/>
+        </p:spPr>
+      </p:sp>
+      <p:sp>
+        <p:nvSpPr>
+          <p:cNvPr id="29" name="Shape 27"/>
+          <p:cNvSpPr/>
+          <p:nvPr/>
+        </p:nvSpPr>
+        <p:spPr>
+          <a:xfrm>
+            <a:off x="457200" y="3636818"/>
+            <a:ext cx="45720" cy="330015"/>
+          </a:xfrm>
+          <a:prstGeom prst="rect">
+            <a:avLst/>
+          </a:prstGeom>
+          <a:solidFill>
+            <a:srgbClr val="1565C0"/>
+          </a:solidFill>
+          <a:ln/>
+        </p:spPr>
+      </p:sp>
+      <p:sp>
+        <p:nvSpPr>
+          <p:cNvPr id="30" name="Text 28"/>
+          <p:cNvSpPr/>
+          <p:nvPr/>
+        </p:nvSpPr>
+        <p:spPr>
+          <a:xfrm>
+            <a:off x="640080" y="3636818"/>
+            <a:ext cx="7863840" cy="330015"/>
+          </a:xfrm>
+          <a:prstGeom prst="rect">
+            <a:avLst/>
+          </a:prstGeom>
+          <a:noFill/>
+          <a:ln/>
+        </p:spPr>
+        <p:txBody>
+          <a:bodyPr wrap="square" lIns="0" tIns="0" rIns="0" bIns="0" rtlCol="0" anchor="ctr"/>
+          <a:lstStyle/>
+          <a:p>
+            <a:pPr indent="0" marL="0">
+              <a:buNone/>
+            </a:pPr>
+            <a:r>
+              <a:rPr lang="en-US" sz="1000" dirty="0">
+                <a:solidFill>
+                  <a:srgbClr val="0D47A1"/>
+                </a:solidFill>
+                <a:latin typeface="JetBrains Mono" pitchFamily="34" charset="0"/>
+                <a:ea typeface="JetBrains Mono" pitchFamily="34" charset="-122"/>
+                <a:cs typeface="JetBrains Mono" pitchFamily="34" charset="-120"/>
+              </a:rPr>
+              <a:t>SELECT 'Factures impayees', COUNT(*)</a:t>
+            </a:r>
+            <a:endParaRPr lang="en-US" sz="1000" dirty="0"/>
+          </a:p>
+        </p:txBody>
+      </p:sp>
+      <p:sp>
+        <p:nvSpPr>
+          <p:cNvPr id="31" name="Shape 29"/>
+          <p:cNvSpPr/>
+          <p:nvPr/>
+        </p:nvSpPr>
+        <p:spPr>
+          <a:xfrm>
+            <a:off x="457200" y="3994265"/>
+            <a:ext cx="8229600" cy="330015"/>
+          </a:xfrm>
+          <a:prstGeom prst="rect">
+            <a:avLst/>
+          </a:prstGeom>
+          <a:solidFill>
+            <a:srgbClr val="E3F2FD"/>
+          </a:solidFill>
+          <a:ln/>
+        </p:spPr>
+      </p:sp>
+      <p:sp>
+        <p:nvSpPr>
+          <p:cNvPr id="32" name="Shape 30"/>
+          <p:cNvSpPr/>
+          <p:nvPr/>
+        </p:nvSpPr>
+        <p:spPr>
+          <a:xfrm>
+            <a:off x="457200" y="3994265"/>
+            <a:ext cx="45720" cy="330015"/>
+          </a:xfrm>
+          <a:prstGeom prst="rect">
+            <a:avLst/>
+          </a:prstGeom>
+          <a:solidFill>
+            <a:srgbClr val="1565C0"/>
+          </a:solidFill>
+          <a:ln/>
+        </p:spPr>
+      </p:sp>
+      <p:sp>
+        <p:nvSpPr>
+          <p:cNvPr id="33" name="Text 31"/>
+          <p:cNvSpPr/>
+          <p:nvPr/>
+        </p:nvSpPr>
+        <p:spPr>
+          <a:xfrm>
+            <a:off x="640080" y="3994265"/>
+            <a:ext cx="7863840" cy="330015"/>
+          </a:xfrm>
+          <a:prstGeom prst="rect">
+            <a:avLst/>
+          </a:prstGeom>
+          <a:noFill/>
+          <a:ln/>
+        </p:spPr>
+        <p:txBody>
+          <a:bodyPr wrap="square" lIns="0" tIns="0" rIns="0" bIns="0" rtlCol="0" anchor="ctr"/>
+          <a:lstStyle/>
+          <a:p>
+            <a:pPr indent="0" marL="0">
+              <a:buNone/>
+            </a:pPr>
+            <a:r>
+              <a:rPr lang="en-US" sz="1000" dirty="0">
+                <a:solidFill>
+                  <a:srgbClr val="0D47A1"/>
+                </a:solidFill>
+                <a:latin typeface="JetBrains Mono" pitchFamily="34" charset="0"/>
+                <a:ea typeface="JetBrains Mono" pitchFamily="34" charset="-122"/>
+                <a:cs typeface="JetBrains Mono" pitchFamily="34" charset="-120"/>
+              </a:rPr>
+              <a:t>  FROM facture WHERE statut_paiement IN ('impayee','en_retard');</a:t>
+            </a:r>
+            <a:endParaRPr lang="en-US" sz="1000" dirty="0"/>
+          </a:p>
+        </p:txBody>
+      </p:sp>
+      <p:sp>
+        <p:nvSpPr>
+          <p:cNvPr id="34" name="Shape 32"/>
+          <p:cNvSpPr/>
+          <p:nvPr/>
+        </p:nvSpPr>
+        <p:spPr>
+          <a:xfrm>
+            <a:off x="457200" y="4351713"/>
+            <a:ext cx="8229600" cy="330015"/>
+          </a:xfrm>
+          <a:prstGeom prst="rect">
+            <a:avLst/>
+          </a:prstGeom>
+          <a:solidFill>
+            <a:srgbClr val="FFFFFF"/>
+          </a:solidFill>
+          <a:ln/>
+        </p:spPr>
+      </p:sp>
+      <p:sp>
+        <p:nvSpPr>
+          <p:cNvPr id="35" name="Shape 33"/>
+          <p:cNvSpPr/>
+          <p:nvPr/>
+        </p:nvSpPr>
+        <p:spPr>
+          <a:xfrm>
+            <a:off x="457200" y="4351713"/>
+            <a:ext cx="45720" cy="330015"/>
+          </a:xfrm>
+          <a:prstGeom prst="rect">
+            <a:avLst/>
+          </a:prstGeom>
+          <a:solidFill>
+            <a:srgbClr val="1565C0"/>
+          </a:solidFill>
+          <a:ln/>
+        </p:spPr>
+      </p:sp>
+      <p:sp>
+        <p:nvSpPr>
+          <p:cNvPr id="36" name="Text 34"/>
+          <p:cNvSpPr/>
+          <p:nvPr/>
+        </p:nvSpPr>
+        <p:spPr>
+          <a:xfrm>
+            <a:off x="640080" y="4351713"/>
+            <a:ext cx="7863840" cy="330015"/>
+          </a:xfrm>
+          <a:prstGeom prst="rect">
+            <a:avLst/>
+          </a:prstGeom>
+          <a:noFill/>
+          <a:ln/>
+        </p:spPr>
+        <p:txBody>
+          <a:bodyPr wrap="square" lIns="0" tIns="0" rIns="0" bIns="0" rtlCol="0" anchor="ctr"/>
+          <a:lstStyle/>
+          <a:p>
+            <a:pPr indent="0" marL="0">
+              <a:buNone/>
+            </a:pPr>
+            <a:r>
+              <a:rPr lang="en-US" sz="1100" dirty="0">
                 <a:solidFill>
                   <a:srgbClr val="1A1A2E"/>
                 </a:solidFill>
@@ -5509,525 +7342,9 @@
                 <a:ea typeface="Calibri" pitchFamily="34" charset="-122"/>
                 <a:cs typeface="Calibri" pitchFamily="34" charset="-120"/>
               </a:rPr>
-              <a:t>Écrire 10 requêtes avec agrégation + GROUP BY + HAVING</a:t>
-            </a:r>
-            <a:endParaRPr lang="en-US" sz="1200" dirty="0"/>
-          </a:p>
-        </p:txBody>
-      </p:sp>
-      <p:sp>
-        <p:nvSpPr>
-          <p:cNvPr id="7" name="Shape 5"/>
-          <p:cNvSpPr/>
-          <p:nvPr/>
-        </p:nvSpPr>
-        <p:spPr>
-          <a:xfrm>
-            <a:off x="457200" y="1463040"/>
-            <a:ext cx="8229600" cy="521208"/>
-          </a:xfrm>
-          <a:prstGeom prst="rect">
-            <a:avLst/>
-          </a:prstGeom>
-          <a:solidFill>
-            <a:srgbClr val="E3F2FD"/>
-          </a:solidFill>
-          <a:ln/>
-          <a:effectLst>
-            <a:outerShdw sx="100000" sy="100000" kx="0" ky="0" algn="bl" rotWithShape="0" blurRad="50800" dist="25400" dir="8100000">
-              <a:srgbClr val="000000">
-                <a:alpha val="12000"/>
-              </a:srgbClr>
-            </a:outerShdw>
-          </a:effectLst>
-        </p:spPr>
-      </p:sp>
-      <p:sp>
-        <p:nvSpPr>
-          <p:cNvPr id="8" name="Shape 6"/>
-          <p:cNvSpPr/>
-          <p:nvPr/>
-        </p:nvSpPr>
-        <p:spPr>
-          <a:xfrm>
-            <a:off x="457200" y="1463040"/>
-            <a:ext cx="45720" cy="521208"/>
-          </a:xfrm>
-          <a:prstGeom prst="rect">
-            <a:avLst/>
-          </a:prstGeom>
-          <a:solidFill>
-            <a:srgbClr val="1565C0"/>
-          </a:solidFill>
-          <a:ln/>
-        </p:spPr>
-      </p:sp>
-      <p:sp>
-        <p:nvSpPr>
-          <p:cNvPr id="9" name="Text 7"/>
-          <p:cNvSpPr/>
-          <p:nvPr/>
-        </p:nvSpPr>
-        <p:spPr>
-          <a:xfrm>
-            <a:off x="685800" y="1463040"/>
-            <a:ext cx="7818120" cy="521208"/>
-          </a:xfrm>
-          <a:prstGeom prst="rect">
-            <a:avLst/>
-          </a:prstGeom>
-          <a:noFill/>
-          <a:ln/>
-        </p:spPr>
-        <p:txBody>
-          <a:bodyPr wrap="square" lIns="0" tIns="0" rIns="0" bIns="0" rtlCol="0" anchor="ctr"/>
-          <a:lstStyle/>
-          <a:p>
-            <a:pPr indent="0" marL="0">
-              <a:buNone/>
-            </a:pPr>
-            <a:r>
-              <a:rPr lang="en-US" sz="1200" dirty="0">
-                <a:solidFill>
-                  <a:srgbClr val="1A1A2E"/>
-                </a:solidFill>
-                <a:latin typeface="Calibri" pitchFamily="34" charset="0"/>
-                <a:ea typeface="Calibri" pitchFamily="34" charset="-122"/>
-                <a:cs typeface="Calibri" pitchFamily="34" charset="-120"/>
-              </a:rPr>
-              <a:t>CA total des factures payées (SUM + WHERE)</a:t>
-            </a:r>
-            <a:endParaRPr lang="en-US" sz="1200" dirty="0"/>
-          </a:p>
-        </p:txBody>
-      </p:sp>
-      <p:sp>
-        <p:nvSpPr>
-          <p:cNvPr id="10" name="Shape 8"/>
-          <p:cNvSpPr/>
-          <p:nvPr/>
-        </p:nvSpPr>
-        <p:spPr>
-          <a:xfrm>
-            <a:off x="457200" y="2011680"/>
-            <a:ext cx="8229600" cy="521208"/>
-          </a:xfrm>
-          <a:prstGeom prst="rect">
-            <a:avLst/>
-          </a:prstGeom>
-          <a:solidFill>
-            <a:srgbClr val="FFFFFF"/>
-          </a:solidFill>
-          <a:ln/>
-          <a:effectLst>
-            <a:outerShdw sx="100000" sy="100000" kx="0" ky="0" algn="bl" rotWithShape="0" blurRad="50800" dist="25400" dir="8100000">
-              <a:srgbClr val="000000">
-                <a:alpha val="12000"/>
-              </a:srgbClr>
-            </a:outerShdw>
-          </a:effectLst>
-        </p:spPr>
-      </p:sp>
-      <p:sp>
-        <p:nvSpPr>
-          <p:cNvPr id="11" name="Shape 9"/>
-          <p:cNvSpPr/>
-          <p:nvPr/>
-        </p:nvSpPr>
-        <p:spPr>
-          <a:xfrm>
-            <a:off x="457200" y="2011680"/>
-            <a:ext cx="45720" cy="521208"/>
-          </a:xfrm>
-          <a:prstGeom prst="rect">
-            <a:avLst/>
-          </a:prstGeom>
-          <a:solidFill>
-            <a:srgbClr val="1565C0"/>
-          </a:solidFill>
-          <a:ln/>
-        </p:spPr>
-      </p:sp>
-      <p:sp>
-        <p:nvSpPr>
-          <p:cNvPr id="12" name="Text 10"/>
-          <p:cNvSpPr/>
-          <p:nvPr/>
-        </p:nvSpPr>
-        <p:spPr>
-          <a:xfrm>
-            <a:off x="685800" y="2011680"/>
-            <a:ext cx="7818120" cy="521208"/>
-          </a:xfrm>
-          <a:prstGeom prst="rect">
-            <a:avLst/>
-          </a:prstGeom>
-          <a:noFill/>
-          <a:ln/>
-        </p:spPr>
-        <p:txBody>
-          <a:bodyPr wrap="square" lIns="0" tIns="0" rIns="0" bIns="0" rtlCol="0" anchor="ctr"/>
-          <a:lstStyle/>
-          <a:p>
-            <a:pPr indent="0" marL="0">
-              <a:buNone/>
-            </a:pPr>
-            <a:r>
-              <a:rPr lang="en-US" sz="1200" dirty="0">
-                <a:solidFill>
-                  <a:srgbClr val="1A1A2E"/>
-                </a:solidFill>
-                <a:latin typeface="Calibri" pitchFamily="34" charset="0"/>
-                <a:ea typeface="Calibri" pitchFamily="34" charset="-122"/>
-                <a:cs typeface="Calibri" pitchFamily="34" charset="-120"/>
-              </a:rPr>
-              <a:t>Nombre d'albums par artiste (COUNT + GROUP BY)</a:t>
-            </a:r>
-            <a:endParaRPr lang="en-US" sz="1200" dirty="0"/>
-          </a:p>
-        </p:txBody>
-      </p:sp>
-      <p:sp>
-        <p:nvSpPr>
-          <p:cNvPr id="13" name="Shape 11"/>
-          <p:cNvSpPr/>
-          <p:nvPr/>
-        </p:nvSpPr>
-        <p:spPr>
-          <a:xfrm>
-            <a:off x="457200" y="2560320"/>
-            <a:ext cx="8229600" cy="521208"/>
-          </a:xfrm>
-          <a:prstGeom prst="rect">
-            <a:avLst/>
-          </a:prstGeom>
-          <a:solidFill>
-            <a:srgbClr val="E3F2FD"/>
-          </a:solidFill>
-          <a:ln/>
-          <a:effectLst>
-            <a:outerShdw sx="100000" sy="100000" kx="0" ky="0" algn="bl" rotWithShape="0" blurRad="50800" dist="25400" dir="8100000">
-              <a:srgbClr val="000000">
-                <a:alpha val="12000"/>
-              </a:srgbClr>
-            </a:outerShdw>
-          </a:effectLst>
-        </p:spPr>
-      </p:sp>
-      <p:sp>
-        <p:nvSpPr>
-          <p:cNvPr id="14" name="Shape 12"/>
-          <p:cNvSpPr/>
-          <p:nvPr/>
-        </p:nvSpPr>
-        <p:spPr>
-          <a:xfrm>
-            <a:off x="457200" y="2560320"/>
-            <a:ext cx="45720" cy="521208"/>
-          </a:xfrm>
-          <a:prstGeom prst="rect">
-            <a:avLst/>
-          </a:prstGeom>
-          <a:solidFill>
-            <a:srgbClr val="1565C0"/>
-          </a:solidFill>
-          <a:ln/>
-        </p:spPr>
-      </p:sp>
-      <p:sp>
-        <p:nvSpPr>
-          <p:cNvPr id="15" name="Text 13"/>
-          <p:cNvSpPr/>
-          <p:nvPr/>
-        </p:nvSpPr>
-        <p:spPr>
-          <a:xfrm>
-            <a:off x="685800" y="2560320"/>
-            <a:ext cx="7818120" cy="521208"/>
-          </a:xfrm>
-          <a:prstGeom prst="rect">
-            <a:avLst/>
-          </a:prstGeom>
-          <a:noFill/>
-          <a:ln/>
-        </p:spPr>
-        <p:txBody>
-          <a:bodyPr wrap="square" lIns="0" tIns="0" rIns="0" bIns="0" rtlCol="0" anchor="ctr"/>
-          <a:lstStyle/>
-          <a:p>
-            <a:pPr indent="0" marL="0">
-              <a:buNone/>
-            </a:pPr>
-            <a:r>
-              <a:rPr lang="en-US" sz="1200" dirty="0">
-                <a:solidFill>
-                  <a:srgbClr val="1A1A2E"/>
-                </a:solidFill>
-                <a:latin typeface="Calibri" pitchFamily="34" charset="0"/>
-                <a:ea typeface="Calibri" pitchFamily="34" charset="-122"/>
-                <a:cs typeface="Calibri" pitchFamily="34" charset="-120"/>
-              </a:rPr>
-              <a:t>Artistes avec plus de 1 album (HAVING COUNT &gt; 1)</a:t>
-            </a:r>
-            <a:endParaRPr lang="en-US" sz="1200" dirty="0"/>
-          </a:p>
-        </p:txBody>
-      </p:sp>
-      <p:sp>
-        <p:nvSpPr>
-          <p:cNvPr id="16" name="Shape 14"/>
-          <p:cNvSpPr/>
-          <p:nvPr/>
-        </p:nvSpPr>
-        <p:spPr>
-          <a:xfrm>
-            <a:off x="457200" y="3108960"/>
-            <a:ext cx="8229600" cy="521208"/>
-          </a:xfrm>
-          <a:prstGeom prst="rect">
-            <a:avLst/>
-          </a:prstGeom>
-          <a:solidFill>
-            <a:srgbClr val="FFFFFF"/>
-          </a:solidFill>
-          <a:ln/>
-          <a:effectLst>
-            <a:outerShdw sx="100000" sy="100000" kx="0" ky="0" algn="bl" rotWithShape="0" blurRad="50800" dist="25400" dir="8100000">
-              <a:srgbClr val="000000">
-                <a:alpha val="12000"/>
-              </a:srgbClr>
-            </a:outerShdw>
-          </a:effectLst>
-        </p:spPr>
-      </p:sp>
-      <p:sp>
-        <p:nvSpPr>
-          <p:cNvPr id="17" name="Shape 15"/>
-          <p:cNvSpPr/>
-          <p:nvPr/>
-        </p:nvSpPr>
-        <p:spPr>
-          <a:xfrm>
-            <a:off x="457200" y="3108960"/>
-            <a:ext cx="45720" cy="521208"/>
-          </a:xfrm>
-          <a:prstGeom prst="rect">
-            <a:avLst/>
-          </a:prstGeom>
-          <a:solidFill>
-            <a:srgbClr val="1565C0"/>
-          </a:solidFill>
-          <a:ln/>
-        </p:spPr>
-      </p:sp>
-      <p:sp>
-        <p:nvSpPr>
-          <p:cNvPr id="18" name="Text 16"/>
-          <p:cNvSpPr/>
-          <p:nvPr/>
-        </p:nvSpPr>
-        <p:spPr>
-          <a:xfrm>
-            <a:off x="685800" y="3108960"/>
-            <a:ext cx="7818120" cy="521208"/>
-          </a:xfrm>
-          <a:prstGeom prst="rect">
-            <a:avLst/>
-          </a:prstGeom>
-          <a:noFill/>
-          <a:ln/>
-        </p:spPr>
-        <p:txBody>
-          <a:bodyPr wrap="square" lIns="0" tIns="0" rIns="0" bIns="0" rtlCol="0" anchor="ctr"/>
-          <a:lstStyle/>
-          <a:p>
-            <a:pPr indent="0" marL="0">
-              <a:buNone/>
-            </a:pPr>
-            <a:r>
-              <a:rPr lang="en-US" sz="1200" dirty="0">
-                <a:solidFill>
-                  <a:srgbClr val="1A1A2E"/>
-                </a:solidFill>
-                <a:latin typeface="Calibri" pitchFamily="34" charset="0"/>
-                <a:ea typeface="Calibri" pitchFamily="34" charset="-122"/>
-                <a:cs typeface="Calibri" pitchFamily="34" charset="-120"/>
-              </a:rPr>
-              <a:t>CA mensuel en 2025 (GROUP BY YEAR, MONTH)</a:t>
-            </a:r>
-            <a:endParaRPr lang="en-US" sz="1200" dirty="0"/>
-          </a:p>
-        </p:txBody>
-      </p:sp>
-      <p:sp>
-        <p:nvSpPr>
-          <p:cNvPr id="19" name="Shape 17"/>
-          <p:cNvSpPr/>
-          <p:nvPr/>
-        </p:nvSpPr>
-        <p:spPr>
-          <a:xfrm>
-            <a:off x="457200" y="3657600"/>
-            <a:ext cx="8229600" cy="521208"/>
-          </a:xfrm>
-          <a:prstGeom prst="rect">
-            <a:avLst/>
-          </a:prstGeom>
-          <a:solidFill>
-            <a:srgbClr val="E3F2FD"/>
-          </a:solidFill>
-          <a:ln/>
-          <a:effectLst>
-            <a:outerShdw sx="100000" sy="100000" kx="0" ky="0" algn="bl" rotWithShape="0" blurRad="50800" dist="25400" dir="8100000">
-              <a:srgbClr val="000000">
-                <a:alpha val="12000"/>
-              </a:srgbClr>
-            </a:outerShdw>
-          </a:effectLst>
-        </p:spPr>
-      </p:sp>
-      <p:sp>
-        <p:nvSpPr>
-          <p:cNvPr id="20" name="Shape 18"/>
-          <p:cNvSpPr/>
-          <p:nvPr/>
-        </p:nvSpPr>
-        <p:spPr>
-          <a:xfrm>
-            <a:off x="457200" y="3657600"/>
-            <a:ext cx="45720" cy="521208"/>
-          </a:xfrm>
-          <a:prstGeom prst="rect">
-            <a:avLst/>
-          </a:prstGeom>
-          <a:solidFill>
-            <a:srgbClr val="1565C0"/>
-          </a:solidFill>
-          <a:ln/>
-        </p:spPr>
-      </p:sp>
-      <p:sp>
-        <p:nvSpPr>
-          <p:cNvPr id="21" name="Text 19"/>
-          <p:cNvSpPr/>
-          <p:nvPr/>
-        </p:nvSpPr>
-        <p:spPr>
-          <a:xfrm>
-            <a:off x="685800" y="3657600"/>
-            <a:ext cx="7818120" cy="521208"/>
-          </a:xfrm>
-          <a:prstGeom prst="rect">
-            <a:avLst/>
-          </a:prstGeom>
-          <a:noFill/>
-          <a:ln/>
-        </p:spPr>
-        <p:txBody>
-          <a:bodyPr wrap="square" lIns="0" tIns="0" rIns="0" bIns="0" rtlCol="0" anchor="ctr"/>
-          <a:lstStyle/>
-          <a:p>
-            <a:pPr indent="0" marL="0">
-              <a:buNone/>
-            </a:pPr>
-            <a:r>
-              <a:rPr lang="en-US" sz="1200" dirty="0">
-                <a:solidFill>
-                  <a:srgbClr val="1A1A2E"/>
-                </a:solidFill>
-                <a:latin typeface="Calibri" pitchFamily="34" charset="0"/>
-                <a:ea typeface="Calibri" pitchFamily="34" charset="-122"/>
-                <a:cs typeface="Calibri" pitchFamily="34" charset="-120"/>
-              </a:rPr>
-              <a:t>Créer le 'dashboard SQL' : 5 KPI SwissSound en une requête</a:t>
-            </a:r>
-            <a:endParaRPr lang="en-US" sz="1200" dirty="0"/>
-          </a:p>
-        </p:txBody>
-      </p:sp>
-      <p:sp>
-        <p:nvSpPr>
-          <p:cNvPr id="22" name="Shape 20"/>
-          <p:cNvSpPr/>
-          <p:nvPr/>
-        </p:nvSpPr>
-        <p:spPr>
-          <a:xfrm>
-            <a:off x="457200" y="4206240"/>
-            <a:ext cx="8229600" cy="521208"/>
-          </a:xfrm>
-          <a:prstGeom prst="rect">
-            <a:avLst/>
-          </a:prstGeom>
-          <a:solidFill>
-            <a:srgbClr val="FFFFFF"/>
-          </a:solidFill>
-          <a:ln/>
-          <a:effectLst>
-            <a:outerShdw sx="100000" sy="100000" kx="0" ky="0" algn="bl" rotWithShape="0" blurRad="50800" dist="25400" dir="8100000">
-              <a:srgbClr val="000000">
-                <a:alpha val="12000"/>
-              </a:srgbClr>
-            </a:outerShdw>
-          </a:effectLst>
-        </p:spPr>
-      </p:sp>
-      <p:sp>
-        <p:nvSpPr>
-          <p:cNvPr id="23" name="Shape 21"/>
-          <p:cNvSpPr/>
-          <p:nvPr/>
-        </p:nvSpPr>
-        <p:spPr>
-          <a:xfrm>
-            <a:off x="457200" y="4206240"/>
-            <a:ext cx="45720" cy="521208"/>
-          </a:xfrm>
-          <a:prstGeom prst="rect">
-            <a:avLst/>
-          </a:prstGeom>
-          <a:solidFill>
-            <a:srgbClr val="1565C0"/>
-          </a:solidFill>
-          <a:ln/>
-        </p:spPr>
-      </p:sp>
-      <p:sp>
-        <p:nvSpPr>
-          <p:cNvPr id="24" name="Text 22"/>
-          <p:cNvSpPr/>
-          <p:nvPr/>
-        </p:nvSpPr>
-        <p:spPr>
-          <a:xfrm>
-            <a:off x="685800" y="4206240"/>
-            <a:ext cx="7818120" cy="521208"/>
-          </a:xfrm>
-          <a:prstGeom prst="rect">
-            <a:avLst/>
-          </a:prstGeom>
-          <a:noFill/>
-          <a:ln/>
-        </p:spPr>
-        <p:txBody>
-          <a:bodyPr wrap="square" lIns="0" tIns="0" rIns="0" bIns="0" rtlCol="0" anchor="ctr"/>
-          <a:lstStyle/>
-          <a:p>
-            <a:pPr indent="0" marL="0">
-              <a:buNone/>
-            </a:pPr>
-            <a:r>
-              <a:rPr lang="en-US" sz="1200" dirty="0">
-                <a:solidFill>
-                  <a:srgbClr val="1A1A2E"/>
-                </a:solidFill>
-                <a:latin typeface="Calibri" pitchFamily="34" charset="0"/>
-                <a:ea typeface="Calibri" pitchFamily="34" charset="-122"/>
-                <a:cs typeface="Calibri" pitchFamily="34" charset="-120"/>
-              </a:rPr>
-              <a:t>DÉFI : utiliser une sous-requête pour trouver l'artiste avec le plus de sessions</a:t>
-            </a:r>
-            <a:endParaRPr lang="en-US" sz="1200" dirty="0"/>
+              <a:t>→ 4 KPI en une seule requete avec UNION ALL</a:t>
+            </a:r>
+            <a:endParaRPr lang="en-US" sz="1100" dirty="0"/>
           </a:p>
         </p:txBody>
       </p:sp>
@@ -6042,6 +7359,887 @@
 <file path=ppt/slides/slide8.xml><?xml version="1.0" encoding="utf-8"?>
 <p:sld xmlns:a="http://schemas.openxmlformats.org/drawingml/2006/main" xmlns:r="http://schemas.openxmlformats.org/officeDocument/2006/relationships" xmlns:p="http://schemas.openxmlformats.org/presentationml/2006/main">
   <p:cSld name="Slide 8">
+    <p:bg>
+      <p:bgPr>
+        <a:solidFill>
+          <a:srgbClr val="F5F7FA"/>
+        </a:solidFill>
+      </p:bgPr>
+    </p:bg>
+    <p:spTree>
+      <p:nvGrpSpPr>
+        <p:cNvPr id="1" name=""/>
+        <p:cNvGrpSpPr/>
+        <p:nvPr/>
+      </p:nvGrpSpPr>
+      <p:grpSpPr>
+        <a:xfrm>
+          <a:off x="0" y="0"/>
+          <a:ext cx="0" cy="0"/>
+          <a:chOff x="0" y="0"/>
+          <a:chExt cx="0" cy="0"/>
+        </a:xfrm>
+      </p:grpSpPr>
+      <p:sp>
+        <p:nvSpPr>
+          <p:cNvPr id="2" name="Shape 0"/>
+          <p:cNvSpPr/>
+          <p:nvPr/>
+        </p:nvSpPr>
+        <p:spPr>
+          <a:xfrm>
+            <a:off x="0" y="0"/>
+            <a:ext cx="9144000" cy="54864"/>
+          </a:xfrm>
+          <a:prstGeom prst="rect">
+            <a:avLst/>
+          </a:prstGeom>
+          <a:solidFill>
+            <a:srgbClr val="1565C0"/>
+          </a:solidFill>
+          <a:ln/>
+        </p:spPr>
+      </p:sp>
+      <p:sp>
+        <p:nvSpPr>
+          <p:cNvPr id="3" name="Text 1"/>
+          <p:cNvSpPr/>
+          <p:nvPr/>
+        </p:nvSpPr>
+        <p:spPr>
+          <a:xfrm>
+            <a:off x="457200" y="182880"/>
+            <a:ext cx="8229600" cy="502920"/>
+          </a:xfrm>
+          <a:prstGeom prst="rect">
+            <a:avLst/>
+          </a:prstGeom>
+          <a:noFill/>
+          <a:ln/>
+        </p:spPr>
+        <p:txBody>
+          <a:bodyPr wrap="square" lIns="0" tIns="0" rIns="0" bIns="0" rtlCol="0" anchor="ctr"/>
+          <a:lstStyle/>
+          <a:p>
+            <a:pPr indent="0" marL="0">
+              <a:buNone/>
+            </a:pPr>
+            <a:r>
+              <a:rPr lang="en-US" sz="2100" b="1" dirty="0">
+                <a:solidFill>
+                  <a:srgbClr val="0D47A1"/>
+                </a:solidFill>
+                <a:latin typeface="Trebuchet MS" pitchFamily="34" charset="0"/>
+                <a:ea typeface="Trebuchet MS" pitchFamily="34" charset="-122"/>
+                <a:cs typeface="Trebuchet MS" pitchFamily="34" charset="-120"/>
+              </a:rPr>
+              <a:t>Exercice Module 13 — GESCOM + SwissSound</a:t>
+            </a:r>
+            <a:endParaRPr lang="en-US" sz="2100" dirty="0"/>
+          </a:p>
+        </p:txBody>
+      </p:sp>
+      <p:sp>
+        <p:nvSpPr>
+          <p:cNvPr id="4" name="Shape 2"/>
+          <p:cNvSpPr/>
+          <p:nvPr/>
+        </p:nvSpPr>
+        <p:spPr>
+          <a:xfrm>
+            <a:off x="457200" y="777240"/>
+            <a:ext cx="8229600" cy="365760"/>
+          </a:xfrm>
+          <a:prstGeom prst="rect">
+            <a:avLst/>
+          </a:prstGeom>
+          <a:solidFill>
+            <a:srgbClr val="FFFFFF"/>
+          </a:solidFill>
+          <a:ln/>
+        </p:spPr>
+      </p:sp>
+      <p:sp>
+        <p:nvSpPr>
+          <p:cNvPr id="5" name="Shape 3"/>
+          <p:cNvSpPr/>
+          <p:nvPr/>
+        </p:nvSpPr>
+        <p:spPr>
+          <a:xfrm>
+            <a:off x="457200" y="777240"/>
+            <a:ext cx="45720" cy="365760"/>
+          </a:xfrm>
+          <a:prstGeom prst="rect">
+            <a:avLst/>
+          </a:prstGeom>
+          <a:solidFill>
+            <a:srgbClr val="1565C0"/>
+          </a:solidFill>
+          <a:ln/>
+        </p:spPr>
+      </p:sp>
+      <p:sp>
+        <p:nvSpPr>
+          <p:cNvPr id="6" name="Text 4"/>
+          <p:cNvSpPr/>
+          <p:nvPr/>
+        </p:nvSpPr>
+        <p:spPr>
+          <a:xfrm>
+            <a:off x="640080" y="777240"/>
+            <a:ext cx="7863840" cy="365760"/>
+          </a:xfrm>
+          <a:prstGeom prst="rect">
+            <a:avLst/>
+          </a:prstGeom>
+          <a:noFill/>
+          <a:ln/>
+        </p:spPr>
+        <p:txBody>
+          <a:bodyPr wrap="square" lIns="0" tIns="0" rIns="0" bIns="0" rtlCol="0" anchor="ctr"/>
+          <a:lstStyle/>
+          <a:p>
+            <a:pPr indent="0" marL="0">
+              <a:buNone/>
+            </a:pPr>
+            <a:r>
+              <a:rPr lang="en-US" sz="1100" dirty="0">
+                <a:solidFill>
+                  <a:srgbClr val="1A1A2E"/>
+                </a:solidFill>
+                <a:latin typeface="Calibri" pitchFamily="34" charset="0"/>
+                <a:ea typeface="Calibri" pitchFamily="34" charset="-122"/>
+                <a:cs typeface="Calibri" pitchFamily="34" charset="-120"/>
+              </a:rPr>
+              <a:t>GESCOM (bac a sable, exercices 1-5 avances) :</a:t>
+            </a:r>
+            <a:endParaRPr lang="en-US" sz="1100" dirty="0"/>
+          </a:p>
+        </p:txBody>
+      </p:sp>
+      <p:sp>
+        <p:nvSpPr>
+          <p:cNvPr id="7" name="Shape 5"/>
+          <p:cNvSpPr/>
+          <p:nvPr/>
+        </p:nvSpPr>
+        <p:spPr>
+          <a:xfrm>
+            <a:off x="457200" y="1170432"/>
+            <a:ext cx="8229600" cy="365760"/>
+          </a:xfrm>
+          <a:prstGeom prst="rect">
+            <a:avLst/>
+          </a:prstGeom>
+          <a:solidFill>
+            <a:srgbClr val="E3F2FD"/>
+          </a:solidFill>
+          <a:ln/>
+        </p:spPr>
+      </p:sp>
+      <p:sp>
+        <p:nvSpPr>
+          <p:cNvPr id="8" name="Shape 6"/>
+          <p:cNvSpPr/>
+          <p:nvPr/>
+        </p:nvSpPr>
+        <p:spPr>
+          <a:xfrm>
+            <a:off x="457200" y="1170432"/>
+            <a:ext cx="45720" cy="365760"/>
+          </a:xfrm>
+          <a:prstGeom prst="rect">
+            <a:avLst/>
+          </a:prstGeom>
+          <a:solidFill>
+            <a:srgbClr val="1565C0"/>
+          </a:solidFill>
+          <a:ln/>
+        </p:spPr>
+      </p:sp>
+      <p:sp>
+        <p:nvSpPr>
+          <p:cNvPr id="9" name="Text 7"/>
+          <p:cNvSpPr/>
+          <p:nvPr/>
+        </p:nvSpPr>
+        <p:spPr>
+          <a:xfrm>
+            <a:off x="640080" y="1170432"/>
+            <a:ext cx="7863840" cy="365760"/>
+          </a:xfrm>
+          <a:prstGeom prst="rect">
+            <a:avLst/>
+          </a:prstGeom>
+          <a:noFill/>
+          <a:ln/>
+        </p:spPr>
+        <p:txBody>
+          <a:bodyPr wrap="square" lIns="0" tIns="0" rIns="0" bIns="0" rtlCol="0" anchor="ctr"/>
+          <a:lstStyle/>
+          <a:p>
+            <a:pPr indent="0" marL="0">
+              <a:buNone/>
+            </a:pPr>
+            <a:r>
+              <a:rPr lang="en-US" sz="1100" dirty="0">
+                <a:solidFill>
+                  <a:srgbClr val="1A1A2E"/>
+                </a:solidFill>
+                <a:latin typeface="Calibri" pitchFamily="34" charset="0"/>
+                <a:ea typeface="Calibri" pitchFamily="34" charset="-122"/>
+                <a:cs typeface="Calibri" pitchFamily="34" charset="-120"/>
+              </a:rPr>
+              <a:t>  CA par categorie, nb articles par famille, familles &gt; 3 articles</a:t>
+            </a:r>
+            <a:endParaRPr lang="en-US" sz="1100" dirty="0"/>
+          </a:p>
+        </p:txBody>
+      </p:sp>
+      <p:sp>
+        <p:nvSpPr>
+          <p:cNvPr id="10" name="Shape 8"/>
+          <p:cNvSpPr/>
+          <p:nvPr/>
+        </p:nvSpPr>
+        <p:spPr>
+          <a:xfrm>
+            <a:off x="457200" y="1563624"/>
+            <a:ext cx="8229600" cy="365760"/>
+          </a:xfrm>
+          <a:prstGeom prst="rect">
+            <a:avLst/>
+          </a:prstGeom>
+          <a:solidFill>
+            <a:srgbClr val="FFFFFF"/>
+          </a:solidFill>
+          <a:ln/>
+        </p:spPr>
+      </p:sp>
+      <p:sp>
+        <p:nvSpPr>
+          <p:cNvPr id="11" name="Shape 9"/>
+          <p:cNvSpPr/>
+          <p:nvPr/>
+        </p:nvSpPr>
+        <p:spPr>
+          <a:xfrm>
+            <a:off x="457200" y="1563624"/>
+            <a:ext cx="45720" cy="365760"/>
+          </a:xfrm>
+          <a:prstGeom prst="rect">
+            <a:avLst/>
+          </a:prstGeom>
+          <a:solidFill>
+            <a:srgbClr val="1565C0"/>
+          </a:solidFill>
+          <a:ln/>
+        </p:spPr>
+      </p:sp>
+      <p:sp>
+        <p:nvSpPr>
+          <p:cNvPr id="12" name="Text 10"/>
+          <p:cNvSpPr/>
+          <p:nvPr/>
+        </p:nvSpPr>
+        <p:spPr>
+          <a:xfrm>
+            <a:off x="640080" y="1563624"/>
+            <a:ext cx="7863840" cy="365760"/>
+          </a:xfrm>
+          <a:prstGeom prst="rect">
+            <a:avLst/>
+          </a:prstGeom>
+          <a:noFill/>
+          <a:ln/>
+        </p:spPr>
+        <p:txBody>
+          <a:bodyPr wrap="square" lIns="0" tIns="0" rIns="0" bIns="0" rtlCol="0" anchor="ctr"/>
+          <a:lstStyle/>
+          <a:p>
+            <a:pPr indent="0" marL="0">
+              <a:buNone/>
+            </a:pPr>
+            <a:r>
+              <a:rPr lang="en-US" sz="1100" dirty="0">
+                <a:solidFill>
+                  <a:srgbClr val="1A1A2E"/>
+                </a:solidFill>
+                <a:latin typeface="Calibri" pitchFamily="34" charset="0"/>
+                <a:ea typeface="Calibri" pitchFamily="34" charset="-122"/>
+                <a:cs typeface="Calibri" pitchFamily="34" charset="-120"/>
+              </a:rPr>
+              <a:t>SwissSound :</a:t>
+            </a:r>
+            <a:endParaRPr lang="en-US" sz="1100" dirty="0"/>
+          </a:p>
+        </p:txBody>
+      </p:sp>
+      <p:sp>
+        <p:nvSpPr>
+          <p:cNvPr id="13" name="Shape 11"/>
+          <p:cNvSpPr/>
+          <p:nvPr/>
+        </p:nvSpPr>
+        <p:spPr>
+          <a:xfrm>
+            <a:off x="457200" y="1956816"/>
+            <a:ext cx="8229600" cy="365760"/>
+          </a:xfrm>
+          <a:prstGeom prst="rect">
+            <a:avLst/>
+          </a:prstGeom>
+          <a:solidFill>
+            <a:srgbClr val="E3F2FD"/>
+          </a:solidFill>
+          <a:ln/>
+        </p:spPr>
+      </p:sp>
+      <p:sp>
+        <p:nvSpPr>
+          <p:cNvPr id="14" name="Shape 12"/>
+          <p:cNvSpPr/>
+          <p:nvPr/>
+        </p:nvSpPr>
+        <p:spPr>
+          <a:xfrm>
+            <a:off x="457200" y="1956816"/>
+            <a:ext cx="45720" cy="365760"/>
+          </a:xfrm>
+          <a:prstGeom prst="rect">
+            <a:avLst/>
+          </a:prstGeom>
+          <a:solidFill>
+            <a:srgbClr val="1565C0"/>
+          </a:solidFill>
+          <a:ln/>
+        </p:spPr>
+      </p:sp>
+      <p:sp>
+        <p:nvSpPr>
+          <p:cNvPr id="15" name="Text 13"/>
+          <p:cNvSpPr/>
+          <p:nvPr/>
+        </p:nvSpPr>
+        <p:spPr>
+          <a:xfrm>
+            <a:off x="640080" y="1956816"/>
+            <a:ext cx="7863840" cy="365760"/>
+          </a:xfrm>
+          <a:prstGeom prst="rect">
+            <a:avLst/>
+          </a:prstGeom>
+          <a:noFill/>
+          <a:ln/>
+        </p:spPr>
+        <p:txBody>
+          <a:bodyPr wrap="square" lIns="0" tIns="0" rIns="0" bIns="0" rtlCol="0" anchor="ctr"/>
+          <a:lstStyle/>
+          <a:p>
+            <a:pPr indent="0" marL="0">
+              <a:buNone/>
+            </a:pPr>
+            <a:r>
+              <a:rPr lang="en-US" sz="1100" dirty="0">
+                <a:solidFill>
+                  <a:srgbClr val="1A1A2E"/>
+                </a:solidFill>
+                <a:latin typeface="Calibri" pitchFamily="34" charset="0"/>
+                <a:ea typeface="Calibri" pitchFamily="34" charset="-122"/>
+                <a:cs typeface="Calibri" pitchFamily="34" charset="-120"/>
+              </a:rPr>
+              <a:t>  1. Nombre d'artistes actifs (COUNT + WHERE)</a:t>
+            </a:r>
+            <a:endParaRPr lang="en-US" sz="1100" dirty="0"/>
+          </a:p>
+        </p:txBody>
+      </p:sp>
+      <p:sp>
+        <p:nvSpPr>
+          <p:cNvPr id="16" name="Shape 14"/>
+          <p:cNvSpPr/>
+          <p:nvPr/>
+        </p:nvSpPr>
+        <p:spPr>
+          <a:xfrm>
+            <a:off x="457200" y="2350008"/>
+            <a:ext cx="8229600" cy="365760"/>
+          </a:xfrm>
+          <a:prstGeom prst="rect">
+            <a:avLst/>
+          </a:prstGeom>
+          <a:solidFill>
+            <a:srgbClr val="FFFFFF"/>
+          </a:solidFill>
+          <a:ln/>
+        </p:spPr>
+      </p:sp>
+      <p:sp>
+        <p:nvSpPr>
+          <p:cNvPr id="17" name="Shape 15"/>
+          <p:cNvSpPr/>
+          <p:nvPr/>
+        </p:nvSpPr>
+        <p:spPr>
+          <a:xfrm>
+            <a:off x="457200" y="2350008"/>
+            <a:ext cx="45720" cy="365760"/>
+          </a:xfrm>
+          <a:prstGeom prst="rect">
+            <a:avLst/>
+          </a:prstGeom>
+          <a:solidFill>
+            <a:srgbClr val="1565C0"/>
+          </a:solidFill>
+          <a:ln/>
+        </p:spPr>
+      </p:sp>
+      <p:sp>
+        <p:nvSpPr>
+          <p:cNvPr id="18" name="Text 16"/>
+          <p:cNvSpPr/>
+          <p:nvPr/>
+        </p:nvSpPr>
+        <p:spPr>
+          <a:xfrm>
+            <a:off x="640080" y="2350008"/>
+            <a:ext cx="7863840" cy="365760"/>
+          </a:xfrm>
+          <a:prstGeom prst="rect">
+            <a:avLst/>
+          </a:prstGeom>
+          <a:noFill/>
+          <a:ln/>
+        </p:spPr>
+        <p:txBody>
+          <a:bodyPr wrap="square" lIns="0" tIns="0" rIns="0" bIns="0" rtlCol="0" anchor="ctr"/>
+          <a:lstStyle/>
+          <a:p>
+            <a:pPr indent="0" marL="0">
+              <a:buNone/>
+            </a:pPr>
+            <a:r>
+              <a:rPr lang="en-US" sz="1100" dirty="0">
+                <a:solidFill>
+                  <a:srgbClr val="1A1A2E"/>
+                </a:solidFill>
+                <a:latin typeface="Calibri" pitchFamily="34" charset="0"/>
+                <a:ea typeface="Calibri" pitchFamily="34" charset="-122"/>
+                <a:cs typeface="Calibri" pitchFamily="34" charset="-120"/>
+              </a:rPr>
+              <a:t>  2. Prix moyen des albums (ROUND + AVG)</a:t>
+            </a:r>
+            <a:endParaRPr lang="en-US" sz="1100" dirty="0"/>
+          </a:p>
+        </p:txBody>
+      </p:sp>
+      <p:sp>
+        <p:nvSpPr>
+          <p:cNvPr id="19" name="Shape 17"/>
+          <p:cNvSpPr/>
+          <p:nvPr/>
+        </p:nvSpPr>
+        <p:spPr>
+          <a:xfrm>
+            <a:off x="457200" y="2743200"/>
+            <a:ext cx="8229600" cy="365760"/>
+          </a:xfrm>
+          <a:prstGeom prst="rect">
+            <a:avLst/>
+          </a:prstGeom>
+          <a:solidFill>
+            <a:srgbClr val="E3F2FD"/>
+          </a:solidFill>
+          <a:ln/>
+        </p:spPr>
+      </p:sp>
+      <p:sp>
+        <p:nvSpPr>
+          <p:cNvPr id="20" name="Shape 18"/>
+          <p:cNvSpPr/>
+          <p:nvPr/>
+        </p:nvSpPr>
+        <p:spPr>
+          <a:xfrm>
+            <a:off x="457200" y="2743200"/>
+            <a:ext cx="45720" cy="365760"/>
+          </a:xfrm>
+          <a:prstGeom prst="rect">
+            <a:avLst/>
+          </a:prstGeom>
+          <a:solidFill>
+            <a:srgbClr val="1565C0"/>
+          </a:solidFill>
+          <a:ln/>
+        </p:spPr>
+      </p:sp>
+      <p:sp>
+        <p:nvSpPr>
+          <p:cNvPr id="21" name="Text 19"/>
+          <p:cNvSpPr/>
+          <p:nvPr/>
+        </p:nvSpPr>
+        <p:spPr>
+          <a:xfrm>
+            <a:off x="640080" y="2743200"/>
+            <a:ext cx="7863840" cy="365760"/>
+          </a:xfrm>
+          <a:prstGeom prst="rect">
+            <a:avLst/>
+          </a:prstGeom>
+          <a:noFill/>
+          <a:ln/>
+        </p:spPr>
+        <p:txBody>
+          <a:bodyPr wrap="square" lIns="0" tIns="0" rIns="0" bIns="0" rtlCol="0" anchor="ctr"/>
+          <a:lstStyle/>
+          <a:p>
+            <a:pPr indent="0" marL="0">
+              <a:buNone/>
+            </a:pPr>
+            <a:r>
+              <a:rPr lang="en-US" sz="1100" dirty="0">
+                <a:solidFill>
+                  <a:srgbClr val="1A1A2E"/>
+                </a:solidFill>
+                <a:latin typeface="Calibri" pitchFamily="34" charset="0"/>
+                <a:ea typeface="Calibri" pitchFamily="34" charset="-122"/>
+                <a:cs typeface="Calibri" pitchFamily="34" charset="-120"/>
+              </a:rPr>
+              <a:t>  3. Nb albums par artiste (GROUP BY)</a:t>
+            </a:r>
+            <a:endParaRPr lang="en-US" sz="1100" dirty="0"/>
+          </a:p>
+        </p:txBody>
+      </p:sp>
+      <p:sp>
+        <p:nvSpPr>
+          <p:cNvPr id="22" name="Shape 20"/>
+          <p:cNvSpPr/>
+          <p:nvPr/>
+        </p:nvSpPr>
+        <p:spPr>
+          <a:xfrm>
+            <a:off x="457200" y="3136392"/>
+            <a:ext cx="8229600" cy="365760"/>
+          </a:xfrm>
+          <a:prstGeom prst="rect">
+            <a:avLst/>
+          </a:prstGeom>
+          <a:solidFill>
+            <a:srgbClr val="FFFFFF"/>
+          </a:solidFill>
+          <a:ln/>
+        </p:spPr>
+      </p:sp>
+      <p:sp>
+        <p:nvSpPr>
+          <p:cNvPr id="23" name="Shape 21"/>
+          <p:cNvSpPr/>
+          <p:nvPr/>
+        </p:nvSpPr>
+        <p:spPr>
+          <a:xfrm>
+            <a:off x="457200" y="3136392"/>
+            <a:ext cx="45720" cy="365760"/>
+          </a:xfrm>
+          <a:prstGeom prst="rect">
+            <a:avLst/>
+          </a:prstGeom>
+          <a:solidFill>
+            <a:srgbClr val="1565C0"/>
+          </a:solidFill>
+          <a:ln/>
+        </p:spPr>
+      </p:sp>
+      <p:sp>
+        <p:nvSpPr>
+          <p:cNvPr id="24" name="Text 22"/>
+          <p:cNvSpPr/>
+          <p:nvPr/>
+        </p:nvSpPr>
+        <p:spPr>
+          <a:xfrm>
+            <a:off x="640080" y="3136392"/>
+            <a:ext cx="7863840" cy="365760"/>
+          </a:xfrm>
+          <a:prstGeom prst="rect">
+            <a:avLst/>
+          </a:prstGeom>
+          <a:noFill/>
+          <a:ln/>
+        </p:spPr>
+        <p:txBody>
+          <a:bodyPr wrap="square" lIns="0" tIns="0" rIns="0" bIns="0" rtlCol="0" anchor="ctr"/>
+          <a:lstStyle/>
+          <a:p>
+            <a:pPr indent="0" marL="0">
+              <a:buNone/>
+            </a:pPr>
+            <a:r>
+              <a:rPr lang="en-US" sz="1100" dirty="0">
+                <a:solidFill>
+                  <a:srgbClr val="1A1A2E"/>
+                </a:solidFill>
+                <a:latin typeface="Calibri" pitchFamily="34" charset="0"/>
+                <a:ea typeface="Calibri" pitchFamily="34" charset="-122"/>
+                <a:cs typeface="Calibri" pitchFamily="34" charset="-120"/>
+              </a:rPr>
+              <a:t>  4. Artistes avec plus de 1 album (HAVING)</a:t>
+            </a:r>
+            <a:endParaRPr lang="en-US" sz="1100" dirty="0"/>
+          </a:p>
+        </p:txBody>
+      </p:sp>
+      <p:sp>
+        <p:nvSpPr>
+          <p:cNvPr id="25" name="Shape 23"/>
+          <p:cNvSpPr/>
+          <p:nvPr/>
+        </p:nvSpPr>
+        <p:spPr>
+          <a:xfrm>
+            <a:off x="457200" y="3529584"/>
+            <a:ext cx="8229600" cy="365760"/>
+          </a:xfrm>
+          <a:prstGeom prst="rect">
+            <a:avLst/>
+          </a:prstGeom>
+          <a:solidFill>
+            <a:srgbClr val="E3F2FD"/>
+          </a:solidFill>
+          <a:ln/>
+        </p:spPr>
+      </p:sp>
+      <p:sp>
+        <p:nvSpPr>
+          <p:cNvPr id="26" name="Shape 24"/>
+          <p:cNvSpPr/>
+          <p:nvPr/>
+        </p:nvSpPr>
+        <p:spPr>
+          <a:xfrm>
+            <a:off x="457200" y="3529584"/>
+            <a:ext cx="45720" cy="365760"/>
+          </a:xfrm>
+          <a:prstGeom prst="rect">
+            <a:avLst/>
+          </a:prstGeom>
+          <a:solidFill>
+            <a:srgbClr val="1565C0"/>
+          </a:solidFill>
+          <a:ln/>
+        </p:spPr>
+      </p:sp>
+      <p:sp>
+        <p:nvSpPr>
+          <p:cNvPr id="27" name="Text 25"/>
+          <p:cNvSpPr/>
+          <p:nvPr/>
+        </p:nvSpPr>
+        <p:spPr>
+          <a:xfrm>
+            <a:off x="640080" y="3529584"/>
+            <a:ext cx="7863840" cy="365760"/>
+          </a:xfrm>
+          <a:prstGeom prst="rect">
+            <a:avLst/>
+          </a:prstGeom>
+          <a:noFill/>
+          <a:ln/>
+        </p:spPr>
+        <p:txBody>
+          <a:bodyPr wrap="square" lIns="0" tIns="0" rIns="0" bIns="0" rtlCol="0" anchor="ctr"/>
+          <a:lstStyle/>
+          <a:p>
+            <a:pPr indent="0" marL="0">
+              <a:buNone/>
+            </a:pPr>
+            <a:r>
+              <a:rPr lang="en-US" sz="1100" dirty="0">
+                <a:solidFill>
+                  <a:srgbClr val="1A1A2E"/>
+                </a:solidFill>
+                <a:latin typeface="Calibri" pitchFamily="34" charset="0"/>
+                <a:ea typeface="Calibri" pitchFamily="34" charset="-122"/>
+                <a:cs typeface="Calibri" pitchFamily="34" charset="-120"/>
+              </a:rPr>
+              <a:t>  5. CA mensuel 2025 (GROUP BY YEAR, MONTH)</a:t>
+            </a:r>
+            <a:endParaRPr lang="en-US" sz="1100" dirty="0"/>
+          </a:p>
+        </p:txBody>
+      </p:sp>
+      <p:sp>
+        <p:nvSpPr>
+          <p:cNvPr id="28" name="Shape 26"/>
+          <p:cNvSpPr/>
+          <p:nvPr/>
+        </p:nvSpPr>
+        <p:spPr>
+          <a:xfrm>
+            <a:off x="457200" y="3922776"/>
+            <a:ext cx="8229600" cy="365760"/>
+          </a:xfrm>
+          <a:prstGeom prst="rect">
+            <a:avLst/>
+          </a:prstGeom>
+          <a:solidFill>
+            <a:srgbClr val="FFFFFF"/>
+          </a:solidFill>
+          <a:ln/>
+        </p:spPr>
+      </p:sp>
+      <p:sp>
+        <p:nvSpPr>
+          <p:cNvPr id="29" name="Shape 27"/>
+          <p:cNvSpPr/>
+          <p:nvPr/>
+        </p:nvSpPr>
+        <p:spPr>
+          <a:xfrm>
+            <a:off x="457200" y="3922776"/>
+            <a:ext cx="45720" cy="365760"/>
+          </a:xfrm>
+          <a:prstGeom prst="rect">
+            <a:avLst/>
+          </a:prstGeom>
+          <a:solidFill>
+            <a:srgbClr val="1565C0"/>
+          </a:solidFill>
+          <a:ln/>
+        </p:spPr>
+      </p:sp>
+      <p:sp>
+        <p:nvSpPr>
+          <p:cNvPr id="30" name="Text 28"/>
+          <p:cNvSpPr/>
+          <p:nvPr/>
+        </p:nvSpPr>
+        <p:spPr>
+          <a:xfrm>
+            <a:off x="640080" y="3922776"/>
+            <a:ext cx="7863840" cy="365760"/>
+          </a:xfrm>
+          <a:prstGeom prst="rect">
+            <a:avLst/>
+          </a:prstGeom>
+          <a:noFill/>
+          <a:ln/>
+        </p:spPr>
+        <p:txBody>
+          <a:bodyPr wrap="square" lIns="0" tIns="0" rIns="0" bIns="0" rtlCol="0" anchor="ctr"/>
+          <a:lstStyle/>
+          <a:p>
+            <a:pPr indent="0" marL="0">
+              <a:buNone/>
+            </a:pPr>
+            <a:r>
+              <a:rPr lang="en-US" sz="1100" dirty="0">
+                <a:solidFill>
+                  <a:srgbClr val="1A1A2E"/>
+                </a:solidFill>
+                <a:latin typeface="Calibri" pitchFamily="34" charset="0"/>
+                <a:ea typeface="Calibri" pitchFamily="34" charset="-122"/>
+                <a:cs typeface="Calibri" pitchFamily="34" charset="-120"/>
+              </a:rPr>
+              <a:t>  6. Dashboard SQL : 5 KPI en UNION ALL</a:t>
+            </a:r>
+            <a:endParaRPr lang="en-US" sz="1100" dirty="0"/>
+          </a:p>
+        </p:txBody>
+      </p:sp>
+      <p:sp>
+        <p:nvSpPr>
+          <p:cNvPr id="31" name="Shape 29"/>
+          <p:cNvSpPr/>
+          <p:nvPr/>
+        </p:nvSpPr>
+        <p:spPr>
+          <a:xfrm>
+            <a:off x="457200" y="4315968"/>
+            <a:ext cx="8229600" cy="365760"/>
+          </a:xfrm>
+          <a:prstGeom prst="rect">
+            <a:avLst/>
+          </a:prstGeom>
+          <a:solidFill>
+            <a:srgbClr val="E3F2FD"/>
+          </a:solidFill>
+          <a:ln/>
+        </p:spPr>
+      </p:sp>
+      <p:sp>
+        <p:nvSpPr>
+          <p:cNvPr id="32" name="Shape 30"/>
+          <p:cNvSpPr/>
+          <p:nvPr/>
+        </p:nvSpPr>
+        <p:spPr>
+          <a:xfrm>
+            <a:off x="457200" y="4315968"/>
+            <a:ext cx="45720" cy="365760"/>
+          </a:xfrm>
+          <a:prstGeom prst="rect">
+            <a:avLst/>
+          </a:prstGeom>
+          <a:solidFill>
+            <a:srgbClr val="1565C0"/>
+          </a:solidFill>
+          <a:ln/>
+        </p:spPr>
+      </p:sp>
+      <p:sp>
+        <p:nvSpPr>
+          <p:cNvPr id="33" name="Text 31"/>
+          <p:cNvSpPr/>
+          <p:nvPr/>
+        </p:nvSpPr>
+        <p:spPr>
+          <a:xfrm>
+            <a:off x="640080" y="4315968"/>
+            <a:ext cx="7863840" cy="365760"/>
+          </a:xfrm>
+          <a:prstGeom prst="rect">
+            <a:avLst/>
+          </a:prstGeom>
+          <a:noFill/>
+          <a:ln/>
+        </p:spPr>
+        <p:txBody>
+          <a:bodyPr wrap="square" lIns="0" tIns="0" rIns="0" bIns="0" rtlCol="0" anchor="ctr"/>
+          <a:lstStyle/>
+          <a:p>
+            <a:pPr indent="0" marL="0">
+              <a:buNone/>
+            </a:pPr>
+            <a:r>
+              <a:rPr lang="en-US" sz="1100" dirty="0">
+                <a:solidFill>
+                  <a:srgbClr val="1A1A2E"/>
+                </a:solidFill>
+                <a:latin typeface="Calibri" pitchFamily="34" charset="0"/>
+                <a:ea typeface="Calibri" pitchFamily="34" charset="-122"/>
+                <a:cs typeface="Calibri" pitchFamily="34" charset="-120"/>
+              </a:rPr>
+              <a:t>DEFI : sous-requete pour trouver l'artiste avec le plus de sessions</a:t>
+            </a:r>
+            <a:endParaRPr lang="en-US" sz="1100" dirty="0"/>
+          </a:p>
+        </p:txBody>
+      </p:sp>
+    </p:spTree>
+  </p:cSld>
+  <p:clrMapOvr>
+    <a:masterClrMapping/>
+  </p:clrMapOvr>
+</p:sld>
+</file>
+
+<file path=ppt/slides/slide9.xml><?xml version="1.0" encoding="utf-8"?>
+<p:sld xmlns:a="http://schemas.openxmlformats.org/drawingml/2006/main" xmlns:r="http://schemas.openxmlformats.org/officeDocument/2006/relationships" xmlns:p="http://schemas.openxmlformats.org/presentationml/2006/main">
+  <p:cSld name="Slide 9">
     <p:bg>
       <p:bgPr>
         <a:solidFill>
@@ -6071,8 +8269,8 @@
         </p:nvSpPr>
         <p:spPr>
           <a:xfrm>
-            <a:off x="3840480" y="457200"/>
-            <a:ext cx="1463040" cy="1097280"/>
+            <a:off x="457200" y="1828800"/>
+            <a:ext cx="8229600" cy="548640"/>
           </a:xfrm>
           <a:prstGeom prst="rect">
             <a:avLst/>
@@ -6088,43 +8286,7 @@
               <a:buNone/>
             </a:pPr>
             <a:r>
-              <a:rPr lang="en-US" sz="6000" dirty="0">
-                <a:solidFill>
-                  <a:srgbClr val="000000"/>
-                </a:solidFill>
-              </a:rPr>
-              <a:t>🎮</a:t>
-            </a:r>
-            <a:endParaRPr lang="en-US" sz="6000" dirty="0"/>
-          </a:p>
-        </p:txBody>
-      </p:sp>
-      <p:sp>
-        <p:nvSpPr>
-          <p:cNvPr id="3" name="Text 1"/>
-          <p:cNvSpPr/>
-          <p:nvPr/>
-        </p:nvSpPr>
-        <p:spPr>
-          <a:xfrm>
-            <a:off x="457200" y="1645920"/>
-            <a:ext cx="8229600" cy="548640"/>
-          </a:xfrm>
-          <a:prstGeom prst="rect">
-            <a:avLst/>
-          </a:prstGeom>
-          <a:noFill/>
-          <a:ln/>
-        </p:spPr>
-        <p:txBody>
-          <a:bodyPr wrap="square" lIns="0" tIns="0" rIns="0" bIns="0" rtlCol="0" anchor="ctr"/>
-          <a:lstStyle/>
-          <a:p>
-            <a:pPr algn="ctr" indent="0" marL="0">
-              <a:buNone/>
-            </a:pPr>
-            <a:r>
-              <a:rPr lang="en-US" sz="2600" b="1" dirty="0">
+              <a:rPr lang="en-US" sz="2200" b="1" dirty="0">
                 <a:solidFill>
                   <a:srgbClr val="FFFFFF"/>
                 </a:solidFill>
@@ -6134,20 +8296,20 @@
               </a:rPr>
               <a:t>Mini-jeu : Le Comptable Fou</a:t>
             </a:r>
-            <a:endParaRPr lang="en-US" sz="2600" dirty="0"/>
-          </a:p>
-        </p:txBody>
-      </p:sp>
-      <p:sp>
-        <p:nvSpPr>
-          <p:cNvPr id="4" name="Text 2"/>
-          <p:cNvSpPr/>
-          <p:nvPr/>
-        </p:nvSpPr>
-        <p:spPr>
-          <a:xfrm>
-            <a:off x="1371600" y="2286000"/>
-            <a:ext cx="6400800" cy="731520"/>
+            <a:endParaRPr lang="en-US" sz="2200" dirty="0"/>
+          </a:p>
+        </p:txBody>
+      </p:sp>
+      <p:sp>
+        <p:nvSpPr>
+          <p:cNvPr id="3" name="Text 1"/>
+          <p:cNvSpPr/>
+          <p:nvPr/>
+        </p:nvSpPr>
+        <p:spPr>
+          <a:xfrm>
+            <a:off x="1371600" y="2468880"/>
+            <a:ext cx="6400800" cy="457200"/>
           </a:xfrm>
           <a:prstGeom prst="rect">
             <a:avLst/>
@@ -6163,7 +8325,7 @@
               <a:buNone/>
             </a:pPr>
             <a:r>
-              <a:rPr lang="en-US" sz="1400" dirty="0">
+              <a:rPr lang="en-US" sz="1300" dirty="0">
                 <a:solidFill>
                   <a:srgbClr val="CCCCCC"/>
                 </a:solidFill>
@@ -6173,904 +8335,7 @@
               </a:rPr>
               <a:t>Calculez les bons totaux pour SwissSound !</a:t>
             </a:r>
-            <a:endParaRPr lang="en-US" sz="1400" dirty="0"/>
-          </a:p>
-        </p:txBody>
-      </p:sp>
-      <p:sp>
-        <p:nvSpPr>
-          <p:cNvPr id="5" name="Shape 3"/>
-          <p:cNvSpPr/>
-          <p:nvPr/>
-        </p:nvSpPr>
-        <p:spPr>
-          <a:xfrm>
-            <a:off x="2286000" y="3291840"/>
-            <a:ext cx="4572000" cy="548640"/>
-          </a:xfrm>
-          <a:prstGeom prst="rect">
-            <a:avLst/>
-          </a:prstGeom>
-          <a:solidFill>
-            <a:srgbClr val="FF6F00"/>
-          </a:solidFill>
-          <a:ln/>
-        </p:spPr>
-      </p:sp>
-      <p:sp>
-        <p:nvSpPr>
-          <p:cNvPr id="6" name="Text 4"/>
-          <p:cNvSpPr/>
-          <p:nvPr/>
-        </p:nvSpPr>
-        <p:spPr>
-          <a:xfrm>
-            <a:off x="2286000" y="3291840"/>
-            <a:ext cx="4572000" cy="548640"/>
-          </a:xfrm>
-          <a:prstGeom prst="rect">
-            <a:avLst/>
-          </a:prstGeom>
-          <a:noFill/>
-          <a:ln/>
-        </p:spPr>
-        <p:txBody>
-          <a:bodyPr wrap="square" lIns="0" tIns="0" rIns="0" bIns="0" rtlCol="0" anchor="ctr"/>
-          <a:lstStyle/>
-          <a:p>
-            <a:pPr algn="ctr" indent="0" marL="0">
-              <a:buNone/>
-            </a:pPr>
-            <a:r>
-              <a:rPr lang="en-US" sz="1800" b="1" dirty="0">
-                <a:solidFill>
-                  <a:srgbClr val="FFFFFF"/>
-                </a:solidFill>
-                <a:latin typeface="Trebuchet MS" pitchFamily="34" charset="0"/>
-                <a:ea typeface="Trebuchet MS" pitchFamily="34" charset="-122"/>
-                <a:cs typeface="Trebuchet MS" pitchFamily="34" charset="-120"/>
-              </a:rPr>
-              <a:t>▶  Lancer le jeu</a:t>
-            </a:r>
-            <a:endParaRPr lang="en-US" sz="1800" dirty="0"/>
-          </a:p>
-        </p:txBody>
-      </p:sp>
-    </p:spTree>
-  </p:cSld>
-  <p:clrMapOvr>
-    <a:masterClrMapping/>
-  </p:clrMapOvr>
-</p:sld>
-</file>
-
-<file path=ppt/slides/slide9.xml><?xml version="1.0" encoding="utf-8"?>
-<p:sld xmlns:a="http://schemas.openxmlformats.org/drawingml/2006/main" xmlns:r="http://schemas.openxmlformats.org/officeDocument/2006/relationships" xmlns:p="http://schemas.openxmlformats.org/presentationml/2006/main">
-  <p:cSld name="Slide 9">
-    <p:bg>
-      <p:bgPr>
-        <a:solidFill>
-          <a:srgbClr val="F5F7FA"/>
-        </a:solidFill>
-      </p:bgPr>
-    </p:bg>
-    <p:spTree>
-      <p:nvGrpSpPr>
-        <p:cNvPr id="1" name=""/>
-        <p:cNvGrpSpPr/>
-        <p:nvPr/>
-      </p:nvGrpSpPr>
-      <p:grpSpPr>
-        <a:xfrm>
-          <a:off x="0" y="0"/>
-          <a:ext cx="0" cy="0"/>
-          <a:chOff x="0" y="0"/>
-          <a:chExt cx="0" cy="0"/>
-        </a:xfrm>
-      </p:grpSpPr>
-      <p:sp>
-        <p:nvSpPr>
-          <p:cNvPr id="2" name="Text 0"/>
-          <p:cNvSpPr/>
-          <p:nvPr/>
-        </p:nvSpPr>
-        <p:spPr>
-          <a:xfrm>
-            <a:off x="457200" y="137160"/>
-            <a:ext cx="5486400" cy="411480"/>
-          </a:xfrm>
-          <a:prstGeom prst="rect">
-            <a:avLst/>
-          </a:prstGeom>
-          <a:noFill/>
-          <a:ln/>
-        </p:spPr>
-        <p:txBody>
-          <a:bodyPr wrap="square" lIns="0" tIns="0" rIns="0" bIns="0" rtlCol="0" anchor="ctr"/>
-          <a:lstStyle/>
-          <a:p>
-            <a:pPr indent="0" marL="0">
-              <a:buNone/>
-            </a:pPr>
-            <a:r>
-              <a:rPr lang="en-US" sz="1800" b="1" dirty="0">
-                <a:solidFill>
-                  <a:srgbClr val="0D47A1"/>
-                </a:solidFill>
-                <a:latin typeface="Trebuchet MS" pitchFamily="34" charset="0"/>
-                <a:ea typeface="Trebuchet MS" pitchFamily="34" charset="-122"/>
-                <a:cs typeface="Trebuchet MS" pitchFamily="34" charset="-120"/>
-              </a:rPr>
-              <a:t>📋 Mémo Module 13</a:t>
-            </a:r>
-            <a:endParaRPr lang="en-US" sz="1800" dirty="0"/>
-          </a:p>
-        </p:txBody>
-      </p:sp>
-      <p:sp>
-        <p:nvSpPr>
-          <p:cNvPr id="3" name="Shape 1"/>
-          <p:cNvSpPr/>
-          <p:nvPr/>
-        </p:nvSpPr>
-        <p:spPr>
-          <a:xfrm>
-            <a:off x="457200" y="548640"/>
-            <a:ext cx="8229600" cy="274320"/>
-          </a:xfrm>
-          <a:prstGeom prst="rect">
-            <a:avLst/>
-          </a:prstGeom>
-          <a:solidFill>
-            <a:srgbClr val="FFF3E0"/>
-          </a:solidFill>
-          <a:ln/>
-        </p:spPr>
-      </p:sp>
-      <p:sp>
-        <p:nvSpPr>
-          <p:cNvPr id="4" name="Text 2"/>
-          <p:cNvSpPr/>
-          <p:nvPr/>
-        </p:nvSpPr>
-        <p:spPr>
-          <a:xfrm>
-            <a:off x="640080" y="548640"/>
-            <a:ext cx="7772400" cy="274320"/>
-          </a:xfrm>
-          <a:prstGeom prst="rect">
-            <a:avLst/>
-          </a:prstGeom>
-          <a:noFill/>
-          <a:ln/>
-        </p:spPr>
-        <p:txBody>
-          <a:bodyPr wrap="square" lIns="0" tIns="0" rIns="0" bIns="0" rtlCol="0" anchor="ctr"/>
-          <a:lstStyle/>
-          <a:p>
-            <a:pPr indent="0" marL="0">
-              <a:buNone/>
-            </a:pPr>
-            <a:r>
-              <a:rPr lang="en-US" sz="900" b="1" dirty="0">
-                <a:solidFill>
-                  <a:srgbClr val="E65100"/>
-                </a:solidFill>
-                <a:latin typeface="Calibri" pitchFamily="34" charset="0"/>
-                <a:ea typeface="Calibri" pitchFamily="34" charset="-122"/>
-                <a:cs typeface="Calibri" pitchFamily="34" charset="-120"/>
-              </a:rPr>
-              <a:t>🔒 Déblocable après complétion</a:t>
-            </a:r>
-            <a:endParaRPr lang="en-US" sz="900" dirty="0"/>
-          </a:p>
-        </p:txBody>
-      </p:sp>
-      <p:sp>
-        <p:nvSpPr>
-          <p:cNvPr id="5" name="Shape 3"/>
-          <p:cNvSpPr/>
-          <p:nvPr/>
-        </p:nvSpPr>
-        <p:spPr>
-          <a:xfrm>
-            <a:off x="457200" y="960120"/>
-            <a:ext cx="2286000" cy="475488"/>
-          </a:xfrm>
-          <a:prstGeom prst="rect">
-            <a:avLst/>
-          </a:prstGeom>
-          <a:solidFill>
-            <a:srgbClr val="E3F2FD"/>
-          </a:solidFill>
-          <a:ln/>
-        </p:spPr>
-      </p:sp>
-      <p:sp>
-        <p:nvSpPr>
-          <p:cNvPr id="6" name="Text 4"/>
-          <p:cNvSpPr/>
-          <p:nvPr/>
-        </p:nvSpPr>
-        <p:spPr>
-          <a:xfrm>
-            <a:off x="548640" y="960120"/>
-            <a:ext cx="2103120" cy="475488"/>
-          </a:xfrm>
-          <a:prstGeom prst="rect">
-            <a:avLst/>
-          </a:prstGeom>
-          <a:noFill/>
-          <a:ln/>
-        </p:spPr>
-        <p:txBody>
-          <a:bodyPr wrap="square" lIns="0" tIns="0" rIns="0" bIns="0" rtlCol="0" anchor="ctr"/>
-          <a:lstStyle/>
-          <a:p>
-            <a:pPr indent="0" marL="0">
-              <a:buNone/>
-            </a:pPr>
-            <a:r>
-              <a:rPr lang="en-US" sz="900" b="1" dirty="0">
-                <a:solidFill>
-                  <a:srgbClr val="0D47A1"/>
-                </a:solidFill>
-                <a:latin typeface="Trebuchet MS" pitchFamily="34" charset="0"/>
-                <a:ea typeface="Trebuchet MS" pitchFamily="34" charset="-122"/>
-                <a:cs typeface="Trebuchet MS" pitchFamily="34" charset="-120"/>
-              </a:rPr>
-              <a:t>COUNT(*) vs COUNT(col)</a:t>
-            </a:r>
-            <a:endParaRPr lang="en-US" sz="900" dirty="0"/>
-          </a:p>
-        </p:txBody>
-      </p:sp>
-      <p:sp>
-        <p:nvSpPr>
-          <p:cNvPr id="7" name="Shape 5"/>
-          <p:cNvSpPr/>
-          <p:nvPr/>
-        </p:nvSpPr>
-        <p:spPr>
-          <a:xfrm>
-            <a:off x="2743200" y="960120"/>
-            <a:ext cx="5943600" cy="475488"/>
-          </a:xfrm>
-          <a:prstGeom prst="rect">
-            <a:avLst/>
-          </a:prstGeom>
-          <a:solidFill>
-            <a:srgbClr val="E3F2FD"/>
-          </a:solidFill>
-          <a:ln/>
-        </p:spPr>
-      </p:sp>
-      <p:sp>
-        <p:nvSpPr>
-          <p:cNvPr id="8" name="Text 6"/>
-          <p:cNvSpPr/>
-          <p:nvPr/>
-        </p:nvSpPr>
-        <p:spPr>
-          <a:xfrm>
-            <a:off x="2834640" y="960120"/>
-            <a:ext cx="5760720" cy="475488"/>
-          </a:xfrm>
-          <a:prstGeom prst="rect">
-            <a:avLst/>
-          </a:prstGeom>
-          <a:noFill/>
-          <a:ln/>
-        </p:spPr>
-        <p:txBody>
-          <a:bodyPr wrap="square" lIns="0" tIns="0" rIns="0" bIns="0" rtlCol="0" anchor="ctr"/>
-          <a:lstStyle/>
-          <a:p>
-            <a:pPr indent="0" marL="0">
-              <a:buNone/>
-            </a:pPr>
-            <a:r>
-              <a:rPr lang="en-US" sz="900" dirty="0">
-                <a:solidFill>
-                  <a:srgbClr val="333333"/>
-                </a:solidFill>
-                <a:latin typeface="Calibri" pitchFamily="34" charset="0"/>
-                <a:ea typeface="Calibri" pitchFamily="34" charset="-122"/>
-                <a:cs typeface="Calibri" pitchFamily="34" charset="-120"/>
-              </a:rPr>
-              <a:t>* = toutes lignes, col = ignore NULL</a:t>
-            </a:r>
-            <a:endParaRPr lang="en-US" sz="900" dirty="0"/>
-          </a:p>
-        </p:txBody>
-      </p:sp>
-      <p:sp>
-        <p:nvSpPr>
-          <p:cNvPr id="9" name="Shape 7"/>
-          <p:cNvSpPr/>
-          <p:nvPr/>
-        </p:nvSpPr>
-        <p:spPr>
-          <a:xfrm>
-            <a:off x="457200" y="1463040"/>
-            <a:ext cx="2286000" cy="475488"/>
-          </a:xfrm>
-          <a:prstGeom prst="rect">
-            <a:avLst/>
-          </a:prstGeom>
-          <a:solidFill>
-            <a:srgbClr val="F0F0F0"/>
-          </a:solidFill>
-          <a:ln/>
-        </p:spPr>
-      </p:sp>
-      <p:sp>
-        <p:nvSpPr>
-          <p:cNvPr id="10" name="Text 8"/>
-          <p:cNvSpPr/>
-          <p:nvPr/>
-        </p:nvSpPr>
-        <p:spPr>
-          <a:xfrm>
-            <a:off x="548640" y="1463040"/>
-            <a:ext cx="2103120" cy="475488"/>
-          </a:xfrm>
-          <a:prstGeom prst="rect">
-            <a:avLst/>
-          </a:prstGeom>
-          <a:noFill/>
-          <a:ln/>
-        </p:spPr>
-        <p:txBody>
-          <a:bodyPr wrap="square" lIns="0" tIns="0" rIns="0" bIns="0" rtlCol="0" anchor="ctr"/>
-          <a:lstStyle/>
-          <a:p>
-            <a:pPr indent="0" marL="0">
-              <a:buNone/>
-            </a:pPr>
-            <a:r>
-              <a:rPr lang="en-US" sz="900" b="1" dirty="0">
-                <a:solidFill>
-                  <a:srgbClr val="0D47A1"/>
-                </a:solidFill>
-                <a:latin typeface="Trebuchet MS" pitchFamily="34" charset="0"/>
-                <a:ea typeface="Trebuchet MS" pitchFamily="34" charset="-122"/>
-                <a:cs typeface="Trebuchet MS" pitchFamily="34" charset="-120"/>
-              </a:rPr>
-              <a:t>GROUP BY</a:t>
-            </a:r>
-            <a:endParaRPr lang="en-US" sz="900" dirty="0"/>
-          </a:p>
-        </p:txBody>
-      </p:sp>
-      <p:sp>
-        <p:nvSpPr>
-          <p:cNvPr id="11" name="Shape 9"/>
-          <p:cNvSpPr/>
-          <p:nvPr/>
-        </p:nvSpPr>
-        <p:spPr>
-          <a:xfrm>
-            <a:off x="2743200" y="1463040"/>
-            <a:ext cx="5943600" cy="475488"/>
-          </a:xfrm>
-          <a:prstGeom prst="rect">
-            <a:avLst/>
-          </a:prstGeom>
-          <a:solidFill>
-            <a:srgbClr val="F0F0F0"/>
-          </a:solidFill>
-          <a:ln/>
-        </p:spPr>
-      </p:sp>
-      <p:sp>
-        <p:nvSpPr>
-          <p:cNvPr id="12" name="Text 10"/>
-          <p:cNvSpPr/>
-          <p:nvPr/>
-        </p:nvSpPr>
-        <p:spPr>
-          <a:xfrm>
-            <a:off x="2834640" y="1463040"/>
-            <a:ext cx="5760720" cy="475488"/>
-          </a:xfrm>
-          <a:prstGeom prst="rect">
-            <a:avLst/>
-          </a:prstGeom>
-          <a:noFill/>
-          <a:ln/>
-        </p:spPr>
-        <p:txBody>
-          <a:bodyPr wrap="square" lIns="0" tIns="0" rIns="0" bIns="0" rtlCol="0" anchor="ctr"/>
-          <a:lstStyle/>
-          <a:p>
-            <a:pPr indent="0" marL="0">
-              <a:buNone/>
-            </a:pPr>
-            <a:r>
-              <a:rPr lang="en-US" sz="900" dirty="0">
-                <a:solidFill>
-                  <a:srgbClr val="333333"/>
-                </a:solidFill>
-                <a:latin typeface="Calibri" pitchFamily="34" charset="0"/>
-                <a:ea typeface="Calibri" pitchFamily="34" charset="-122"/>
-                <a:cs typeface="Calibri" pitchFamily="34" charset="-120"/>
-              </a:rPr>
-              <a:t>Obligatoire si SELECT mélange agrégation + colonnes normales</a:t>
-            </a:r>
-            <a:endParaRPr lang="en-US" sz="900" dirty="0"/>
-          </a:p>
-        </p:txBody>
-      </p:sp>
-      <p:sp>
-        <p:nvSpPr>
-          <p:cNvPr id="13" name="Shape 11"/>
-          <p:cNvSpPr/>
-          <p:nvPr/>
-        </p:nvSpPr>
-        <p:spPr>
-          <a:xfrm>
-            <a:off x="457200" y="1965960"/>
-            <a:ext cx="2286000" cy="475488"/>
-          </a:xfrm>
-          <a:prstGeom prst="rect">
-            <a:avLst/>
-          </a:prstGeom>
-          <a:solidFill>
-            <a:srgbClr val="E3F2FD"/>
-          </a:solidFill>
-          <a:ln/>
-        </p:spPr>
-      </p:sp>
-      <p:sp>
-        <p:nvSpPr>
-          <p:cNvPr id="14" name="Text 12"/>
-          <p:cNvSpPr/>
-          <p:nvPr/>
-        </p:nvSpPr>
-        <p:spPr>
-          <a:xfrm>
-            <a:off x="548640" y="1965960"/>
-            <a:ext cx="2103120" cy="475488"/>
-          </a:xfrm>
-          <a:prstGeom prst="rect">
-            <a:avLst/>
-          </a:prstGeom>
-          <a:noFill/>
-          <a:ln/>
-        </p:spPr>
-        <p:txBody>
-          <a:bodyPr wrap="square" lIns="0" tIns="0" rIns="0" bIns="0" rtlCol="0" anchor="ctr"/>
-          <a:lstStyle/>
-          <a:p>
-            <a:pPr indent="0" marL="0">
-              <a:buNone/>
-            </a:pPr>
-            <a:r>
-              <a:rPr lang="en-US" sz="900" b="1" dirty="0">
-                <a:solidFill>
-                  <a:srgbClr val="0D47A1"/>
-                </a:solidFill>
-                <a:latin typeface="Trebuchet MS" pitchFamily="34" charset="0"/>
-                <a:ea typeface="Trebuchet MS" pitchFamily="34" charset="-122"/>
-                <a:cs typeface="Trebuchet MS" pitchFamily="34" charset="-120"/>
-              </a:rPr>
-              <a:t>HAVING</a:t>
-            </a:r>
-            <a:endParaRPr lang="en-US" sz="900" dirty="0"/>
-          </a:p>
-        </p:txBody>
-      </p:sp>
-      <p:sp>
-        <p:nvSpPr>
-          <p:cNvPr id="15" name="Shape 13"/>
-          <p:cNvSpPr/>
-          <p:nvPr/>
-        </p:nvSpPr>
-        <p:spPr>
-          <a:xfrm>
-            <a:off x="2743200" y="1965960"/>
-            <a:ext cx="5943600" cy="475488"/>
-          </a:xfrm>
-          <a:prstGeom prst="rect">
-            <a:avLst/>
-          </a:prstGeom>
-          <a:solidFill>
-            <a:srgbClr val="E3F2FD"/>
-          </a:solidFill>
-          <a:ln/>
-        </p:spPr>
-      </p:sp>
-      <p:sp>
-        <p:nvSpPr>
-          <p:cNvPr id="16" name="Text 14"/>
-          <p:cNvSpPr/>
-          <p:nvPr/>
-        </p:nvSpPr>
-        <p:spPr>
-          <a:xfrm>
-            <a:off x="2834640" y="1965960"/>
-            <a:ext cx="5760720" cy="475488"/>
-          </a:xfrm>
-          <a:prstGeom prst="rect">
-            <a:avLst/>
-          </a:prstGeom>
-          <a:noFill/>
-          <a:ln/>
-        </p:spPr>
-        <p:txBody>
-          <a:bodyPr wrap="square" lIns="0" tIns="0" rIns="0" bIns="0" rtlCol="0" anchor="ctr"/>
-          <a:lstStyle/>
-          <a:p>
-            <a:pPr indent="0" marL="0">
-              <a:buNone/>
-            </a:pPr>
-            <a:r>
-              <a:rPr lang="en-US" sz="900" dirty="0">
-                <a:solidFill>
-                  <a:srgbClr val="333333"/>
-                </a:solidFill>
-                <a:latin typeface="Calibri" pitchFamily="34" charset="0"/>
-                <a:ea typeface="Calibri" pitchFamily="34" charset="-122"/>
-                <a:cs typeface="Calibri" pitchFamily="34" charset="-120"/>
-              </a:rPr>
-              <a:t>Filtre les GROUPES (après agrégation). WHERE filtre les LIGNES (avant)</a:t>
-            </a:r>
-            <a:endParaRPr lang="en-US" sz="900" dirty="0"/>
-          </a:p>
-        </p:txBody>
-      </p:sp>
-      <p:sp>
-        <p:nvSpPr>
-          <p:cNvPr id="17" name="Shape 15"/>
-          <p:cNvSpPr/>
-          <p:nvPr/>
-        </p:nvSpPr>
-        <p:spPr>
-          <a:xfrm>
-            <a:off x="457200" y="2468880"/>
-            <a:ext cx="2286000" cy="475488"/>
-          </a:xfrm>
-          <a:prstGeom prst="rect">
-            <a:avLst/>
-          </a:prstGeom>
-          <a:solidFill>
-            <a:srgbClr val="F0F0F0"/>
-          </a:solidFill>
-          <a:ln/>
-        </p:spPr>
-      </p:sp>
-      <p:sp>
-        <p:nvSpPr>
-          <p:cNvPr id="18" name="Text 16"/>
-          <p:cNvSpPr/>
-          <p:nvPr/>
-        </p:nvSpPr>
-        <p:spPr>
-          <a:xfrm>
-            <a:off x="548640" y="2468880"/>
-            <a:ext cx="2103120" cy="475488"/>
-          </a:xfrm>
-          <a:prstGeom prst="rect">
-            <a:avLst/>
-          </a:prstGeom>
-          <a:noFill/>
-          <a:ln/>
-        </p:spPr>
-        <p:txBody>
-          <a:bodyPr wrap="square" lIns="0" tIns="0" rIns="0" bIns="0" rtlCol="0" anchor="ctr"/>
-          <a:lstStyle/>
-          <a:p>
-            <a:pPr indent="0" marL="0">
-              <a:buNone/>
-            </a:pPr>
-            <a:r>
-              <a:rPr lang="en-US" sz="900" b="1" dirty="0">
-                <a:solidFill>
-                  <a:srgbClr val="0D47A1"/>
-                </a:solidFill>
-                <a:latin typeface="Trebuchet MS" pitchFamily="34" charset="0"/>
-                <a:ea typeface="Trebuchet MS" pitchFamily="34" charset="-122"/>
-                <a:cs typeface="Trebuchet MS" pitchFamily="34" charset="-120"/>
-              </a:rPr>
-              <a:t>Ordre SQL</a:t>
-            </a:r>
-            <a:endParaRPr lang="en-US" sz="900" dirty="0"/>
-          </a:p>
-        </p:txBody>
-      </p:sp>
-      <p:sp>
-        <p:nvSpPr>
-          <p:cNvPr id="19" name="Shape 17"/>
-          <p:cNvSpPr/>
-          <p:nvPr/>
-        </p:nvSpPr>
-        <p:spPr>
-          <a:xfrm>
-            <a:off x="2743200" y="2468880"/>
-            <a:ext cx="5943600" cy="475488"/>
-          </a:xfrm>
-          <a:prstGeom prst="rect">
-            <a:avLst/>
-          </a:prstGeom>
-          <a:solidFill>
-            <a:srgbClr val="F0F0F0"/>
-          </a:solidFill>
-          <a:ln/>
-        </p:spPr>
-      </p:sp>
-      <p:sp>
-        <p:nvSpPr>
-          <p:cNvPr id="20" name="Text 18"/>
-          <p:cNvSpPr/>
-          <p:nvPr/>
-        </p:nvSpPr>
-        <p:spPr>
-          <a:xfrm>
-            <a:off x="2834640" y="2468880"/>
-            <a:ext cx="5760720" cy="475488"/>
-          </a:xfrm>
-          <a:prstGeom prst="rect">
-            <a:avLst/>
-          </a:prstGeom>
-          <a:noFill/>
-          <a:ln/>
-        </p:spPr>
-        <p:txBody>
-          <a:bodyPr wrap="square" lIns="0" tIns="0" rIns="0" bIns="0" rtlCol="0" anchor="ctr"/>
-          <a:lstStyle/>
-          <a:p>
-            <a:pPr indent="0" marL="0">
-              <a:buNone/>
-            </a:pPr>
-            <a:r>
-              <a:rPr lang="en-US" sz="900" dirty="0">
-                <a:solidFill>
-                  <a:srgbClr val="333333"/>
-                </a:solidFill>
-                <a:latin typeface="Calibri" pitchFamily="34" charset="0"/>
-                <a:ea typeface="Calibri" pitchFamily="34" charset="-122"/>
-                <a:cs typeface="Calibri" pitchFamily="34" charset="-120"/>
-              </a:rPr>
-              <a:t>FROM→WHERE→GROUP BY→HAVING→SELECT→ORDER BY→LIMIT</a:t>
-            </a:r>
-            <a:endParaRPr lang="en-US" sz="900" dirty="0"/>
-          </a:p>
-        </p:txBody>
-      </p:sp>
-      <p:sp>
-        <p:nvSpPr>
-          <p:cNvPr id="21" name="Shape 19"/>
-          <p:cNvSpPr/>
-          <p:nvPr/>
-        </p:nvSpPr>
-        <p:spPr>
-          <a:xfrm>
-            <a:off x="457200" y="2971800"/>
-            <a:ext cx="2286000" cy="475488"/>
-          </a:xfrm>
-          <a:prstGeom prst="rect">
-            <a:avLst/>
-          </a:prstGeom>
-          <a:solidFill>
-            <a:srgbClr val="E3F2FD"/>
-          </a:solidFill>
-          <a:ln/>
-        </p:spPr>
-      </p:sp>
-      <p:sp>
-        <p:nvSpPr>
-          <p:cNvPr id="22" name="Text 20"/>
-          <p:cNvSpPr/>
-          <p:nvPr/>
-        </p:nvSpPr>
-        <p:spPr>
-          <a:xfrm>
-            <a:off x="548640" y="2971800"/>
-            <a:ext cx="2103120" cy="475488"/>
-          </a:xfrm>
-          <a:prstGeom prst="rect">
-            <a:avLst/>
-          </a:prstGeom>
-          <a:noFill/>
-          <a:ln/>
-        </p:spPr>
-        <p:txBody>
-          <a:bodyPr wrap="square" lIns="0" tIns="0" rIns="0" bIns="0" rtlCol="0" anchor="ctr"/>
-          <a:lstStyle/>
-          <a:p>
-            <a:pPr indent="0" marL="0">
-              <a:buNone/>
-            </a:pPr>
-            <a:r>
-              <a:rPr lang="en-US" sz="900" b="1" dirty="0">
-                <a:solidFill>
-                  <a:srgbClr val="0D47A1"/>
-                </a:solidFill>
-                <a:latin typeface="Trebuchet MS" pitchFamily="34" charset="0"/>
-                <a:ea typeface="Trebuchet MS" pitchFamily="34" charset="-122"/>
-                <a:cs typeface="Trebuchet MS" pitchFamily="34" charset="-120"/>
-              </a:rPr>
-              <a:t>Fonctions date</a:t>
-            </a:r>
-            <a:endParaRPr lang="en-US" sz="900" dirty="0"/>
-          </a:p>
-        </p:txBody>
-      </p:sp>
-      <p:sp>
-        <p:nvSpPr>
-          <p:cNvPr id="23" name="Shape 21"/>
-          <p:cNvSpPr/>
-          <p:nvPr/>
-        </p:nvSpPr>
-        <p:spPr>
-          <a:xfrm>
-            <a:off x="2743200" y="2971800"/>
-            <a:ext cx="5943600" cy="475488"/>
-          </a:xfrm>
-          <a:prstGeom prst="rect">
-            <a:avLst/>
-          </a:prstGeom>
-          <a:solidFill>
-            <a:srgbClr val="E3F2FD"/>
-          </a:solidFill>
-          <a:ln/>
-        </p:spPr>
-      </p:sp>
-      <p:sp>
-        <p:nvSpPr>
-          <p:cNvPr id="24" name="Text 22"/>
-          <p:cNvSpPr/>
-          <p:nvPr/>
-        </p:nvSpPr>
-        <p:spPr>
-          <a:xfrm>
-            <a:off x="2834640" y="2971800"/>
-            <a:ext cx="5760720" cy="475488"/>
-          </a:xfrm>
-          <a:prstGeom prst="rect">
-            <a:avLst/>
-          </a:prstGeom>
-          <a:noFill/>
-          <a:ln/>
-        </p:spPr>
-        <p:txBody>
-          <a:bodyPr wrap="square" lIns="0" tIns="0" rIns="0" bIns="0" rtlCol="0" anchor="ctr"/>
-          <a:lstStyle/>
-          <a:p>
-            <a:pPr indent="0" marL="0">
-              <a:buNone/>
-            </a:pPr>
-            <a:r>
-              <a:rPr lang="en-US" sz="900" dirty="0">
-                <a:solidFill>
-                  <a:srgbClr val="333333"/>
-                </a:solidFill>
-                <a:latin typeface="Calibri" pitchFamily="34" charset="0"/>
-                <a:ea typeface="Calibri" pitchFamily="34" charset="-122"/>
-                <a:cs typeface="Calibri" pitchFamily="34" charset="-120"/>
-              </a:rPr>
-              <a:t>YEAR(), MONTH(), NOW(), DATEDIFF(), TIMESTAMPDIFF()</a:t>
-            </a:r>
-            <a:endParaRPr lang="en-US" sz="900" dirty="0"/>
-          </a:p>
-        </p:txBody>
-      </p:sp>
-      <p:sp>
-        <p:nvSpPr>
-          <p:cNvPr id="25" name="Shape 23"/>
-          <p:cNvSpPr/>
-          <p:nvPr/>
-        </p:nvSpPr>
-        <p:spPr>
-          <a:xfrm>
-            <a:off x="457200" y="3474720"/>
-            <a:ext cx="2286000" cy="475488"/>
-          </a:xfrm>
-          <a:prstGeom prst="rect">
-            <a:avLst/>
-          </a:prstGeom>
-          <a:solidFill>
-            <a:srgbClr val="F0F0F0"/>
-          </a:solidFill>
-          <a:ln/>
-        </p:spPr>
-      </p:sp>
-      <p:sp>
-        <p:nvSpPr>
-          <p:cNvPr id="26" name="Text 24"/>
-          <p:cNvSpPr/>
-          <p:nvPr/>
-        </p:nvSpPr>
-        <p:spPr>
-          <a:xfrm>
-            <a:off x="548640" y="3474720"/>
-            <a:ext cx="2103120" cy="475488"/>
-          </a:xfrm>
-          <a:prstGeom prst="rect">
-            <a:avLst/>
-          </a:prstGeom>
-          <a:noFill/>
-          <a:ln/>
-        </p:spPr>
-        <p:txBody>
-          <a:bodyPr wrap="square" lIns="0" tIns="0" rIns="0" bIns="0" rtlCol="0" anchor="ctr"/>
-          <a:lstStyle/>
-          <a:p>
-            <a:pPr indent="0" marL="0">
-              <a:buNone/>
-            </a:pPr>
-            <a:r>
-              <a:rPr lang="en-US" sz="900" b="1" dirty="0">
-                <a:solidFill>
-                  <a:srgbClr val="0D47A1"/>
-                </a:solidFill>
-                <a:latin typeface="Trebuchet MS" pitchFamily="34" charset="0"/>
-                <a:ea typeface="Trebuchet MS" pitchFamily="34" charset="-122"/>
-                <a:cs typeface="Trebuchet MS" pitchFamily="34" charset="-120"/>
-              </a:rPr>
-              <a:t>Sous-requête</a:t>
-            </a:r>
-            <a:endParaRPr lang="en-US" sz="900" dirty="0"/>
-          </a:p>
-        </p:txBody>
-      </p:sp>
-      <p:sp>
-        <p:nvSpPr>
-          <p:cNvPr id="27" name="Shape 25"/>
-          <p:cNvSpPr/>
-          <p:nvPr/>
-        </p:nvSpPr>
-        <p:spPr>
-          <a:xfrm>
-            <a:off x="2743200" y="3474720"/>
-            <a:ext cx="5943600" cy="475488"/>
-          </a:xfrm>
-          <a:prstGeom prst="rect">
-            <a:avLst/>
-          </a:prstGeom>
-          <a:solidFill>
-            <a:srgbClr val="F0F0F0"/>
-          </a:solidFill>
-          <a:ln/>
-        </p:spPr>
-      </p:sp>
-      <p:sp>
-        <p:nvSpPr>
-          <p:cNvPr id="28" name="Text 26"/>
-          <p:cNvSpPr/>
-          <p:nvPr/>
-        </p:nvSpPr>
-        <p:spPr>
-          <a:xfrm>
-            <a:off x="2834640" y="3474720"/>
-            <a:ext cx="5760720" cy="475488"/>
-          </a:xfrm>
-          <a:prstGeom prst="rect">
-            <a:avLst/>
-          </a:prstGeom>
-          <a:noFill/>
-          <a:ln/>
-        </p:spPr>
-        <p:txBody>
-          <a:bodyPr wrap="square" lIns="0" tIns="0" rIns="0" bIns="0" rtlCol="0" anchor="ctr"/>
-          <a:lstStyle/>
-          <a:p>
-            <a:pPr indent="0" marL="0">
-              <a:buNone/>
-            </a:pPr>
-            <a:r>
-              <a:rPr lang="en-US" sz="900" dirty="0">
-                <a:solidFill>
-                  <a:srgbClr val="333333"/>
-                </a:solidFill>
-                <a:latin typeface="Calibri" pitchFamily="34" charset="0"/>
-                <a:ea typeface="Calibri" pitchFamily="34" charset="-122"/>
-                <a:cs typeface="Calibri" pitchFamily="34" charset="-120"/>
-              </a:rPr>
-              <a:t>SELECT dans WHERE : résultat utilisé comme filtre</a:t>
-            </a:r>
-            <a:endParaRPr lang="en-US" sz="900" dirty="0"/>
+            <a:endParaRPr lang="en-US" sz="1300" dirty="0"/>
           </a:p>
         </p:txBody>
       </p:sp>
